--- a/GenAI/wk4-embedding-vectorDB-SemanticSearch-RAG/2_vectorDB_definition_Application.pptx
+++ b/GenAI/wk4-embedding-vectorDB-SemanticSearch-RAG/2_vectorDB_definition_Application.pptx
@@ -5,27 +5,28 @@
     <p:sldMasterId id="2147483648" r:id="rId1"/>
   </p:sldMasterIdLst>
   <p:notesMasterIdLst>
-    <p:notesMasterId r:id="rId17"/>
+    <p:notesMasterId r:id="rId18"/>
   </p:notesMasterIdLst>
   <p:handoutMasterIdLst>
-    <p:handoutMasterId r:id="rId18"/>
+    <p:handoutMasterId r:id="rId19"/>
   </p:handoutMasterIdLst>
   <p:sldIdLst>
     <p:sldId id="257" r:id="rId2"/>
     <p:sldId id="290" r:id="rId3"/>
     <p:sldId id="279" r:id="rId4"/>
     <p:sldId id="280" r:id="rId5"/>
-    <p:sldId id="281" r:id="rId6"/>
-    <p:sldId id="276" r:id="rId7"/>
-    <p:sldId id="293" r:id="rId8"/>
-    <p:sldId id="291" r:id="rId9"/>
-    <p:sldId id="292" r:id="rId10"/>
-    <p:sldId id="289" r:id="rId11"/>
-    <p:sldId id="287" r:id="rId12"/>
-    <p:sldId id="283" r:id="rId13"/>
-    <p:sldId id="288" r:id="rId14"/>
-    <p:sldId id="285" r:id="rId15"/>
-    <p:sldId id="275" r:id="rId16"/>
+    <p:sldId id="294" r:id="rId6"/>
+    <p:sldId id="281" r:id="rId7"/>
+    <p:sldId id="276" r:id="rId8"/>
+    <p:sldId id="293" r:id="rId9"/>
+    <p:sldId id="291" r:id="rId10"/>
+    <p:sldId id="292" r:id="rId11"/>
+    <p:sldId id="289" r:id="rId12"/>
+    <p:sldId id="287" r:id="rId13"/>
+    <p:sldId id="283" r:id="rId14"/>
+    <p:sldId id="288" r:id="rId15"/>
+    <p:sldId id="285" r:id="rId16"/>
+    <p:sldId id="275" r:id="rId17"/>
   </p:sldIdLst>
   <p:sldSz cx="12192000" cy="6858000"/>
   <p:notesSz cx="6858000" cy="9144000"/>
@@ -229,7 +230,7 @@
           <a:p>
             <a:fld id="{7BAEECA8-D063-486F-AE31-5020270C1449}" type="datetimeFigureOut">
               <a:rPr lang="en-US" smtClean="0"/>
-              <a:t>9/5/2026</a:t>
+              <a:t>9/9/2026</a:t>
             </a:fld>
             <a:endParaRPr lang="en-US"/>
           </a:p>
@@ -333,6 +334,426 @@
           <inkml:channel name="X" type="integer" min="-2.14748E9" max="2.14748E9" units="cm"/>
           <inkml:channel name="Y" type="integer" min="-2.14748E9" max="2.14748E9" units="cm"/>
           <inkml:channel name="F" type="integer" max="32767" units="dev"/>
+        </inkml:traceFormat>
+        <inkml:channelProperties>
+          <inkml:channelProperty channel="X" name="resolution" value="1000" units="1/cm"/>
+          <inkml:channelProperty channel="Y" name="resolution" value="1000" units="1/cm"/>
+          <inkml:channelProperty channel="F" name="resolution" value="0" units="1/dev"/>
+        </inkml:channelProperties>
+      </inkml:inkSource>
+      <inkml:timestamp xml:id="ts0" timeString="2026-09-08T17:07:50.190"/>
+    </inkml:context>
+    <inkml:brush xml:id="br0">
+      <inkml:brushProperty name="width" value="0.035" units="cm"/>
+      <inkml:brushProperty name="height" value="0.035" units="cm"/>
+      <inkml:brushProperty name="color" value="#FF0000"/>
+    </inkml:brush>
+  </inkml:definitions>
+  <inkml:trace contextRef="#ctx0" brushRef="#br0">0 0 24575,'5'0'0,"10"0"0,8 10 0,9 2 0,-1 9 0,4 1 0,5 1 0,0 6 0,-2-1 0,2 2 0,4 3 0,-2-1 0,2-6 0,3 2 0,2 2 0,-12-6 0,-11-5-8191</inkml:trace>
+</inkml:ink>
+</file>
+
+<file path=ppt/ink/ink10.xml><?xml version="1.0" encoding="utf-8"?>
+<inkml:ink xmlns:inkml="http://www.w3.org/2003/InkML">
+  <inkml:definitions>
+    <inkml:context xml:id="ctx0">
+      <inkml:inkSource xml:id="inkSrc0">
+        <inkml:traceFormat>
+          <inkml:channel name="X" type="integer" min="-2.14748E9" max="2.14748E9" units="cm"/>
+          <inkml:channel name="Y" type="integer" min="-2.14748E9" max="2.14748E9" units="cm"/>
+          <inkml:channel name="F" type="integer" max="32767" units="dev"/>
+        </inkml:traceFormat>
+        <inkml:channelProperties>
+          <inkml:channelProperty channel="X" name="resolution" value="1000" units="1/cm"/>
+          <inkml:channelProperty channel="Y" name="resolution" value="1000" units="1/cm"/>
+          <inkml:channelProperty channel="F" name="resolution" value="0" units="1/dev"/>
+        </inkml:channelProperties>
+      </inkml:inkSource>
+      <inkml:timestamp xml:id="ts0" timeString="2026-09-08T17:08:19.415"/>
+    </inkml:context>
+    <inkml:brush xml:id="br0">
+      <inkml:brushProperty name="width" value="0.035" units="cm"/>
+      <inkml:brushProperty name="height" value="0.035" units="cm"/>
+      <inkml:brushProperty name="color" value="#FFC114"/>
+    </inkml:brush>
+  </inkml:definitions>
+  <inkml:trace contextRef="#ctx0" brushRef="#br0">257 0 24575,'-9'0'0,"-4"5"0,-3 1 0,0 9 0,-1 12 0,-3 5 0,-7 2 0,1 5 0,5 5 0,-3-6 0,2 1 0,5 3 0,1-1 0,3-8-8191</inkml:trace>
+</inkml:ink>
+</file>
+
+<file path=ppt/ink/ink11.xml><?xml version="1.0" encoding="utf-8"?>
+<inkml:ink xmlns:inkml="http://www.w3.org/2003/InkML">
+  <inkml:definitions>
+    <inkml:context xml:id="ctx0">
+      <inkml:inkSource xml:id="inkSrc0">
+        <inkml:traceFormat>
+          <inkml:channel name="X" type="integer" min="-2.14748E9" max="2.14748E9" units="cm"/>
+          <inkml:channel name="Y" type="integer" min="-2.14748E9" max="2.14748E9" units="cm"/>
+          <inkml:channel name="F" type="integer" max="32767" units="dev"/>
+        </inkml:traceFormat>
+        <inkml:channelProperties>
+          <inkml:channelProperty channel="X" name="resolution" value="1000" units="1/cm"/>
+          <inkml:channelProperty channel="Y" name="resolution" value="1000" units="1/cm"/>
+          <inkml:channelProperty channel="F" name="resolution" value="0" units="1/dev"/>
+        </inkml:channelProperties>
+      </inkml:inkSource>
+      <inkml:timestamp xml:id="ts0" timeString="2026-09-08T17:08:26.782"/>
+    </inkml:context>
+    <inkml:brush xml:id="br0">
+      <inkml:brushProperty name="width" value="0.035" units="cm"/>
+      <inkml:brushProperty name="height" value="0.035" units="cm"/>
+      <inkml:brushProperty name="color" value="#FFC114"/>
+    </inkml:brush>
+  </inkml:definitions>
+  <inkml:trace contextRef="#ctx0" brushRef="#br0">0 0 24575,'5'0'0,"10"0"0,8 10 0,9 2 0,-1 9 0,4 1 0,5 1 0,0 6 0,-2-1 0,2 2 0,4 3 0,-2-1 0,2-6 0,3 2 0,2 2 0,-12-6 0,-11-5-8191</inkml:trace>
+</inkml:ink>
+</file>
+
+<file path=ppt/ink/ink12.xml><?xml version="1.0" encoding="utf-8"?>
+<inkml:ink xmlns:inkml="http://www.w3.org/2003/InkML">
+  <inkml:definitions>
+    <inkml:context xml:id="ctx0">
+      <inkml:inkSource xml:id="inkSrc0">
+        <inkml:traceFormat>
+          <inkml:channel name="X" type="integer" min="-2.14748E9" max="2.14748E9" units="cm"/>
+          <inkml:channel name="Y" type="integer" min="-2.14748E9" max="2.14748E9" units="cm"/>
+          <inkml:channel name="F" type="integer" max="32767" units="dev"/>
+        </inkml:traceFormat>
+        <inkml:channelProperties>
+          <inkml:channelProperty channel="X" name="resolution" value="1000" units="1/cm"/>
+          <inkml:channelProperty channel="Y" name="resolution" value="1000" units="1/cm"/>
+          <inkml:channelProperty channel="F" name="resolution" value="0" units="1/dev"/>
+        </inkml:channelProperties>
+      </inkml:inkSource>
+      <inkml:timestamp xml:id="ts0" timeString="2026-09-08T17:08:26.783"/>
+    </inkml:context>
+    <inkml:brush xml:id="br0">
+      <inkml:brushProperty name="width" value="0.035" units="cm"/>
+      <inkml:brushProperty name="height" value="0.035" units="cm"/>
+      <inkml:brushProperty name="color" value="#FFC114"/>
+    </inkml:brush>
+  </inkml:definitions>
+  <inkml:trace contextRef="#ctx0" brushRef="#br0">257 0 24575,'-9'0'0,"-4"5"0,-3 1 0,0 9 0,-1 12 0,-3 5 0,-7 2 0,1 5 0,5 5 0,-3-6 0,2 1 0,5 3 0,1-1 0,3-8-8191</inkml:trace>
+</inkml:ink>
+</file>
+
+<file path=ppt/ink/ink13.xml><?xml version="1.0" encoding="utf-8"?>
+<inkml:ink xmlns:inkml="http://www.w3.org/2003/InkML">
+  <inkml:definitions>
+    <inkml:context xml:id="ctx0">
+      <inkml:inkSource xml:id="inkSrc0">
+        <inkml:traceFormat>
+          <inkml:channel name="X" type="integer" min="-2.14748E9" max="2.14748E9" units="cm"/>
+          <inkml:channel name="Y" type="integer" min="-2.14748E9" max="2.14748E9" units="cm"/>
+          <inkml:channel name="F" type="integer" max="32767" units="dev"/>
+        </inkml:traceFormat>
+        <inkml:channelProperties>
+          <inkml:channelProperty channel="X" name="resolution" value="1000" units="1/cm"/>
+          <inkml:channelProperty channel="Y" name="resolution" value="1000" units="1/cm"/>
+          <inkml:channelProperty channel="F" name="resolution" value="0" units="1/dev"/>
+        </inkml:channelProperties>
+      </inkml:inkSource>
+      <inkml:timestamp xml:id="ts0" timeString="2026-09-08T17:09:16.809"/>
+    </inkml:context>
+    <inkml:brush xml:id="br0">
+      <inkml:brushProperty name="width" value="0.035" units="cm"/>
+      <inkml:brushProperty name="height" value="0.035" units="cm"/>
+      <inkml:brushProperty name="color" value="#FF0000"/>
+    </inkml:brush>
+  </inkml:definitions>
+  <inkml:trace contextRef="#ctx0" brushRef="#br0">0 0 24575,'5'0'0,"10"0"0,8 10 0,9 2 0,-1 9 0,4 1 0,5 1 0,0 6 0,-2-1 0,2 2 0,4 3 0,-2-1 0,2-6 0,3 2 0,2 2 0,-12-6 0,-11-5-8191</inkml:trace>
+</inkml:ink>
+</file>
+
+<file path=ppt/ink/ink14.xml><?xml version="1.0" encoding="utf-8"?>
+<inkml:ink xmlns:inkml="http://www.w3.org/2003/InkML">
+  <inkml:definitions>
+    <inkml:context xml:id="ctx0">
+      <inkml:inkSource xml:id="inkSrc0">
+        <inkml:traceFormat>
+          <inkml:channel name="X" type="integer" min="-2.14748E9" max="2.14748E9" units="cm"/>
+          <inkml:channel name="Y" type="integer" min="-2.14748E9" max="2.14748E9" units="cm"/>
+          <inkml:channel name="F" type="integer" max="32767" units="dev"/>
+        </inkml:traceFormat>
+        <inkml:channelProperties>
+          <inkml:channelProperty channel="X" name="resolution" value="1000" units="1/cm"/>
+          <inkml:channelProperty channel="Y" name="resolution" value="1000" units="1/cm"/>
+          <inkml:channelProperty channel="F" name="resolution" value="0" units="1/dev"/>
+        </inkml:channelProperties>
+      </inkml:inkSource>
+      <inkml:timestamp xml:id="ts0" timeString="2026-09-08T17:09:16.810"/>
+    </inkml:context>
+    <inkml:brush xml:id="br0">
+      <inkml:brushProperty name="width" value="0.035" units="cm"/>
+      <inkml:brushProperty name="height" value="0.035" units="cm"/>
+      <inkml:brushProperty name="color" value="#FF0000"/>
+    </inkml:brush>
+  </inkml:definitions>
+  <inkml:trace contextRef="#ctx0" brushRef="#br0">257 0 24575,'-9'0'0,"-4"5"0,-3 1 0,0 9 0,-1 12 0,-3 5 0,-7 2 0,1 5 0,5 5 0,-3-6 0,2 1 0,5 3 0,1-1 0,3-8-8191</inkml:trace>
+</inkml:ink>
+</file>
+
+<file path=ppt/ink/ink15.xml><?xml version="1.0" encoding="utf-8"?>
+<inkml:ink xmlns:inkml="http://www.w3.org/2003/InkML">
+  <inkml:definitions>
+    <inkml:context xml:id="ctx0">
+      <inkml:inkSource xml:id="inkSrc0">
+        <inkml:traceFormat>
+          <inkml:channel name="X" type="integer" min="-2.14748E9" max="2.14748E9" units="cm"/>
+          <inkml:channel name="Y" type="integer" min="-2.14748E9" max="2.14748E9" units="cm"/>
+          <inkml:channel name="F" type="integer" max="32767" units="dev"/>
+        </inkml:traceFormat>
+        <inkml:channelProperties>
+          <inkml:channelProperty channel="X" name="resolution" value="1000" units="1/cm"/>
+          <inkml:channelProperty channel="Y" name="resolution" value="1000" units="1/cm"/>
+          <inkml:channelProperty channel="F" name="resolution" value="0" units="1/dev"/>
+        </inkml:channelProperties>
+      </inkml:inkSource>
+      <inkml:timestamp xml:id="ts0" timeString="2026-09-08T17:09:55.558"/>
+    </inkml:context>
+    <inkml:brush xml:id="br0">
+      <inkml:brushProperty name="width" value="0.035" units="cm"/>
+      <inkml:brushProperty name="height" value="0.035" units="cm"/>
+      <inkml:brushProperty name="color" value="#C00000"/>
+    </inkml:brush>
+  </inkml:definitions>
+  <inkml:trace contextRef="#ctx0" brushRef="#br0">0 0 24575,'5'0'0,"10"0"0,8 10 0,9 2 0,-1 9 0,4 1 0,5 1 0,0 6 0,-2-1 0,2 2 0,4 3 0,-2-1 0,2-6 0,3 2 0,2 2 0,-12-6 0,-11-5-8191</inkml:trace>
+</inkml:ink>
+</file>
+
+<file path=ppt/ink/ink16.xml><?xml version="1.0" encoding="utf-8"?>
+<inkml:ink xmlns:inkml="http://www.w3.org/2003/InkML">
+  <inkml:definitions>
+    <inkml:context xml:id="ctx0">
+      <inkml:inkSource xml:id="inkSrc0">
+        <inkml:traceFormat>
+          <inkml:channel name="X" type="integer" min="-2.14748E9" max="2.14748E9" units="cm"/>
+          <inkml:channel name="Y" type="integer" min="-2.14748E9" max="2.14748E9" units="cm"/>
+          <inkml:channel name="F" type="integer" max="32767" units="dev"/>
+        </inkml:traceFormat>
+        <inkml:channelProperties>
+          <inkml:channelProperty channel="X" name="resolution" value="1000" units="1/cm"/>
+          <inkml:channelProperty channel="Y" name="resolution" value="1000" units="1/cm"/>
+          <inkml:channelProperty channel="F" name="resolution" value="0" units="1/dev"/>
+        </inkml:channelProperties>
+      </inkml:inkSource>
+      <inkml:timestamp xml:id="ts0" timeString="2026-09-08T17:09:55.559"/>
+    </inkml:context>
+    <inkml:brush xml:id="br0">
+      <inkml:brushProperty name="width" value="0.035" units="cm"/>
+      <inkml:brushProperty name="height" value="0.035" units="cm"/>
+      <inkml:brushProperty name="color" value="#C00000"/>
+    </inkml:brush>
+  </inkml:definitions>
+  <inkml:trace contextRef="#ctx0" brushRef="#br0">257 0 24575,'-9'0'0,"-4"5"0,-3 1 0,0 9 0,-1 12 0,-3 5 0,-7 2 0,1 5 0,5 5 0,-3-6 0,2 1 0,5 3 0,1-1 0,3-8-8191</inkml:trace>
+</inkml:ink>
+</file>
+
+<file path=ppt/ink/ink17.xml><?xml version="1.0" encoding="utf-8"?>
+<inkml:ink xmlns:inkml="http://www.w3.org/2003/InkML">
+  <inkml:definitions>
+    <inkml:context xml:id="ctx0">
+      <inkml:inkSource xml:id="inkSrc0">
+        <inkml:traceFormat>
+          <inkml:channel name="X" type="integer" min="-2.14748E9" max="2.14748E9" units="cm"/>
+          <inkml:channel name="Y" type="integer" min="-2.14748E9" max="2.14748E9" units="cm"/>
+          <inkml:channel name="F" type="integer" max="32767" units="dev"/>
+        </inkml:traceFormat>
+        <inkml:channelProperties>
+          <inkml:channelProperty channel="X" name="resolution" value="1000" units="1/cm"/>
+          <inkml:channelProperty channel="Y" name="resolution" value="1000" units="1/cm"/>
+          <inkml:channelProperty channel="F" name="resolution" value="0" units="1/dev"/>
+        </inkml:channelProperties>
+      </inkml:inkSource>
+      <inkml:timestamp xml:id="ts0" timeString="2026-09-08T17:10:13.579"/>
+    </inkml:context>
+    <inkml:brush xml:id="br0">
+      <inkml:brushProperty name="width" value="0.035" units="cm"/>
+      <inkml:brushProperty name="height" value="0.035" units="cm"/>
+      <inkml:brushProperty name="color" value="#002060"/>
+    </inkml:brush>
+  </inkml:definitions>
+  <inkml:trace contextRef="#ctx0" brushRef="#br0">0 0 24575,'5'0'0,"10"0"0,8 10 0,9 2 0,-1 9 0,4 1 0,5 1 0,0 6 0,-2-1 0,2 2 0,4 3 0,-2-1 0,2-6 0,3 2 0,2 2 0,-12-6 0,-11-5-8191</inkml:trace>
+</inkml:ink>
+</file>
+
+<file path=ppt/ink/ink18.xml><?xml version="1.0" encoding="utf-8"?>
+<inkml:ink xmlns:inkml="http://www.w3.org/2003/InkML">
+  <inkml:definitions>
+    <inkml:context xml:id="ctx0">
+      <inkml:inkSource xml:id="inkSrc0">
+        <inkml:traceFormat>
+          <inkml:channel name="X" type="integer" min="-2.14748E9" max="2.14748E9" units="cm"/>
+          <inkml:channel name="Y" type="integer" min="-2.14748E9" max="2.14748E9" units="cm"/>
+          <inkml:channel name="F" type="integer" max="32767" units="dev"/>
+        </inkml:traceFormat>
+        <inkml:channelProperties>
+          <inkml:channelProperty channel="X" name="resolution" value="1000" units="1/cm"/>
+          <inkml:channelProperty channel="Y" name="resolution" value="1000" units="1/cm"/>
+          <inkml:channelProperty channel="F" name="resolution" value="0" units="1/dev"/>
+        </inkml:channelProperties>
+      </inkml:inkSource>
+      <inkml:timestamp xml:id="ts0" timeString="2026-09-08T17:10:13.580"/>
+    </inkml:context>
+    <inkml:brush xml:id="br0">
+      <inkml:brushProperty name="width" value="0.035" units="cm"/>
+      <inkml:brushProperty name="height" value="0.035" units="cm"/>
+      <inkml:brushProperty name="color" value="#002060"/>
+    </inkml:brush>
+  </inkml:definitions>
+  <inkml:trace contextRef="#ctx0" brushRef="#br0">257 0 24575,'-9'0'0,"-4"5"0,-3 1 0,0 9 0,-1 12 0,-3 5 0,-7 2 0,1 5 0,5 5 0,-3-6 0,2 1 0,5 3 0,1-1 0,3-8-8191</inkml:trace>
+</inkml:ink>
+</file>
+
+<file path=ppt/ink/ink19.xml><?xml version="1.0" encoding="utf-8"?>
+<inkml:ink xmlns:inkml="http://www.w3.org/2003/InkML">
+  <inkml:definitions>
+    <inkml:context xml:id="ctx0">
+      <inkml:inkSource xml:id="inkSrc0">
+        <inkml:traceFormat>
+          <inkml:channel name="X" type="integer" min="-2.14748E9" max="2.14748E9" units="cm"/>
+          <inkml:channel name="Y" type="integer" min="-2.14748E9" max="2.14748E9" units="cm"/>
+          <inkml:channel name="F" type="integer" max="32767" units="dev"/>
+        </inkml:traceFormat>
+        <inkml:channelProperties>
+          <inkml:channelProperty channel="X" name="resolution" value="1000" units="1/cm"/>
+          <inkml:channelProperty channel="Y" name="resolution" value="1000" units="1/cm"/>
+          <inkml:channelProperty channel="F" name="resolution" value="0" units="1/dev"/>
+        </inkml:channelProperties>
+      </inkml:inkSource>
+      <inkml:timestamp xml:id="ts0" timeString="2026-09-08T17:10:37.802"/>
+    </inkml:context>
+    <inkml:brush xml:id="br0">
+      <inkml:brushProperty name="width" value="0.035" units="cm"/>
+      <inkml:brushProperty name="height" value="0.035" units="cm"/>
+      <inkml:brushProperty name="color" value="#002060"/>
+    </inkml:brush>
+  </inkml:definitions>
+  <inkml:trace contextRef="#ctx0" brushRef="#br0">0 0 24575,'5'0'0,"10"0"0,8 10 0,9 2 0,-1 9 0,4 1 0,5 1 0,0 6 0,-2-1 0,2 2 0,4 3 0,-2-1 0,2-6 0,3 2 0,2 2 0,-12-6 0,-11-5-8191</inkml:trace>
+</inkml:ink>
+</file>
+
+<file path=ppt/ink/ink2.xml><?xml version="1.0" encoding="utf-8"?>
+<inkml:ink xmlns:inkml="http://www.w3.org/2003/InkML">
+  <inkml:definitions>
+    <inkml:context xml:id="ctx0">
+      <inkml:inkSource xml:id="inkSrc0">
+        <inkml:traceFormat>
+          <inkml:channel name="X" type="integer" min="-2.14748E9" max="2.14748E9" units="cm"/>
+          <inkml:channel name="Y" type="integer" min="-2.14748E9" max="2.14748E9" units="cm"/>
+          <inkml:channel name="F" type="integer" max="32767" units="dev"/>
+        </inkml:traceFormat>
+        <inkml:channelProperties>
+          <inkml:channelProperty channel="X" name="resolution" value="1000" units="1/cm"/>
+          <inkml:channelProperty channel="Y" name="resolution" value="1000" units="1/cm"/>
+          <inkml:channelProperty channel="F" name="resolution" value="0" units="1/dev"/>
+        </inkml:channelProperties>
+      </inkml:inkSource>
+      <inkml:timestamp xml:id="ts0" timeString="2026-09-08T17:07:51.845"/>
+    </inkml:context>
+    <inkml:brush xml:id="br0">
+      <inkml:brushProperty name="width" value="0.035" units="cm"/>
+      <inkml:brushProperty name="height" value="0.035" units="cm"/>
+      <inkml:brushProperty name="color" value="#FF0000"/>
+    </inkml:brush>
+  </inkml:definitions>
+  <inkml:trace contextRef="#ctx0" brushRef="#br0">257 0 24575,'-9'0'0,"-4"5"0,-3 1 0,0 9 0,-1 12 0,-3 5 0,-7 2 0,1 5 0,5 5 0,-3-6 0,2 1 0,5 3 0,1-1 0,3-8-8191</inkml:trace>
+</inkml:ink>
+</file>
+
+<file path=ppt/ink/ink20.xml><?xml version="1.0" encoding="utf-8"?>
+<inkml:ink xmlns:inkml="http://www.w3.org/2003/InkML">
+  <inkml:definitions>
+    <inkml:context xml:id="ctx0">
+      <inkml:inkSource xml:id="inkSrc0">
+        <inkml:traceFormat>
+          <inkml:channel name="X" type="integer" min="-2.14748E9" max="2.14748E9" units="cm"/>
+          <inkml:channel name="Y" type="integer" min="-2.14748E9" max="2.14748E9" units="cm"/>
+          <inkml:channel name="F" type="integer" max="32767" units="dev"/>
+        </inkml:traceFormat>
+        <inkml:channelProperties>
+          <inkml:channelProperty channel="X" name="resolution" value="1000" units="1/cm"/>
+          <inkml:channelProperty channel="Y" name="resolution" value="1000" units="1/cm"/>
+          <inkml:channelProperty channel="F" name="resolution" value="0" units="1/dev"/>
+        </inkml:channelProperties>
+      </inkml:inkSource>
+      <inkml:timestamp xml:id="ts0" timeString="2026-09-08T17:10:37.803"/>
+    </inkml:context>
+    <inkml:brush xml:id="br0">
+      <inkml:brushProperty name="width" value="0.035" units="cm"/>
+      <inkml:brushProperty name="height" value="0.035" units="cm"/>
+      <inkml:brushProperty name="color" value="#002060"/>
+    </inkml:brush>
+  </inkml:definitions>
+  <inkml:trace contextRef="#ctx0" brushRef="#br0">257 0 24575,'-9'0'0,"-4"5"0,-3 1 0,0 9 0,-1 12 0,-3 5 0,-7 2 0,1 5 0,5 5 0,-3-6 0,2 1 0,5 3 0,1-1 0,3-8-8191</inkml:trace>
+</inkml:ink>
+</file>
+
+<file path=ppt/ink/ink21.xml><?xml version="1.0" encoding="utf-8"?>
+<inkml:ink xmlns:inkml="http://www.w3.org/2003/InkML">
+  <inkml:definitions>
+    <inkml:context xml:id="ctx0">
+      <inkml:inkSource xml:id="inkSrc0">
+        <inkml:traceFormat>
+          <inkml:channel name="X" type="integer" min="-2.14748E9" max="2.14748E9" units="cm"/>
+          <inkml:channel name="Y" type="integer" min="-2.14748E9" max="2.14748E9" units="cm"/>
+          <inkml:channel name="F" type="integer" max="32767" units="dev"/>
+        </inkml:traceFormat>
+        <inkml:channelProperties>
+          <inkml:channelProperty channel="X" name="resolution" value="1000" units="1/cm"/>
+          <inkml:channelProperty channel="Y" name="resolution" value="1000" units="1/cm"/>
+          <inkml:channelProperty channel="F" name="resolution" value="0" units="1/dev"/>
+        </inkml:channelProperties>
+      </inkml:inkSource>
+      <inkml:timestamp xml:id="ts0" timeString="2026-09-08T17:10:42.945"/>
+    </inkml:context>
+    <inkml:brush xml:id="br0">
+      <inkml:brushProperty name="width" value="0.035" units="cm"/>
+      <inkml:brushProperty name="height" value="0.035" units="cm"/>
+      <inkml:brushProperty name="color" value="#002060"/>
+    </inkml:brush>
+  </inkml:definitions>
+  <inkml:trace contextRef="#ctx0" brushRef="#br0">0 0 24575,'5'0'0,"10"0"0,8 10 0,9 2 0,-1 9 0,4 1 0,5 1 0,0 6 0,-2-1 0,2 2 0,4 3 0,-2-1 0,2-6 0,3 2 0,2 2 0,-12-6 0,-11-5-8191</inkml:trace>
+</inkml:ink>
+</file>
+
+<file path=ppt/ink/ink22.xml><?xml version="1.0" encoding="utf-8"?>
+<inkml:ink xmlns:inkml="http://www.w3.org/2003/InkML">
+  <inkml:definitions>
+    <inkml:context xml:id="ctx0">
+      <inkml:inkSource xml:id="inkSrc0">
+        <inkml:traceFormat>
+          <inkml:channel name="X" type="integer" min="-2.14748E9" max="2.14748E9" units="cm"/>
+          <inkml:channel name="Y" type="integer" min="-2.14748E9" max="2.14748E9" units="cm"/>
+          <inkml:channel name="F" type="integer" max="32767" units="dev"/>
+        </inkml:traceFormat>
+        <inkml:channelProperties>
+          <inkml:channelProperty channel="X" name="resolution" value="1000" units="1/cm"/>
+          <inkml:channelProperty channel="Y" name="resolution" value="1000" units="1/cm"/>
+          <inkml:channelProperty channel="F" name="resolution" value="0" units="1/dev"/>
+        </inkml:channelProperties>
+      </inkml:inkSource>
+      <inkml:timestamp xml:id="ts0" timeString="2026-09-08T17:10:42.946"/>
+    </inkml:context>
+    <inkml:brush xml:id="br0">
+      <inkml:brushProperty name="width" value="0.035" units="cm"/>
+      <inkml:brushProperty name="height" value="0.035" units="cm"/>
+      <inkml:brushProperty name="color" value="#002060"/>
+    </inkml:brush>
+  </inkml:definitions>
+  <inkml:trace contextRef="#ctx0" brushRef="#br0">257 0 24575,'-9'0'0,"-4"5"0,-3 1 0,0 9 0,-1 12 0,-3 5 0,-7 2 0,1 5 0,5 5 0,-3-6 0,2 1 0,5 3 0,1-1 0,3-8-8191</inkml:trace>
+</inkml:ink>
+</file>
+
+<file path=ppt/ink/ink23.xml><?xml version="1.0" encoding="utf-8"?>
+<inkml:ink xmlns:inkml="http://www.w3.org/2003/InkML">
+  <inkml:definitions>
+    <inkml:context xml:id="ctx0">
+      <inkml:inkSource xml:id="inkSrc0">
+        <inkml:traceFormat>
+          <inkml:channel name="X" type="integer" min="-2.14748E9" max="2.14748E9" units="cm"/>
+          <inkml:channel name="Y" type="integer" min="-2.14748E9" max="2.14748E9" units="cm"/>
+          <inkml:channel name="F" type="integer" max="32767" units="dev"/>
           <inkml:channel name="OA" type="integer" max="360" units="deg"/>
           <inkml:channel name="OE" type="integer" max="90" units="deg"/>
         </inkml:traceFormat>
@@ -356,7 +777,291 @@
 </inkml:ink>
 </file>
 
-<file path=ppt/ink/ink10.xml><?xml version="1.0" encoding="utf-8"?>
+<file path=ppt/ink/ink24.xml><?xml version="1.0" encoding="utf-8"?>
+<inkml:ink xmlns:inkml="http://www.w3.org/2003/InkML">
+  <inkml:definitions>
+    <inkml:context xml:id="ctx0">
+      <inkml:inkSource xml:id="inkSrc0">
+        <inkml:traceFormat>
+          <inkml:channel name="X" type="integer" min="-2.14748E9" max="2.14748E9" units="cm"/>
+          <inkml:channel name="Y" type="integer" min="-2.14748E9" max="2.14748E9" units="cm"/>
+          <inkml:channel name="F" type="integer" max="32767" units="dev"/>
+          <inkml:channel name="OA" type="integer" max="360" units="deg"/>
+          <inkml:channel name="OE" type="integer" max="90" units="deg"/>
+        </inkml:traceFormat>
+        <inkml:channelProperties>
+          <inkml:channelProperty channel="X" name="resolution" value="1000" units="1/cm"/>
+          <inkml:channelProperty channel="Y" name="resolution" value="1000" units="1/cm"/>
+          <inkml:channelProperty channel="F" name="resolution" value="0" units="1/dev"/>
+          <inkml:channelProperty channel="OA" name="resolution" value="1000" units="1/deg"/>
+          <inkml:channelProperty channel="OE" name="resolution" value="1000" units="1/deg"/>
+        </inkml:channelProperties>
+      </inkml:inkSource>
+      <inkml:timestamp xml:id="ts0" timeString="2026-03-20T17:27:52.609"/>
+    </inkml:context>
+    <inkml:brush xml:id="br0">
+      <inkml:brushProperty name="width" value="0.2" units="cm"/>
+      <inkml:brushProperty name="height" value="0.2" units="cm"/>
+      <inkml:brushProperty name="color" value="#FFC114"/>
+    </inkml:brush>
+  </inkml:definitions>
+  <inkml:trace contextRef="#ctx0" brushRef="#br0">0 285 3628 0 0,'0'0'-241'0'0,"2"-1"-538"0"0,79-20 561 0 0,45-9 324 0 0,127-2 503 0 0,-213 27 112 0 0,-39 5-631 0 0,16-3 1068 0 0,-16 3-1280 0 0,9-2 1541 0 0,-9-5-527 0 0,-5-5-934 0 0,-4-2 38 0 0,0 1 0 0 0,0 0 0 0 0,-1 2 1 0 0,1 0-1 0 0,-1 1 0 0 0,0 1 0 0 0,-1 1 1 0 0,-13-8-1 0 0,-35-30-17 0 0,30 26-21 0 0,27 20 35 0 0,4 3-719 0 0,116 75 633 0 0,10 9 172 0 0,-90-58-60 0 0,-38-29-11 0 0,3 4 11 0 0,-4-4-23 0 0,1 0 0 0 0,-1 0-1 0 0,0 0 1 0 0,1 0 0 0 0,-1 0-1 0 0,0 1 1 0 0,1-1 0 0 0,-1 0-1 0 0,0 0 1 0 0,1 1 0 0 0,-1-1-1 0 0,0 0 1 0 0,1 1 0 0 0,-1-1-1 0 0,0 0 1 0 0,1 1 0 0 0,-1-1-1 0 0,0 1 1 0 0,0-1-1 0 0,0 1 1 0 0,0-1 0 0 0,1 1-1 0 0,-1 0 1 0 0,0-1 0 0 0,0 1-1 0 0,0 0 1 0 0,1-1 0 0 0,-1 1-1 0 0,0 0 1 0 0,0-1 0 0 0,0 1-1 0 0,0 0 1 0 0,0 0 0 0 0,0 0-1 0 0,-8 19-5 0 0,-1 0 1 0 0,0-2-1 0 0,-1 0 0 0 0,-20 28 0 0 0,6-10 3 0 0,-62 86-15 0 0,77-111 10 0 0,3-1 70 0 0</inkml:trace>
+</inkml:ink>
+</file>
+
+<file path=ppt/ink/ink25.xml><?xml version="1.0" encoding="utf-8"?>
+<inkml:ink xmlns:inkml="http://www.w3.org/2003/InkML">
+  <inkml:definitions>
+    <inkml:context xml:id="ctx0">
+      <inkml:inkSource xml:id="inkSrc0">
+        <inkml:traceFormat>
+          <inkml:channel name="X" type="integer" min="-2.14748E9" max="2.14748E9" units="cm"/>
+          <inkml:channel name="Y" type="integer" min="-2.14748E9" max="2.14748E9" units="cm"/>
+          <inkml:channel name="F" type="integer" max="32767" units="dev"/>
+          <inkml:channel name="OA" type="integer" max="360" units="deg"/>
+          <inkml:channel name="OE" type="integer" max="90" units="deg"/>
+        </inkml:traceFormat>
+        <inkml:channelProperties>
+          <inkml:channelProperty channel="X" name="resolution" value="1000" units="1/cm"/>
+          <inkml:channelProperty channel="Y" name="resolution" value="1000" units="1/cm"/>
+          <inkml:channelProperty channel="F" name="resolution" value="0" units="1/dev"/>
+          <inkml:channelProperty channel="OA" name="resolution" value="1000" units="1/deg"/>
+          <inkml:channelProperty channel="OE" name="resolution" value="1000" units="1/deg"/>
+        </inkml:channelProperties>
+      </inkml:inkSource>
+      <inkml:timestamp xml:id="ts0" timeString="2026-03-20T17:28:41.810"/>
+    </inkml:context>
+    <inkml:brush xml:id="br0">
+      <inkml:brushProperty name="width" value="0.2" units="cm"/>
+      <inkml:brushProperty name="height" value="0.2" units="cm"/>
+      <inkml:brushProperty name="color" value="#FFC114"/>
+    </inkml:brush>
+  </inkml:definitions>
+  <inkml:trace contextRef="#ctx0" brushRef="#br0">100 149 5529 0 0,'-16'-51'973'0'0,"15"50"-984"0"0,1 6-382 0 0,-1 44 357 0 0,2 0 1 0 0,13 77-1 0 0,-3-39 64 0 0,16 152 152 0 0,-24-199 1736 0 0,-6-46-1799 0 0,-23-55-89 0 0,3-1 0 0 0,3-1 0 0 0,3-1 0 0 0,-11-77-1 0 0,10-19-102 0 0,17 156 56 0 0,1 0-1 0 0,-1 0 0 0 0,1 0 1 0 0,0 0-1 0 0,0 0 1 0 0,0 0-1 0 0,0 0 0 0 0,1 0 1 0 0,-1 0-1 0 0,1 0 1 0 0,0 0-1 0 0,1 0 0 0 0,-1 0 1 0 0,0 1-1 0 0,1-1 1 0 0,0 1-1 0 0,0-1 0 0 0,0 1 1 0 0,1-1-1 0 0,-1 1 1 0 0,1 0-1 0 0,-1 0 0 0 0,5-3 1 0 0,2 0-34 0 0,0 1 0 0 0,0 0 0 0 0,0 1-1 0 0,0 0 1 0 0,1 1 0 0 0,-1 0 0 0 0,1 0 0 0 0,20-2 0 0 0,-14 3 10 0 0,0 0-1 0 0,0 2 1 0 0,0 0-1 0 0,0 1 1 0 0,0 1 0 0 0,-1 0-1 0 0,1 1 1 0 0,0 0-1 0 0,-1 2 1 0 0,0 0 0 0 0,0 0-1 0 0,0 1 1 0 0,-1 1-1 0 0,23 14 1 0 0,-13-4-29 0 0,0 0 1 0 0,0 1-1 0 0,-2 1 1 0 0,0 2-1 0 0,-2 0 1 0 0,0 1-1 0 0,20 30 1 0 0,-35-46 67 0 0,-1 0 1 0 0,1 0 0 0 0,-2 1 0 0 0,1-1 0 0 0,-1 1 0 0 0,0 0 0 0 0,0 0-1 0 0,-1 0 1 0 0,0 0 0 0 0,0 1 0 0 0,-1-1 0 0 0,0 1 0 0 0,0-1 0 0 0,0 1 0 0 0,-1-1-1 0 0,0 1 1 0 0,-1-1 0 0 0,0 1 0 0 0,0-1 0 0 0,-1 1 0 0 0,0-1 0 0 0,0 0-1 0 0,0 0 1 0 0,-1 0 0 0 0,0 0 0 0 0,0 0 0 0 0,-1-1 0 0 0,0 1 0 0 0,0-1 0 0 0,-1 0-1 0 0,0 0 1 0 0,0 0 0 0 0,0-1 0 0 0,0 0 0 0 0,-1 0 0 0 0,-12 8 0 0 0,-18 11 60 0 0,-75 40 1 0 0,24-17 221 0 0,51-32 157 0 0,35-14-264 0 0,-4 1 254 0 0</inkml:trace>
+</inkml:ink>
+</file>
+
+<file path=ppt/ink/ink26.xml><?xml version="1.0" encoding="utf-8"?>
+<inkml:ink xmlns:inkml="http://www.w3.org/2003/InkML">
+  <inkml:definitions>
+    <inkml:context xml:id="ctx0">
+      <inkml:inkSource xml:id="inkSrc0">
+        <inkml:traceFormat>
+          <inkml:channel name="X" type="integer" min="-2.14748E9" max="2.14748E9" units="cm"/>
+          <inkml:channel name="Y" type="integer" min="-2.14748E9" max="2.14748E9" units="cm"/>
+          <inkml:channel name="F" type="integer" max="32767" units="dev"/>
+          <inkml:channel name="OA" type="integer" max="360" units="deg"/>
+          <inkml:channel name="OE" type="integer" max="90" units="deg"/>
+        </inkml:traceFormat>
+        <inkml:channelProperties>
+          <inkml:channelProperty channel="X" name="resolution" value="1000" units="1/cm"/>
+          <inkml:channelProperty channel="Y" name="resolution" value="1000" units="1/cm"/>
+          <inkml:channelProperty channel="F" name="resolution" value="0" units="1/dev"/>
+          <inkml:channelProperty channel="OA" name="resolution" value="1000" units="1/deg"/>
+          <inkml:channelProperty channel="OE" name="resolution" value="1000" units="1/deg"/>
+        </inkml:channelProperties>
+      </inkml:inkSource>
+      <inkml:timestamp xml:id="ts0" timeString="2026-03-20T17:28:44.023"/>
+    </inkml:context>
+    <inkml:brush xml:id="br0">
+      <inkml:brushProperty name="width" value="0.2" units="cm"/>
+      <inkml:brushProperty name="height" value="0.2" units="cm"/>
+      <inkml:brushProperty name="color" value="#FFC114"/>
+    </inkml:brush>
+  </inkml:definitions>
+  <inkml:trace contextRef="#ctx0" brushRef="#br0">217 165 5048 0 0,'-4'-2'-23'0'0,"1"0"-1"0"0,-1 0 0 0 0,0 0 0 0 0,-1 1 0 0 0,1-1 0 0 0,0 1 0 0 0,0 0 0 0 0,0 0 0 0 0,-1 0 0 0 0,1 1 0 0 0,-1 0 1 0 0,1-1-1 0 0,0 1 0 0 0,-1 1 0 0 0,1-1 0 0 0,-1 1 0 0 0,1 0 0 0 0,0 0 0 0 0,0 0 0 0 0,-1 0 0 0 0,1 1 0 0 0,0 0 1 0 0,0 0-1 0 0,1 0 0 0 0,-1 0 0 0 0,0 0 0 0 0,1 1 0 0 0,-6 5 0 0 0,-1 0 4 0 0,1 0 1 0 0,0 1-1 0 0,1 1 0 0 0,0-1 0 0 0,0 1 1 0 0,1 1-1 0 0,0 0 0 0 0,1 0 0 0 0,-6 13 1 0 0,11-21 17 0 0,-1 1 0 0 0,1-1 1 0 0,0 1-1 0 0,0 0 1 0 0,0 0-1 0 0,0-1 0 0 0,1 1 1 0 0,0 0-1 0 0,0 0 0 0 0,0 0 1 0 0,0-1-1 0 0,0 1 0 0 0,1 0 1 0 0,-1 0-1 0 0,1-1 1 0 0,0 1-1 0 0,1 0 0 0 0,1 4 1 0 0,0-3 3 0 0,0 0 0 0 0,0 0 0 0 0,1-1 0 0 0,0 1 1 0 0,0-1-1 0 0,0 0 0 0 0,0 0 0 0 0,0 0 0 0 0,1-1 1 0 0,10 6-1 0 0,-1-1 42 0 0,1-1-1 0 0,0-1 1 0 0,1 0 0 0 0,-1-1 0 0 0,1-1 0 0 0,0 0 0 0 0,20 1 0 0 0,-31-5-27 0 0,0 0 0 0 0,0 0 0 0 0,0-1 0 0 0,0 0 0 0 0,0 0 0 0 0,0 0 0 0 0,0-1 0 0 0,0 0 0 0 0,0 0 0 0 0,-1 0 0 0 0,1 0 0 0 0,-1-1 0 0 0,0 0 0 0 0,1 1 0 0 0,-1-2 1 0 0,0 1-1 0 0,-1 0 0 0 0,1-1 0 0 0,3-4 0 0 0,-2 2-6 0 0,0 0 1 0 0,0 0-1 0 0,0-1 0 0 0,-1 0 1 0 0,0 1-1 0 0,-1-1 1 0 0,1-1-1 0 0,-1 1 1 0 0,-1 0-1 0 0,1-1 0 0 0,1-8 1 0 0,-4 11-17 0 0,1 1 0 0 0,-1 0 0 0 0,0 0 0 0 0,0 0 1 0 0,0-1-1 0 0,0 1 0 0 0,-1 0 0 0 0,0 0 0 0 0,0 0 0 0 0,0 0 1 0 0,0 0-1 0 0,-1 0 0 0 0,1 0 0 0 0,-1 0 0 0 0,0 0 0 0 0,0 1 1 0 0,-1-1-1 0 0,1 1 0 0 0,-1-1 0 0 0,1 1 0 0 0,-1 0 1 0 0,0 0-1 0 0,-5-4 0 0 0,-5-1-14 0 0,1 1 0 0 0,-1 0 0 0 0,0 1-1 0 0,0 1 1 0 0,-21-6 0 0 0,-18-9 54 0 0,50 19-22 0 0,-3 0 24 0 0,0-1-1 0 0,0 1 0 0 0,0-2 1 0 0,1 1-1 0 0,-1 0 1 0 0,1-1-1 0 0,-7-5 0 0 0,17 4-65 0 0,-1 0-1 0 0,1 1 0 0 0,1-1 0 0 0,-1 1 0 0 0,0 0 0 0 0,1 1 1 0 0,-1 0-1 0 0,1 0 0 0 0,0 0 0 0 0,9-1 0 0 0,84-5-235 0 0,-44 4 24 0 0,112-8 19 0 0,-165 11 353 0 0,-2 1-139 0 0,0 0 0 0 0,0 0 0 0 0,1 0 0 0 0,-1 0 0 0 0,0 0 0 0 0,0 0 0 0 0,1 0 0 0 0,-1 0 0 0 0,0 0-1 0 0,0 1 1 0 0,0-1 0 0 0,1 1 0 0 0,-1-1 0 0 0,0 0 0 0 0,0 1 0 0 0,0 0 0 0 0,0-1 0 0 0,0 1 0 0 0,0 0 0 0 0,0-1 0 0 0,0 1 0 0 0,1 1 0 0 0,-2 17-86 0 0,0 23 31 0 0,1 0 0 0 0,12 74 1 0 0,8-3 28 0 0,-19-105 90 0 0,2 19 3077 0 0,-13-46-3147 0 0,1 0 0 0 0,1-1 1 0 0,0 1-1 0 0,1-2 0 0 0,-5-36 0 0 0,5 10-217 0 0,0-75 1 0 0,6 116 168 0 0,0 0 1 0 0,0 0 0 0 0,1 1 0 0 0,-1-1 0 0 0,1 0-1 0 0,1 1 1 0 0,-1-1 0 0 0,1 0 0 0 0,0 1 0 0 0,0 0-1 0 0,1-1 1 0 0,-1 1 0 0 0,1 0 0 0 0,0 0 0 0 0,1 1 0 0 0,-1-1-1 0 0,1 1 1 0 0,0-1 0 0 0,0 1 0 0 0,0 0 0 0 0,1 1-1 0 0,-1-1 1 0 0,1 1 0 0 0,0 0 0 0 0,0 0 0 0 0,9-4-1 0 0,-13 6 41 0 0,1 0 0 0 0,-1 1 0 0 0,1-1 0 0 0,0 0-1 0 0,-1 1 1 0 0,1-1 0 0 0,0 1 0 0 0,0 0 0 0 0,-1-1 0 0 0,1 1-1 0 0,0 0 1 0 0,0 0 0 0 0,-1 0 0 0 0,1 0 0 0 0,0 1-1 0 0,0-1 1 0 0,-1 0 0 0 0,1 1 0 0 0,0-1 0 0 0,-1 1-1 0 0,4 1 1 0 0,-2 0 0 0 0,0 0-1 0 0,0 0 0 0 0,-1 0 0 0 0,1 1 1 0 0,0-1-1 0 0,-1 1 0 0 0,0 0 1 0 0,1 0-1 0 0,-1-1 0 0 0,2 5 1 0 0,2 5-17 0 0,0 1 0 0 0,0 0 0 0 0,-1 0 1 0 0,3 14-1 0 0,41 126-242 0 0,-43-124 263 0 0,-3-13 24 0 0,0 0 1 0 0,2 0-1 0 0,-1 0 1 0 0,2-1-1 0 0,8 18 1 0 0,-11-28 6 0 0,0-1 0 0 0,0 1 0 0 0,1-1 0 0 0,-1 0 1 0 0,1 0-1 0 0,0-1 0 0 0,0 1 0 0 0,0-1 0 0 0,0 0 1 0 0,1 0-1 0 0,-1 0 0 0 0,1 0 0 0 0,0-1 0 0 0,0 0 0 0 0,0 0 1 0 0,0 0-1 0 0,0-1 0 0 0,0 1 0 0 0,10 0 0 0 0,-3-1 1 0 0,-1 0 0 0 0,1-2-1 0 0,-1 1 1 0 0,1-1-1 0 0,-1-1 1 0 0,1 0 0 0 0,-1 0-1 0 0,0-1 1 0 0,0-1-1 0 0,0 0 1 0 0,-1-1 0 0 0,1 1-1 0 0,-1-2 1 0 0,0 0 0 0 0,0 0-1 0 0,-1-1 1 0 0,0 0-1 0 0,0 0 1 0 0,-1-1 0 0 0,12-13-1 0 0,-1-1 71 0 0,0-1-1 0 0,-2-1 0 0 0,-1 0 0 0 0,-1-1 1 0 0,-1-1-1 0 0,21-53 0 0 0,-34 74-39 0 0,0 1 0 0 0,-1 0-1 0 0,1-1 1 0 0,-1 1 0 0 0,0-1-1 0 0,0 1 1 0 0,0-1 0 0 0,-1 1 0 0 0,1-1-1 0 0,-1 1 1 0 0,0 0 0 0 0,-1-1-1 0 0,-1-4 1 0 0,3 8-48 0 0,-22 0 3 0 0,13 5-12 0 0,1 0 0 0 0,0 0 0 0 0,0 1 0 0 0,0 0 0 0 0,0 0 0 0 0,1 1 0 0 0,-1 0 0 0 0,1 0 0 0 0,1 1-1 0 0,-1-1 1 0 0,1 2 0 0 0,1-1 0 0 0,-1 1 0 0 0,1 0 0 0 0,1 0 0 0 0,-1 0 0 0 0,1 0 0 0 0,1 1 0 0 0,-1 0 0 0 0,-2 14 0 0 0,3-15 5 0 0,1 1 0 0 0,-1 0-1 0 0,2 0 1 0 0,-1 0 0 0 0,1 0-1 0 0,1 0 1 0 0,0 1 0 0 0,0-1 0 0 0,1 0-1 0 0,0 0 1 0 0,0 0 0 0 0,6 18-1 0 0,-4-20 3 0 0,1 0 0 0 0,0 1 0 0 0,0-2 0 0 0,1 1 0 0 0,0 0-1 0 0,0-1 1 0 0,0 0 0 0 0,1 0 0 0 0,0 0 0 0 0,0-1 0 0 0,1 0-1 0 0,-1 0 1 0 0,1-1 0 0 0,0 0 0 0 0,8 4 0 0 0,13 5 20 0 0,0-1 1 0 0,1-2-1 0 0,0-1 1 0 0,53 10-1 0 0,-23-10 15 0 0,89 3 0 0 0,-125-13-407 0 0,0 0 0 0 0,-1-1-1 0 0,1-1 1 0 0,0-1 0 0 0,35-12 0 0 0,-21 4-523 0 0</inkml:trace>
+</inkml:ink>
+</file>
+
+<file path=ppt/ink/ink27.xml><?xml version="1.0" encoding="utf-8"?>
+<inkml:ink xmlns:inkml="http://www.w3.org/2003/InkML">
+  <inkml:definitions>
+    <inkml:context xml:id="ctx0">
+      <inkml:inkSource xml:id="inkSrc0">
+        <inkml:traceFormat>
+          <inkml:channel name="X" type="integer" min="-2.14748E9" max="2.14748E9" units="cm"/>
+          <inkml:channel name="Y" type="integer" min="-2.14748E9" max="2.14748E9" units="cm"/>
+          <inkml:channel name="F" type="integer" max="32767" units="dev"/>
+          <inkml:channel name="OA" type="integer" max="360" units="deg"/>
+          <inkml:channel name="OE" type="integer" max="90" units="deg"/>
+        </inkml:traceFormat>
+        <inkml:channelProperties>
+          <inkml:channelProperty channel="X" name="resolution" value="1000" units="1/cm"/>
+          <inkml:channelProperty channel="Y" name="resolution" value="1000" units="1/cm"/>
+          <inkml:channelProperty channel="F" name="resolution" value="0" units="1/dev"/>
+          <inkml:channelProperty channel="OA" name="resolution" value="1000" units="1/deg"/>
+          <inkml:channelProperty channel="OE" name="resolution" value="1000" units="1/deg"/>
+        </inkml:channelProperties>
+      </inkml:inkSource>
+      <inkml:timestamp xml:id="ts0" timeString="2026-03-20T17:28:46.098"/>
+    </inkml:context>
+    <inkml:brush xml:id="br0">
+      <inkml:brushProperty name="width" value="0.2" units="cm"/>
+      <inkml:brushProperty name="height" value="0.2" units="cm"/>
+      <inkml:brushProperty name="color" value="#FFC114"/>
+    </inkml:brush>
+  </inkml:definitions>
+  <inkml:trace contextRef="#ctx0" brushRef="#br0">171 42 3608 0 0,'0'0'1402'0'0,"-7"0"-1368"0"0,-23 0-16 0 0,26 1-15 0 0,-1-1 0 0 0,1 1 0 0 0,-1 0 0 0 0,1 0 0 0 0,-1 1 0 0 0,1-1 0 0 0,0 1 0 0 0,-1 0 0 0 0,1 0 0 0 0,0 0 0 0 0,0 1 0 0 0,1-1 0 0 0,-1 1 0 0 0,0 0 0 0 0,-4 6 0 0 0,0-1-21 0 0,0 1 1 0 0,1 0-1 0 0,0 0 1 0 0,-8 15-1 0 0,13-19 12 0 0,-1 0-1 0 0,1 0 1 0 0,0 0-1 0 0,0 0 1 0 0,0 0-1 0 0,1 0 0 0 0,-1 1 1 0 0,2-1-1 0 0,-1 1 1 0 0,0-1-1 0 0,1 0 0 0 0,0 1 1 0 0,0-1-1 0 0,1 1 1 0 0,-1-1-1 0 0,4 11 1 0 0,-1-9 7 0 0,0 0-1 0 0,0 0 1 0 0,0 0 0 0 0,1 0 0 0 0,0-1 0 0 0,1 1 0 0 0,0-1 0 0 0,-1-1 0 0 0,2 1 0 0 0,-1-1 0 0 0,7 6 0 0 0,0-2 18 0 0,1 1-1 0 0,0-2 1 0 0,1 0-1 0 0,0-1 1 0 0,0 0 0 0 0,0-1-1 0 0,1 0 1 0 0,0-1-1 0 0,0-1 1 0 0,1-1 0 0 0,18 3-1 0 0,-27-6 4 0 0,0 0-1 0 0,0 0 1 0 0,1 0-1 0 0,-1-1 1 0 0,0 0 0 0 0,0-1-1 0 0,0 1 1 0 0,0-2-1 0 0,0 1 1 0 0,0-1-1 0 0,0 1 1 0 0,-1-2 0 0 0,0 1-1 0 0,1-1 1 0 0,-1 0-1 0 0,5-5 1 0 0,-7 6-27 0 0,-1-1 0 0 0,0 1 0 0 0,0-1 0 0 0,0 1 1 0 0,0-1-1 0 0,-1 0 0 0 0,1 0 0 0 0,-1 0 0 0 0,0-1 0 0 0,0 1 1 0 0,-1 0-1 0 0,1-1 0 0 0,-1 1 0 0 0,0-1 0 0 0,0 1 0 0 0,-1-1 1 0 0,1 0-1 0 0,-1 1 0 0 0,0-1 0 0 0,0 0 0 0 0,-1 1 0 0 0,1-1 1 0 0,-1 0-1 0 0,0 1 0 0 0,0-1 0 0 0,-2-4 0 0 0,0 3-7 0 0,1 0 0 0 0,-1 0-1 0 0,0 0 1 0 0,-1 0 0 0 0,0 0 0 0 0,0 1-1 0 0,0-1 1 0 0,0 1 0 0 0,-1 0-1 0 0,0 1 1 0 0,0-1 0 0 0,0 1 0 0 0,-1 0-1 0 0,1 0 1 0 0,-1 1 0 0 0,-9-5 0 0 0,-9-3-6 0 0,-1 2 1 0 0,0 1 0 0 0,-26-6-1 0 0,-25-7 122 0 0,69 19-100 0 0,-20-10-219 0 0,66 6 112 0 0,71-1-1 0 0,-70 6 51 0 0,-1-1 0 0 0,49-10 0 0 0,-12 7 680 0 0,-74 4-381 0 0,30-2-156 0 0,-31 7-111 0 0,0 1 0 0 0,0-1 0 0 0,0 1 0 0 0,-1-1-1 0 0,1 1 1 0 0,-1-1 0 0 0,0 1 0 0 0,-1 0 0 0 0,1-1 0 0 0,-3 9 0 0 0,1 29-36 0 0,7-2 39 0 0,3 1 1 0 0,1-1 0 0 0,25 70-1 0 0,-11-37 3729 0 0,-28-82-3703 0 0,0-1-1 0 0,1 0 0 0 0,0 1 0 0 0,1-2 0 0 0,0 1 0 0 0,0 0 0 0 0,1-1 0 0 0,1 1 0 0 0,0-1 0 0 0,0 1 0 0 0,1-1 0 0 0,0 0 0 0 0,1 1 0 0 0,3-16 0 0 0,4-20-307 0 0,3 1 1 0 0,16-44-1 0 0,-21 70 220 0 0,-5 15 31 0 0,0 0-1 0 0,1 0 0 0 0,-1 0 1 0 0,1 1-1 0 0,0-1 1 0 0,1 0-1 0 0,-1 1 1 0 0,0 0-1 0 0,1-1 1 0 0,0 1-1 0 0,0 0 1 0 0,0 1-1 0 0,0-1 0 0 0,0 0 1 0 0,0 1-1 0 0,1 0 1 0 0,0 0-1 0 0,-1 0 1 0 0,1 0-1 0 0,0 0 1 0 0,0 1-1 0 0,0-1 1 0 0,0 1-1 0 0,0 0 0 0 0,0 1 1 0 0,0-1-1 0 0,0 1 1 0 0,5-1-1 0 0,-6 1-6 0 0,1 1 8 0 0,0-1 23 0 0,0 1 1 0 0,0-1 0 0 0,0 1-1 0 0,0 0 1 0 0,0 1 0 0 0,0-1-1 0 0,0 1 1 0 0,0-1 0 0 0,0 1 0 0 0,-1 0-1 0 0,1 1 1 0 0,-1-1 0 0 0,1 1-1 0 0,-1-1 1 0 0,0 1 0 0 0,0 0-1 0 0,0 0 1 0 0,-1 0 0 0 0,1 1 0 0 0,-1-1-1 0 0,1 1 1 0 0,-1-1 0 0 0,0 1-1 0 0,-1 0 1 0 0,1 0 0 0 0,-1 0-1 0 0,1 0 1 0 0,-1 0 0 0 0,0 0-1 0 0,0 8 1 0 0,16 133-212 0 0,-16-136 250 0 0,1 0 0 0 0,1 1 0 0 0,-1-1 1 0 0,2-1-1 0 0,-1 1 0 0 0,1 0 1 0 0,0-1-1 0 0,1 0 0 0 0,0 0 0 0 0,0 0 1 0 0,1 0-1 0 0,0-1 0 0 0,0 0 1 0 0,1 0-1 0 0,0-1 0 0 0,0 0 0 0 0,0 0 1 0 0,1-1-1 0 0,15 9 0 0 0,-10-7-264 0 0,-1-1 1 0 0,1 0-1 0 0,0-1 0 0 0,1-1 0 0 0,-1 0 0 0 0,1-1 0 0 0,0 0 0 0 0,0-1 1 0 0,0 0-1 0 0,0-1 0 0 0,0-1 0 0 0,23-3 0 0 0,-3-3-472 0 0</inkml:trace>
+</inkml:ink>
+</file>
+
+<file path=ppt/ink/ink28.xml><?xml version="1.0" encoding="utf-8"?>
+<inkml:ink xmlns:inkml="http://www.w3.org/2003/InkML">
+  <inkml:definitions>
+    <inkml:context xml:id="ctx0">
+      <inkml:inkSource xml:id="inkSrc0">
+        <inkml:traceFormat>
+          <inkml:channel name="X" type="integer" min="-2.14748E9" max="2.14748E9" units="cm"/>
+          <inkml:channel name="Y" type="integer" min="-2.14748E9" max="2.14748E9" units="cm"/>
+          <inkml:channel name="F" type="integer" max="32767" units="dev"/>
+          <inkml:channel name="OA" type="integer" max="360" units="deg"/>
+          <inkml:channel name="OE" type="integer" max="90" units="deg"/>
+        </inkml:traceFormat>
+        <inkml:channelProperties>
+          <inkml:channelProperty channel="X" name="resolution" value="1000" units="1/cm"/>
+          <inkml:channelProperty channel="Y" name="resolution" value="1000" units="1/cm"/>
+          <inkml:channelProperty channel="F" name="resolution" value="0" units="1/dev"/>
+          <inkml:channelProperty channel="OA" name="resolution" value="1000" units="1/deg"/>
+          <inkml:channelProperty channel="OE" name="resolution" value="1000" units="1/deg"/>
+        </inkml:channelProperties>
+      </inkml:inkSource>
+      <inkml:timestamp xml:id="ts0" timeString="2026-03-20T17:28:47.379"/>
+    </inkml:context>
+    <inkml:brush xml:id="br0">
+      <inkml:brushProperty name="width" value="0.2" units="cm"/>
+      <inkml:brushProperty name="height" value="0.2" units="cm"/>
+      <inkml:brushProperty name="color" value="#FFC114"/>
+    </inkml:brush>
+  </inkml:definitions>
+  <inkml:trace contextRef="#ctx0" brushRef="#br0">19 114 3436 0 0,'-11'-88'2358'0'0,"11"87"-2157"0"0,-2-11 315 0 0,-2-1-576 0 0,2 83-27 0 0,4 0-1 0 0,3 0 0 0 0,21 110 1 0 0,-7-61 67 0 0,-13-73 61 0 0,2-2 0 0 0,14 45-1 0 0,-18-77-34 0 0,0 0-1 0 0,0-1 1 0 0,1 1-1 0 0,1-1 0 0 0,-1 0 1 0 0,2-1-1 0 0,0 0 1 0 0,0 0-1 0 0,1 0 1 0 0,0-1-1 0 0,0 0 0 0 0,17 13 1 0 0,-15-14-53 0 0,1-1-1 0 0,0-1 1 0 0,0 0-1 0 0,1 0 1 0 0,0-1 0 0 0,0-1-1 0 0,0 0 1 0 0,0 0-1 0 0,26 3 1 0 0,-31-7 12 0 0,0 1-1 0 0,-1-2 0 0 0,1 1 1 0 0,0-1-1 0 0,0 0 1 0 0,0 0-1 0 0,-1-1 1 0 0,1 0-1 0 0,-1 0 0 0 0,1 0 1 0 0,-1-1-1 0 0,0 0 1 0 0,0-1-1 0 0,0 1 1 0 0,0-1-1 0 0,-1 0 0 0 0,1 0 1 0 0,-1-1-1 0 0,0 0 1 0 0,5-6-1 0 0,3-5 358 0 0,-1-2 1 0 0,-1 0-1 0 0,-1 0 0 0 0,0-1 0 0 0,-1 0 0 0 0,10-34 0 0 0,-15 42-28 0 0,-3 10-209 0 0,0 0-61 0 0,2-6-11 0 0,-2 5-22 0 0,0 23-318 0 0,-1-18 320 0 0,1 1-1 0 0,-1-1 1 0 0,0 0-1 0 0,1 0 1 0 0,0 1-1 0 0,0-1 1 0 0,0 0-1 0 0,0 0 1 0 0,0 0 0 0 0,0 0-1 0 0,1 0 1 0 0,0 0-1 0 0,-1 0 1 0 0,1-1-1 0 0,0 1 1 0 0,0 0-1 0 0,1-1 1 0 0,-1 0 0 0 0,0 1-1 0 0,1-1 1 0 0,0 0-1 0 0,4 2 1 0 0,5 4-18 0 0,1-1-1 0 0,0-1 1 0 0,22 9 0 0 0,-27-12-4 0 0,10 4-63 0 0,1-1 0 0 0,0-1 1 0 0,0 0-1 0 0,0-1 0 0 0,0-1 1 0 0,1-1-1 0 0,-1-1 0 0 0,37-2 1 0 0,-48 0 62 0 0,0 0-1 0 0,1-1 1 0 0,-1 0 0 0 0,0 0 0 0 0,0-1 0 0 0,0 1 0 0 0,-1-2 0 0 0,1 1-1 0 0,-1-1 1 0 0,0 0 0 0 0,0-1 0 0 0,0 0 0 0 0,0 0 0 0 0,-1 0-1 0 0,0-1 1 0 0,0 0 0 0 0,0 0 0 0 0,-1 0 0 0 0,0-1 0 0 0,0 0-1 0 0,-1 0 1 0 0,7-15 0 0 0,-3 2 224 0 0,-2-1 0 0 0,8-35 0 0 0,-3 7 256 0 0,-11 48-443 0 0,1-6 30 0 0,-2 5-94 0 0,0 6-316 0 0,-7 33 337 0 0,2-1 0 0 0,1 1-1 0 0,2 1 1 0 0,2-1 0 0 0,1 0 0 0 0,6 46 0 0 0,51 225 43 0 0,-50-277 2 0 0,-2-14-12 0 0,-2 1-1 0 0,0-1 0 0 0,-1 1 1 0 0,0-1-1 0 0,-2 1 0 0 0,0 0 1 0 0,-1-1-1 0 0,-6 34 0 0 0</inkml:trace>
+</inkml:ink>
+</file>
+
+<file path=ppt/ink/ink29.xml><?xml version="1.0" encoding="utf-8"?>
+<inkml:ink xmlns:inkml="http://www.w3.org/2003/InkML">
+  <inkml:definitions>
+    <inkml:context xml:id="ctx0">
+      <inkml:inkSource xml:id="inkSrc0">
+        <inkml:traceFormat>
+          <inkml:channel name="X" type="integer" min="-2.14748E9" max="2.14748E9" units="cm"/>
+          <inkml:channel name="Y" type="integer" min="-2.14748E9" max="2.14748E9" units="cm"/>
+          <inkml:channel name="F" type="integer" max="32767" units="dev"/>
+          <inkml:channel name="OA" type="integer" max="360" units="deg"/>
+          <inkml:channel name="OE" type="integer" max="90" units="deg"/>
+        </inkml:traceFormat>
+        <inkml:channelProperties>
+          <inkml:channelProperty channel="X" name="resolution" value="1000" units="1/cm"/>
+          <inkml:channelProperty channel="Y" name="resolution" value="1000" units="1/cm"/>
+          <inkml:channelProperty channel="F" name="resolution" value="0" units="1/dev"/>
+          <inkml:channelProperty channel="OA" name="resolution" value="1000" units="1/deg"/>
+          <inkml:channelProperty channel="OE" name="resolution" value="1000" units="1/deg"/>
+        </inkml:channelProperties>
+      </inkml:inkSource>
+      <inkml:timestamp xml:id="ts0" timeString="2026-03-20T17:28:49.313"/>
+    </inkml:context>
+    <inkml:brush xml:id="br0">
+      <inkml:brushProperty name="width" value="0.2" units="cm"/>
+      <inkml:brushProperty name="height" value="0.2" units="cm"/>
+      <inkml:brushProperty name="color" value="#FFC114"/>
+    </inkml:brush>
+  </inkml:definitions>
+  <inkml:trace contextRef="#ctx0" brushRef="#br0">205 90 3784 0 0,'0'0'-72'0'0,"-7"-21"-26"0"0,4 18 98 0 0,-6-4-9 0 0,-22 6 18 0 0,23 3-17 0 0,0-1 0 0 0,1 1 0 0 0,-1 0 0 0 0,1 1-1 0 0,0 0 1 0 0,0 0 0 0 0,0 0 0 0 0,0 1 0 0 0,0 0-1 0 0,0 1 1 0 0,1-1 0 0 0,0 1 0 0 0,0 0 0 0 0,1 1-1 0 0,-1 0 1 0 0,1-1 0 0 0,0 2 0 0 0,1-1 0 0 0,-1 0-1 0 0,1 1 1 0 0,-6 13 0 0 0,8-14 11 0 0,0 0-1 0 0,0 0 1 0 0,0 0 0 0 0,0 0 0 0 0,1 0-1 0 0,0 1 1 0 0,1-1 0 0 0,-1 0-1 0 0,1 1 1 0 0,0-1 0 0 0,1 1-1 0 0,-1-1 1 0 0,2 0 0 0 0,-1 1 0 0 0,0-1-1 0 0,1 0 1 0 0,0 0 0 0 0,1 0-1 0 0,-1 0 1 0 0,1-1 0 0 0,0 1-1 0 0,1-1 1 0 0,-1 1 0 0 0,1-1 0 0 0,0 0-1 0 0,0 0 1 0 0,9 7 0 0 0,-1-2 21 0 0,1 0 1 0 0,0-1 0 0 0,0 0-1 0 0,1-1 1 0 0,0-1 0 0 0,1 0-1 0 0,-1-1 1 0 0,2 0 0 0 0,-1-1 0 0 0,0-1-1 0 0,1-1 1 0 0,0 0 0 0 0,0-1-1 0 0,29 1 1 0 0,-36-3 1 0 0,1-1 1 0 0,-1 0-1 0 0,1 0 1 0 0,-1-1-1 0 0,0 0 1 0 0,1 0-1 0 0,-1-1 1 0 0,0-1 0 0 0,0 1-1 0 0,-1-2 1 0 0,1 1-1 0 0,-1-1 1 0 0,0 0-1 0 0,0-1 1 0 0,-1 0-1 0 0,1 0 1 0 0,-1 0-1 0 0,-1-1 1 0 0,1 0-1 0 0,-1-1 1 0 0,0 1-1 0 0,-1-1 1 0 0,0 0-1 0 0,0-1 1 0 0,7-16-1 0 0,-11 21-1 0 0,1 0 1 0 0,-1 0-1 0 0,0 0 0 0 0,0 0 1 0 0,0 0-1 0 0,0 0 0 0 0,-1 0 1 0 0,0 0-1 0 0,0 0 0 0 0,0 0 1 0 0,0 0-1 0 0,-1 0 0 0 0,1 0 0 0 0,-1 0 1 0 0,0 0-1 0 0,0 0 0 0 0,-1 0 1 0 0,1 0-1 0 0,-1 0 0 0 0,0 1 1 0 0,0-1-1 0 0,0 1 0 0 0,0-1 1 0 0,-1 1-1 0 0,1 0 0 0 0,-1 0 1 0 0,0 0-1 0 0,0 0 0 0 0,0 1 0 0 0,0-1 1 0 0,-1 1-1 0 0,1-1 0 0 0,-6-2 1 0 0,-14-7 0 0 0,0 2 0 0 0,0 0 1 0 0,-1 1-1 0 0,-35-8 0 0 0,15 3 35 0 0,-9 0-4 0 0,51 13-52 0 0,-17-6 26 0 0,9 2-93 0 0,9 2-264 0 0,195 2 186 0 0,9 0-27 0 0,-50-1 1422 0 0,-149 2-1089 0 0,23 2-117 0 0,-24-2-87 0 0,0 48-349 0 0,-6-19 368 0 0,2 0 1 0 0,1 0 0 0 0,1-1-1 0 0,2 1 1 0 0,1 0 0 0 0,1-1 0 0 0,1 0-1 0 0,1 0 1 0 0,14 32 0 0 0,-13-24 3263 0 0,-15-52-2706 0 0,-2-10-486 0 0,2 0 0 0 0,0-1 0 0 0,2 0 0 0 0,-4-52-1 0 0,8 62-152 0 0,1 1 0 0 0,0 0 0 0 0,1 0 0 0 0,1 0 0 0 0,1 1-1 0 0,0-1 1 0 0,1 0 0 0 0,1 1 0 0 0,10-23 0 0 0,-12 32 40 0 0,1 0 0 0 0,0 0 0 0 0,0 1 1 0 0,1-1-1 0 0,0 1 0 0 0,0 0 0 0 0,0 1 0 0 0,0-1 1 0 0,1 1-1 0 0,-1 0 0 0 0,1 1 0 0 0,0-1 0 0 0,0 1 1 0 0,1 0-1 0 0,-1 1 0 0 0,1-1 0 0 0,-1 1 0 0 0,1 0 1 0 0,0 1-1 0 0,0 0 0 0 0,0 0 0 0 0,0 1 0 0 0,11 0 0 0 0,-7 0 0 0 0,1 0-1 0 0,0 1 0 0 0,0 1 0 0 0,0 0 1 0 0,-1 1-1 0 0,1 0 0 0 0,-1 1 0 0 0,0 0 0 0 0,0 1 1 0 0,0 0-1 0 0,-1 1 0 0 0,1 0 0 0 0,9 8 1 0 0,-5-1 19 0 0,-1 1 1 0 0,-1 0 0 0 0,0 1 0 0 0,-1 1-1 0 0,-1 0 1 0 0,0 0 0 0 0,-1 1-1 0 0,-1 1 1 0 0,0-1 0 0 0,-2 1 0 0 0,0 1-1 0 0,-1 0 1 0 0,0-1 0 0 0,3 33 0 0 0,-2-27-67 0 0</inkml:trace>
+</inkml:ink>
+</file>
+
+<file path=ppt/ink/ink3.xml><?xml version="1.0" encoding="utf-8"?>
+<inkml:ink xmlns:inkml="http://www.w3.org/2003/InkML">
+  <inkml:definitions>
+    <inkml:context xml:id="ctx0">
+      <inkml:inkSource xml:id="inkSrc0">
+        <inkml:traceFormat>
+          <inkml:channel name="X" type="integer" min="-2.14748E9" max="2.14748E9" units="cm"/>
+          <inkml:channel name="Y" type="integer" min="-2.14748E9" max="2.14748E9" units="cm"/>
+          <inkml:channel name="F" type="integer" max="32767" units="dev"/>
+        </inkml:traceFormat>
+        <inkml:channelProperties>
+          <inkml:channelProperty channel="X" name="resolution" value="1000" units="1/cm"/>
+          <inkml:channelProperty channel="Y" name="resolution" value="1000" units="1/cm"/>
+          <inkml:channelProperty channel="F" name="resolution" value="0" units="1/dev"/>
+        </inkml:channelProperties>
+      </inkml:inkSource>
+      <inkml:timestamp xml:id="ts0" timeString="2026-09-08T17:07:58.262"/>
+    </inkml:context>
+    <inkml:brush xml:id="br0">
+      <inkml:brushProperty name="width" value="0.035" units="cm"/>
+      <inkml:brushProperty name="height" value="0.035" units="cm"/>
+      <inkml:brushProperty name="color" value="#FFC114"/>
+    </inkml:brush>
+  </inkml:definitions>
+  <inkml:trace contextRef="#ctx0" brushRef="#br0">0 0 24575,'5'0'0,"10"0"0,8 10 0,9 2 0,-1 9 0,4 1 0,5 1 0,0 6 0,-2-1 0,2 2 0,4 3 0,-2-1 0,2-6 0,3 2 0,2 2 0,-12-6 0,-11-5-8191</inkml:trace>
+</inkml:ink>
+</file>
+
+<file path=ppt/ink/ink30.xml><?xml version="1.0" encoding="utf-8"?>
+<inkml:ink xmlns:inkml="http://www.w3.org/2003/InkML">
+  <inkml:definitions>
+    <inkml:context xml:id="ctx0">
+      <inkml:inkSource xml:id="inkSrc0">
+        <inkml:traceFormat>
+          <inkml:channel name="X" type="integer" min="-2.14748E9" max="2.14748E9" units="cm"/>
+          <inkml:channel name="Y" type="integer" min="-2.14748E9" max="2.14748E9" units="cm"/>
+          <inkml:channel name="F" type="integer" max="32767" units="dev"/>
+          <inkml:channel name="OA" type="integer" max="360" units="deg"/>
+          <inkml:channel name="OE" type="integer" max="90" units="deg"/>
+        </inkml:traceFormat>
+        <inkml:channelProperties>
+          <inkml:channelProperty channel="X" name="resolution" value="1000" units="1/cm"/>
+          <inkml:channelProperty channel="Y" name="resolution" value="1000" units="1/cm"/>
+          <inkml:channelProperty channel="F" name="resolution" value="0" units="1/dev"/>
+          <inkml:channelProperty channel="OA" name="resolution" value="1000" units="1/deg"/>
+          <inkml:channelProperty channel="OE" name="resolution" value="1000" units="1/deg"/>
+        </inkml:channelProperties>
+      </inkml:inkSource>
+      <inkml:timestamp xml:id="ts0" timeString="2026-03-20T17:28:50.217"/>
+    </inkml:context>
+    <inkml:brush xml:id="br0">
+      <inkml:brushProperty name="width" value="0.2" units="cm"/>
+      <inkml:brushProperty name="height" value="0.2" units="cm"/>
+      <inkml:brushProperty name="color" value="#FFC114"/>
+    </inkml:brush>
+  </inkml:definitions>
+  <inkml:trace contextRef="#ctx0" brushRef="#br0">175 82 4080 0 0,'1'0'1'0'0,"1"-1"-1"0"0,-1 0 0 0 0,0 0 0 0 0,0 0 0 0 0,0 0 0 0 0,0 0 0 0 0,0 0 1 0 0,0 0-1 0 0,-1 0 0 0 0,1 0 0 0 0,0 0 0 0 0,0 0 0 0 0,-1 0 1 0 0,1-1-1 0 0,-1 1 0 0 0,1 0 0 0 0,-1-1 0 0 0,0 1 0 0 0,1 0 0 0 0,-1-1 1 0 0,0 1-1 0 0,0 0 0 0 0,0-1 0 0 0,0 1 0 0 0,0-2 0 0 0,-2 0 24 0 0,0 1-1 0 0,0 0 1 0 0,0 0-1 0 0,0 0 0 0 0,0 0 1 0 0,-1 0-1 0 0,1 0 1 0 0,-1 1-1 0 0,1-1 1 0 0,-1 1-1 0 0,0 0 0 0 0,1 0 1 0 0,-1 0-1 0 0,0 0 1 0 0,0 0-1 0 0,-4 0 0 0 0,4 0-40 0 0,-24 8-34 0 0,18-2 47 0 0,0 2-1 0 0,1-1 0 0 0,0 1 0 0 0,0 1 0 0 0,1-1 1 0 0,-1 1-1 0 0,2 0 0 0 0,-1 1 0 0 0,1 0 0 0 0,1 0 0 0 0,-1 0 1 0 0,1 1-1 0 0,1-1 0 0 0,0 1 0 0 0,1 0 0 0 0,-4 15 1 0 0,5-18 10 0 0,1 0 1 0 0,0 0 0 0 0,1 0 0 0 0,0 0-1 0 0,0 0 1 0 0,0 0 0 0 0,1-1 0 0 0,0 1 0 0 0,0 0-1 0 0,0 0 1 0 0,1-1 0 0 0,0 1 0 0 0,1 0 0 0 0,0-1-1 0 0,-1 0 1 0 0,2 0 0 0 0,-1 0 0 0 0,1 0-1 0 0,0 0 1 0 0,0-1 0 0 0,1 0 0 0 0,-1 0 0 0 0,1 0-1 0 0,1 0 1 0 0,-1-1 0 0 0,11 8 0 0 0,2-2 17 0 0,1-1 0 0 0,0 0 0 0 0,0-2 0 0 0,0 0 0 0 0,1-1 0 0 0,0-1 0 0 0,0 0 0 0 0,1-2 0 0 0,-1 0 1 0 0,23-1-1 0 0,-9-2 9 0 0,0-1 0 0 0,0-2 0 0 0,-1-1 0 0 0,1-1 0 0 0,44-14 0 0 0,-56 12-6 0 0,0-1 0 0 0,-1-1 0 0 0,0 0 0 0 0,0-2 0 0 0,-1-1 0 0 0,-1 0 0 0 0,0-1 0 0 0,0-1 0 0 0,-2-1 0 0 0,0-1 0 0 0,0 0 0 0 0,-2-1-1 0 0,0-1 1 0 0,-1 0 0 0 0,-1-1 0 0 0,0 0 0 0 0,-2-1 0 0 0,13-28 0 0 0,-23 45-9 0 0,0 0-1 0 0,0 1 1 0 0,-1-1-1 0 0,1 0 1 0 0,-1 1 0 0 0,1-1-1 0 0,-1 0 1 0 0,0 0-1 0 0,0 0 1 0 0,0 1 0 0 0,0-1-1 0 0,-1 0 1 0 0,1 0-1 0 0,-1 1 1 0 0,1-1-1 0 0,-1 0 1 0 0,0 1 0 0 0,0-1-1 0 0,0 0 1 0 0,-1 1-1 0 0,1 0 1 0 0,-1-1-1 0 0,-2-3 1 0 0,1 3-15 0 0,0 1 0 0 0,0 0-1 0 0,0 0 1 0 0,0 0 0 0 0,0 0 0 0 0,0 0-1 0 0,-1 0 1 0 0,1 1 0 0 0,-1 0-1 0 0,1 0 1 0 0,-1 0 0 0 0,1 0 0 0 0,-1 0-1 0 0,0 1 1 0 0,1-1 0 0 0,-1 1 0 0 0,0 0-1 0 0,1 0 1 0 0,-7 1 0 0 0,-2 2-22 0 0,0 0 1 0 0,1 1 0 0 0,-1 1-1 0 0,1-1 1 0 0,-1 2-1 0 0,2 0 1 0 0,-1 0-1 0 0,1 1 1 0 0,-1 0 0 0 0,2 1-1 0 0,-1 0 1 0 0,1 0-1 0 0,1 1 1 0 0,-1 0-1 0 0,1 1 1 0 0,1 0-1 0 0,-7 11 1 0 0,10-14 10 0 0,-1 0 0 0 0,1 1 0 0 0,1 0 0 0 0,0 0 0 0 0,0-1 0 0 0,0 2 0 0 0,1-1 1 0 0,0 0-1 0 0,1 0 0 0 0,0 1 0 0 0,0 14 0 0 0,1-17 9 0 0,1 0 0 0 0,0 0 1 0 0,0-1-1 0 0,1 1 1 0 0,-1 0-1 0 0,1-1 0 0 0,1 0 1 0 0,-1 1-1 0 0,1-1 0 0 0,0 0 1 0 0,0 0-1 0 0,0 0 0 0 0,1-1 1 0 0,-1 1-1 0 0,1-1 0 0 0,0 0 1 0 0,1 0-1 0 0,6 5 1 0 0,9 5 14 0 0,0-1 0 0 0,1-1 1 0 0,1-1-1 0 0,0-1 0 0 0,0-1 1 0 0,45 12-1 0 0,-31-12 45 0 0,0-2 0 0 0,1-2 0 0 0,68 2 0 0 0,-85-7 56 0 0,1-1-1 0 0,33-6 1 0 0,-50 7-319 0 0,1-1-1 0 0,0 0 1 0 0,0-1 0 0 0,-1 1 0 0 0,1-1-1 0 0,-1 0 1 0 0,1 0 0 0 0,-1 0-1 0 0,0 0 1 0 0,0-1 0 0 0,0 0-1 0 0,0 0 1 0 0,0 0 0 0 0,-1 0-1 0 0,1-1 1 0 0,-1 1 0 0 0,3-5 0 0 0,-3 0-576 0 0</inkml:trace>
+</inkml:ink>
+</file>
+
+<file path=ppt/ink/ink31.xml><?xml version="1.0" encoding="utf-8"?>
+<inkml:ink xmlns:inkml="http://www.w3.org/2003/InkML">
+  <inkml:definitions>
+    <inkml:context xml:id="ctx0">
+      <inkml:inkSource xml:id="inkSrc0">
+        <inkml:traceFormat>
+          <inkml:channel name="X" type="integer" min="-2.14748E9" max="2.14748E9" units="cm"/>
+          <inkml:channel name="Y" type="integer" min="-2.14748E9" max="2.14748E9" units="cm"/>
+          <inkml:channel name="F" type="integer" max="32767" units="dev"/>
+          <inkml:channel name="OA" type="integer" max="360" units="deg"/>
+          <inkml:channel name="OE" type="integer" max="90" units="deg"/>
+        </inkml:traceFormat>
+        <inkml:channelProperties>
+          <inkml:channelProperty channel="X" name="resolution" value="1000" units="1/cm"/>
+          <inkml:channelProperty channel="Y" name="resolution" value="1000" units="1/cm"/>
+          <inkml:channelProperty channel="F" name="resolution" value="0" units="1/dev"/>
+          <inkml:channelProperty channel="OA" name="resolution" value="1000" units="1/deg"/>
+          <inkml:channelProperty channel="OE" name="resolution" value="1000" units="1/deg"/>
+        </inkml:channelProperties>
+      </inkml:inkSource>
+      <inkml:timestamp xml:id="ts0" timeString="2026-03-20T17:28:50.481"/>
+    </inkml:context>
+    <inkml:brush xml:id="br0">
+      <inkml:brushProperty name="width" value="0.2" units="cm"/>
+      <inkml:brushProperty name="height" value="0.2" units="cm"/>
+      <inkml:brushProperty name="color" value="#FFC114"/>
+    </inkml:brush>
+  </inkml:definitions>
+  <inkml:trace contextRef="#ctx0" brushRef="#br0">1 5 4552 0 0,'0'0'4193'0'0,"13"-5"-2953"0"0</inkml:trace>
+</inkml:ink>
+</file>
+
+<file path=ppt/ink/ink32.xml><?xml version="1.0" encoding="utf-8"?>
 <inkml:ink xmlns:inkml="http://www.w3.org/2003/InkML">
   <inkml:definitions>
     <inkml:context xml:id="ctx0">
@@ -388,7 +1093,7 @@
 </inkml:ink>
 </file>
 
-<file path=ppt/ink/ink11.xml><?xml version="1.0" encoding="utf-8"?>
+<file path=ppt/ink/ink33.xml><?xml version="1.0" encoding="utf-8"?>
 <inkml:ink xmlns:inkml="http://www.w3.org/2003/InkML">
   <inkml:definitions>
     <inkml:context xml:id="ctx0">
@@ -420,7 +1125,7 @@
 </inkml:ink>
 </file>
 
-<file path=ppt/ink/ink12.xml><?xml version="1.0" encoding="utf-8"?>
+<file path=ppt/ink/ink34.xml><?xml version="1.0" encoding="utf-8"?>
 <inkml:ink xmlns:inkml="http://www.w3.org/2003/InkML">
   <inkml:definitions>
     <inkml:context xml:id="ctx0">
@@ -452,7 +1157,7 @@
 </inkml:ink>
 </file>
 
-<file path=ppt/ink/ink13.xml><?xml version="1.0" encoding="utf-8"?>
+<file path=ppt/ink/ink35.xml><?xml version="1.0" encoding="utf-8"?>
 <inkml:ink xmlns:inkml="http://www.w3.org/2003/InkML">
   <inkml:definitions>
     <inkml:context xml:id="ctx0">
@@ -484,7 +1189,7 @@
 </inkml:ink>
 </file>
 
-<file path=ppt/ink/ink14.xml><?xml version="1.0" encoding="utf-8"?>
+<file path=ppt/ink/ink36.xml><?xml version="1.0" encoding="utf-8"?>
 <inkml:ink xmlns:inkml="http://www.w3.org/2003/InkML">
   <inkml:definitions>
     <inkml:context xml:id="ctx0">
@@ -516,7 +1221,7 @@
 </inkml:ink>
 </file>
 
-<file path=ppt/ink/ink15.xml><?xml version="1.0" encoding="utf-8"?>
+<file path=ppt/ink/ink37.xml><?xml version="1.0" encoding="utf-8"?>
 <inkml:ink xmlns:inkml="http://www.w3.org/2003/InkML">
   <inkml:definitions>
     <inkml:context xml:id="ctx0">
@@ -548,7 +1253,7 @@
 </inkml:ink>
 </file>
 
-<file path=ppt/ink/ink16.xml><?xml version="1.0" encoding="utf-8"?>
+<file path=ppt/ink/ink38.xml><?xml version="1.0" encoding="utf-8"?>
 <inkml:ink xmlns:inkml="http://www.w3.org/2003/InkML">
   <inkml:definitions>
     <inkml:context xml:id="ctx0">
@@ -580,7 +1285,7 @@
 </inkml:ink>
 </file>
 
-<file path=ppt/ink/ink17.xml><?xml version="1.0" encoding="utf-8"?>
+<file path=ppt/ink/ink39.xml><?xml version="1.0" encoding="utf-8"?>
 <inkml:ink xmlns:inkml="http://www.w3.org/2003/InkML">
   <inkml:definitions>
     <inkml:context xml:id="ctx0">
@@ -612,7 +1317,35 @@
 </inkml:ink>
 </file>
 
-<file path=ppt/ink/ink18.xml><?xml version="1.0" encoding="utf-8"?>
+<file path=ppt/ink/ink4.xml><?xml version="1.0" encoding="utf-8"?>
+<inkml:ink xmlns:inkml="http://www.w3.org/2003/InkML">
+  <inkml:definitions>
+    <inkml:context xml:id="ctx0">
+      <inkml:inkSource xml:id="inkSrc0">
+        <inkml:traceFormat>
+          <inkml:channel name="X" type="integer" min="-2.14748E9" max="2.14748E9" units="cm"/>
+          <inkml:channel name="Y" type="integer" min="-2.14748E9" max="2.14748E9" units="cm"/>
+          <inkml:channel name="F" type="integer" max="32767" units="dev"/>
+        </inkml:traceFormat>
+        <inkml:channelProperties>
+          <inkml:channelProperty channel="X" name="resolution" value="1000" units="1/cm"/>
+          <inkml:channelProperty channel="Y" name="resolution" value="1000" units="1/cm"/>
+          <inkml:channelProperty channel="F" name="resolution" value="0" units="1/dev"/>
+        </inkml:channelProperties>
+      </inkml:inkSource>
+      <inkml:timestamp xml:id="ts0" timeString="2026-09-08T17:07:58.263"/>
+    </inkml:context>
+    <inkml:brush xml:id="br0">
+      <inkml:brushProperty name="width" value="0.035" units="cm"/>
+      <inkml:brushProperty name="height" value="0.035" units="cm"/>
+      <inkml:brushProperty name="color" value="#FFC114"/>
+    </inkml:brush>
+  </inkml:definitions>
+  <inkml:trace contextRef="#ctx0" brushRef="#br0">257 0 24575,'-9'0'0,"-4"5"0,-3 1 0,0 9 0,-1 12 0,-3 5 0,-7 2 0,1 5 0,5 5 0,-3-6 0,2 1 0,5 3 0,1-1 0,3-8-8191</inkml:trace>
+</inkml:ink>
+</file>
+
+<file path=ppt/ink/ink40.xml><?xml version="1.0" encoding="utf-8"?>
 <inkml:ink xmlns:inkml="http://www.w3.org/2003/InkML">
   <inkml:definitions>
     <inkml:context xml:id="ctx0">
@@ -644,7 +1377,7 @@
 </inkml:ink>
 </file>
 
-<file path=ppt/ink/ink19.xml><?xml version="1.0" encoding="utf-8"?>
+<file path=ppt/ink/ink41.xml><?xml version="1.0" encoding="utf-8"?>
 <inkml:ink xmlns:inkml="http://www.w3.org/2003/InkML">
   <inkml:definitions>
     <inkml:context xml:id="ctx0">
@@ -676,39 +1409,7 @@
 </inkml:ink>
 </file>
 
-<file path=ppt/ink/ink2.xml><?xml version="1.0" encoding="utf-8"?>
-<inkml:ink xmlns:inkml="http://www.w3.org/2003/InkML">
-  <inkml:definitions>
-    <inkml:context xml:id="ctx0">
-      <inkml:inkSource xml:id="inkSrc0">
-        <inkml:traceFormat>
-          <inkml:channel name="X" type="integer" min="-2.14748E9" max="2.14748E9" units="cm"/>
-          <inkml:channel name="Y" type="integer" min="-2.14748E9" max="2.14748E9" units="cm"/>
-          <inkml:channel name="F" type="integer" max="32767" units="dev"/>
-          <inkml:channel name="OA" type="integer" max="360" units="deg"/>
-          <inkml:channel name="OE" type="integer" max="90" units="deg"/>
-        </inkml:traceFormat>
-        <inkml:channelProperties>
-          <inkml:channelProperty channel="X" name="resolution" value="1000" units="1/cm"/>
-          <inkml:channelProperty channel="Y" name="resolution" value="1000" units="1/cm"/>
-          <inkml:channelProperty channel="F" name="resolution" value="0" units="1/dev"/>
-          <inkml:channelProperty channel="OA" name="resolution" value="1000" units="1/deg"/>
-          <inkml:channelProperty channel="OE" name="resolution" value="1000" units="1/deg"/>
-        </inkml:channelProperties>
-      </inkml:inkSource>
-      <inkml:timestamp xml:id="ts0" timeString="2026-03-20T17:27:52.609"/>
-    </inkml:context>
-    <inkml:brush xml:id="br0">
-      <inkml:brushProperty name="width" value="0.2" units="cm"/>
-      <inkml:brushProperty name="height" value="0.2" units="cm"/>
-      <inkml:brushProperty name="color" value="#FFC114"/>
-    </inkml:brush>
-  </inkml:definitions>
-  <inkml:trace contextRef="#ctx0" brushRef="#br0">0 285 3628 0 0,'0'0'-241'0'0,"2"-1"-538"0"0,79-20 561 0 0,45-9 324 0 0,127-2 503 0 0,-213 27 112 0 0,-39 5-631 0 0,16-3 1068 0 0,-16 3-1280 0 0,9-2 1541 0 0,-9-5-527 0 0,-5-5-934 0 0,-4-2 38 0 0,0 1 0 0 0,0 0 0 0 0,-1 2 1 0 0,1 0-1 0 0,-1 1 0 0 0,0 1 0 0 0,-1 1 1 0 0,-13-8-1 0 0,-35-30-17 0 0,30 26-21 0 0,27 20 35 0 0,4 3-719 0 0,116 75 633 0 0,10 9 172 0 0,-90-58-60 0 0,-38-29-11 0 0,3 4 11 0 0,-4-4-23 0 0,1 0 0 0 0,-1 0-1 0 0,0 0 1 0 0,1 0 0 0 0,-1 0-1 0 0,0 1 1 0 0,1-1 0 0 0,-1 0-1 0 0,0 0 1 0 0,1 1 0 0 0,-1-1-1 0 0,0 0 1 0 0,1 1 0 0 0,-1-1-1 0 0,0 0 1 0 0,1 1 0 0 0,-1-1-1 0 0,0 1 1 0 0,0-1-1 0 0,0 1 1 0 0,0-1 0 0 0,1 1-1 0 0,-1 0 1 0 0,0-1 0 0 0,0 1-1 0 0,0 0 1 0 0,1-1 0 0 0,-1 1-1 0 0,0 0 1 0 0,0-1 0 0 0,0 1-1 0 0,0 0 1 0 0,0 0 0 0 0,0 0-1 0 0,-8 19-5 0 0,-1 0 1 0 0,0-2-1 0 0,-1 0 0 0 0,-20 28 0 0 0,6-10 3 0 0,-62 86-15 0 0,77-111 10 0 0,3-1 70 0 0</inkml:trace>
-</inkml:ink>
-</file>
-
-<file path=ppt/ink/ink20.xml><?xml version="1.0" encoding="utf-8"?>
+<file path=ppt/ink/ink42.xml><?xml version="1.0" encoding="utf-8"?>
 <inkml:ink xmlns:inkml="http://www.w3.org/2003/InkML">
   <inkml:definitions>
     <inkml:context xml:id="ctx0">
@@ -740,7 +1441,7 @@
 </inkml:ink>
 </file>
 
-<file path=ppt/ink/ink21.xml><?xml version="1.0" encoding="utf-8"?>
+<file path=ppt/ink/ink43.xml><?xml version="1.0" encoding="utf-8"?>
 <inkml:ink xmlns:inkml="http://www.w3.org/2003/InkML">
   <inkml:definitions>
     <inkml:context xml:id="ctx0">
@@ -772,7 +1473,7 @@
 </inkml:ink>
 </file>
 
-<file path=ppt/ink/ink22.xml><?xml version="1.0" encoding="utf-8"?>
+<file path=ppt/ink/ink44.xml><?xml version="1.0" encoding="utf-8"?>
 <inkml:ink xmlns:inkml="http://www.w3.org/2003/InkML">
   <inkml:definitions>
     <inkml:context xml:id="ctx0">
@@ -804,7 +1505,7 @@
 </inkml:ink>
 </file>
 
-<file path=ppt/ink/ink23.xml><?xml version="1.0" encoding="utf-8"?>
+<file path=ppt/ink/ink45.xml><?xml version="1.0" encoding="utf-8"?>
 <inkml:ink xmlns:inkml="http://www.w3.org/2003/InkML">
   <inkml:definitions>
     <inkml:context xml:id="ctx0">
@@ -836,7 +1537,7 @@
 </inkml:ink>
 </file>
 
-<file path=ppt/ink/ink24.xml><?xml version="1.0" encoding="utf-8"?>
+<file path=ppt/ink/ink46.xml><?xml version="1.0" encoding="utf-8"?>
 <inkml:ink xmlns:inkml="http://www.w3.org/2003/InkML">
   <inkml:definitions>
     <inkml:context xml:id="ctx0">
@@ -868,7 +1569,7 @@
 </inkml:ink>
 </file>
 
-<file path=ppt/ink/ink25.xml><?xml version="1.0" encoding="utf-8"?>
+<file path=ppt/ink/ink47.xml><?xml version="1.0" encoding="utf-8"?>
 <inkml:ink xmlns:inkml="http://www.w3.org/2003/InkML">
   <inkml:definitions>
     <inkml:context xml:id="ctx0">
@@ -900,7 +1601,7 @@
 </inkml:ink>
 </file>
 
-<file path=ppt/ink/ink26.xml><?xml version="1.0" encoding="utf-8"?>
+<file path=ppt/ink/ink48.xml><?xml version="1.0" encoding="utf-8"?>
 <inkml:ink xmlns:inkml="http://www.w3.org/2003/InkML">
   <inkml:definitions>
     <inkml:context xml:id="ctx0">
@@ -932,7 +1633,7 @@
 </inkml:ink>
 </file>
 
-<file path=ppt/ink/ink27.xml><?xml version="1.0" encoding="utf-8"?>
+<file path=ppt/ink/ink49.xml><?xml version="1.0" encoding="utf-8"?>
 <inkml:ink xmlns:inkml="http://www.w3.org/2003/InkML">
   <inkml:definitions>
     <inkml:context xml:id="ctx0">
@@ -964,7 +1665,35 @@
 </inkml:ink>
 </file>
 
-<file path=ppt/ink/ink28.xml><?xml version="1.0" encoding="utf-8"?>
+<file path=ppt/ink/ink5.xml><?xml version="1.0" encoding="utf-8"?>
+<inkml:ink xmlns:inkml="http://www.w3.org/2003/InkML">
+  <inkml:definitions>
+    <inkml:context xml:id="ctx0">
+      <inkml:inkSource xml:id="inkSrc0">
+        <inkml:traceFormat>
+          <inkml:channel name="X" type="integer" min="-2.14748E9" max="2.14748E9" units="cm"/>
+          <inkml:channel name="Y" type="integer" min="-2.14748E9" max="2.14748E9" units="cm"/>
+          <inkml:channel name="F" type="integer" max="32767" units="dev"/>
+        </inkml:traceFormat>
+        <inkml:channelProperties>
+          <inkml:channelProperty channel="X" name="resolution" value="1000" units="1/cm"/>
+          <inkml:channelProperty channel="Y" name="resolution" value="1000" units="1/cm"/>
+          <inkml:channelProperty channel="F" name="resolution" value="0" units="1/dev"/>
+        </inkml:channelProperties>
+      </inkml:inkSource>
+      <inkml:timestamp xml:id="ts0" timeString="2026-09-08T17:08:06.420"/>
+    </inkml:context>
+    <inkml:brush xml:id="br0">
+      <inkml:brushProperty name="width" value="0.035" units="cm"/>
+      <inkml:brushProperty name="height" value="0.035" units="cm"/>
+      <inkml:brushProperty name="color" value="#FFC114"/>
+    </inkml:brush>
+  </inkml:definitions>
+  <inkml:trace contextRef="#ctx0" brushRef="#br0">0 0 24575,'5'0'0,"10"0"0,8 10 0,9 2 0,-1 9 0,4 1 0,5 1 0,0 6 0,-2-1 0,2 2 0,4 3 0,-2-1 0,2-6 0,3 2 0,2 2 0,-12-6 0,-11-5-8191</inkml:trace>
+</inkml:ink>
+</file>
+
+<file path=ppt/ink/ink50.xml><?xml version="1.0" encoding="utf-8"?>
 <inkml:ink xmlns:inkml="http://www.w3.org/2003/InkML">
   <inkml:definitions>
     <inkml:context xml:id="ctx0">
@@ -996,7 +1725,7 @@
 </inkml:ink>
 </file>
 
-<file path=ppt/ink/ink29.xml><?xml version="1.0" encoding="utf-8"?>
+<file path=ppt/ink/ink51.xml><?xml version="1.0" encoding="utf-8"?>
 <inkml:ink xmlns:inkml="http://www.w3.org/2003/InkML">
   <inkml:definitions>
     <inkml:context xml:id="ctx0">
@@ -1028,39 +1757,7 @@
 </inkml:ink>
 </file>
 
-<file path=ppt/ink/ink3.xml><?xml version="1.0" encoding="utf-8"?>
-<inkml:ink xmlns:inkml="http://www.w3.org/2003/InkML">
-  <inkml:definitions>
-    <inkml:context xml:id="ctx0">
-      <inkml:inkSource xml:id="inkSrc0">
-        <inkml:traceFormat>
-          <inkml:channel name="X" type="integer" min="-2.14748E9" max="2.14748E9" units="cm"/>
-          <inkml:channel name="Y" type="integer" min="-2.14748E9" max="2.14748E9" units="cm"/>
-          <inkml:channel name="F" type="integer" max="32767" units="dev"/>
-          <inkml:channel name="OA" type="integer" max="360" units="deg"/>
-          <inkml:channel name="OE" type="integer" max="90" units="deg"/>
-        </inkml:traceFormat>
-        <inkml:channelProperties>
-          <inkml:channelProperty channel="X" name="resolution" value="1000" units="1/cm"/>
-          <inkml:channelProperty channel="Y" name="resolution" value="1000" units="1/cm"/>
-          <inkml:channelProperty channel="F" name="resolution" value="0" units="1/dev"/>
-          <inkml:channelProperty channel="OA" name="resolution" value="1000" units="1/deg"/>
-          <inkml:channelProperty channel="OE" name="resolution" value="1000" units="1/deg"/>
-        </inkml:channelProperties>
-      </inkml:inkSource>
-      <inkml:timestamp xml:id="ts0" timeString="2026-03-20T17:28:41.810"/>
-    </inkml:context>
-    <inkml:brush xml:id="br0">
-      <inkml:brushProperty name="width" value="0.2" units="cm"/>
-      <inkml:brushProperty name="height" value="0.2" units="cm"/>
-      <inkml:brushProperty name="color" value="#FFC114"/>
-    </inkml:brush>
-  </inkml:definitions>
-  <inkml:trace contextRef="#ctx0" brushRef="#br0">100 149 5529 0 0,'-16'-51'973'0'0,"15"50"-984"0"0,1 6-382 0 0,-1 44 357 0 0,2 0 1 0 0,13 77-1 0 0,-3-39 64 0 0,16 152 152 0 0,-24-199 1736 0 0,-6-46-1799 0 0,-23-55-89 0 0,3-1 0 0 0,3-1 0 0 0,3-1 0 0 0,-11-77-1 0 0,10-19-102 0 0,17 156 56 0 0,1 0-1 0 0,-1 0 0 0 0,1 0 1 0 0,0 0-1 0 0,0 0 1 0 0,0 0-1 0 0,0 0 0 0 0,1 0 1 0 0,-1 0-1 0 0,1 0 1 0 0,0 0-1 0 0,1 0 0 0 0,-1 0 1 0 0,0 1-1 0 0,1-1 1 0 0,0 1-1 0 0,0-1 0 0 0,0 1 1 0 0,1-1-1 0 0,-1 1 1 0 0,1 0-1 0 0,-1 0 0 0 0,5-3 1 0 0,2 0-34 0 0,0 1 0 0 0,0 0 0 0 0,0 1-1 0 0,0 0 1 0 0,1 1 0 0 0,-1 0 0 0 0,1 0 0 0 0,20-2 0 0 0,-14 3 10 0 0,0 0-1 0 0,0 2 1 0 0,0 0-1 0 0,0 1 1 0 0,0 1 0 0 0,-1 0-1 0 0,1 1 1 0 0,0 0-1 0 0,-1 2 1 0 0,0 0 0 0 0,0 0-1 0 0,0 1 1 0 0,-1 1-1 0 0,23 14 1 0 0,-13-4-29 0 0,0 0 1 0 0,0 1-1 0 0,-2 1 1 0 0,0 2-1 0 0,-2 0 1 0 0,0 1-1 0 0,20 30 1 0 0,-35-46 67 0 0,-1 0 1 0 0,1 0 0 0 0,-2 1 0 0 0,1-1 0 0 0,-1 1 0 0 0,0 0 0 0 0,0 0-1 0 0,-1 0 1 0 0,0 0 0 0 0,0 1 0 0 0,-1-1 0 0 0,0 1 0 0 0,0-1 0 0 0,0 1 0 0 0,-1-1-1 0 0,0 1 1 0 0,-1-1 0 0 0,0 1 0 0 0,0-1 0 0 0,-1 1 0 0 0,0-1 0 0 0,0 0-1 0 0,0 0 1 0 0,-1 0 0 0 0,0 0 0 0 0,0 0 0 0 0,-1-1 0 0 0,0 1 0 0 0,0-1 0 0 0,-1 0-1 0 0,0 0 1 0 0,0 0 0 0 0,0-1 0 0 0,0 0 0 0 0,-1 0 0 0 0,-12 8 0 0 0,-18 11 60 0 0,-75 40 1 0 0,24-17 221 0 0,51-32 157 0 0,35-14-264 0 0,-4 1 254 0 0</inkml:trace>
-</inkml:ink>
-</file>
-
-<file path=ppt/ink/ink30.xml><?xml version="1.0" encoding="utf-8"?>
+<file path=ppt/ink/ink52.xml><?xml version="1.0" encoding="utf-8"?>
 <inkml:ink xmlns:inkml="http://www.w3.org/2003/InkML">
   <inkml:definitions>
     <inkml:context xml:id="ctx0">
@@ -1088,7 +1785,7 @@
 </inkml:ink>
 </file>
 
-<file path=ppt/ink/ink31.xml><?xml version="1.0" encoding="utf-8"?>
+<file path=ppt/ink/ink53.xml><?xml version="1.0" encoding="utf-8"?>
 <inkml:ink xmlns:inkml="http://www.w3.org/2003/InkML">
   <inkml:definitions>
     <inkml:context xml:id="ctx0">
@@ -1116,7 +1813,7 @@
 </inkml:ink>
 </file>
 
-<file path=ppt/ink/ink32.xml><?xml version="1.0" encoding="utf-8"?>
+<file path=ppt/ink/ink54.xml><?xml version="1.0" encoding="utf-8"?>
 <inkml:ink xmlns:inkml="http://www.w3.org/2003/InkML">
   <inkml:definitions>
     <inkml:context xml:id="ctx0">
@@ -1144,7 +1841,7 @@
 </inkml:ink>
 </file>
 
-<file path=ppt/ink/ink33.xml><?xml version="1.0" encoding="utf-8"?>
+<file path=ppt/ink/ink55.xml><?xml version="1.0" encoding="utf-8"?>
 <inkml:ink xmlns:inkml="http://www.w3.org/2003/InkML">
   <inkml:definitions>
     <inkml:context xml:id="ctx0">
@@ -1172,7 +1869,7 @@
 </inkml:ink>
 </file>
 
-<file path=ppt/ink/ink34.xml><?xml version="1.0" encoding="utf-8"?>
+<file path=ppt/ink/ink56.xml><?xml version="1.0" encoding="utf-8"?>
 <inkml:ink xmlns:inkml="http://www.w3.org/2003/InkML">
   <inkml:definitions>
     <inkml:context xml:id="ctx0">
@@ -1200,7 +1897,7 @@
 </inkml:ink>
 </file>
 
-<file path=ppt/ink/ink35.xml><?xml version="1.0" encoding="utf-8"?>
+<file path=ppt/ink/ink57.xml><?xml version="1.0" encoding="utf-8"?>
 <inkml:ink xmlns:inkml="http://www.w3.org/2003/InkML">
   <inkml:definitions>
     <inkml:context xml:id="ctx0">
@@ -1228,7 +1925,7 @@
 </inkml:ink>
 </file>
 
-<file path=ppt/ink/ink36.xml><?xml version="1.0" encoding="utf-8"?>
+<file path=ppt/ink/ink58.xml><?xml version="1.0" encoding="utf-8"?>
 <inkml:ink xmlns:inkml="http://www.w3.org/2003/InkML">
   <inkml:definitions>
     <inkml:context xml:id="ctx0">
@@ -1256,7 +1953,7 @@
 </inkml:ink>
 </file>
 
-<file path=ppt/ink/ink37.xml><?xml version="1.0" encoding="utf-8"?>
+<file path=ppt/ink/ink59.xml><?xml version="1.0" encoding="utf-8"?>
 <inkml:ink xmlns:inkml="http://www.w3.org/2003/InkML">
   <inkml:definitions>
     <inkml:context xml:id="ctx0">
@@ -1284,7 +1981,35 @@
 </inkml:ink>
 </file>
 
-<file path=ppt/ink/ink38.xml><?xml version="1.0" encoding="utf-8"?>
+<file path=ppt/ink/ink6.xml><?xml version="1.0" encoding="utf-8"?>
+<inkml:ink xmlns:inkml="http://www.w3.org/2003/InkML">
+  <inkml:definitions>
+    <inkml:context xml:id="ctx0">
+      <inkml:inkSource xml:id="inkSrc0">
+        <inkml:traceFormat>
+          <inkml:channel name="X" type="integer" min="-2.14748E9" max="2.14748E9" units="cm"/>
+          <inkml:channel name="Y" type="integer" min="-2.14748E9" max="2.14748E9" units="cm"/>
+          <inkml:channel name="F" type="integer" max="32767" units="dev"/>
+        </inkml:traceFormat>
+        <inkml:channelProperties>
+          <inkml:channelProperty channel="X" name="resolution" value="1000" units="1/cm"/>
+          <inkml:channelProperty channel="Y" name="resolution" value="1000" units="1/cm"/>
+          <inkml:channelProperty channel="F" name="resolution" value="0" units="1/dev"/>
+        </inkml:channelProperties>
+      </inkml:inkSource>
+      <inkml:timestamp xml:id="ts0" timeString="2026-09-08T17:08:06.421"/>
+    </inkml:context>
+    <inkml:brush xml:id="br0">
+      <inkml:brushProperty name="width" value="0.035" units="cm"/>
+      <inkml:brushProperty name="height" value="0.035" units="cm"/>
+      <inkml:brushProperty name="color" value="#FFC114"/>
+    </inkml:brush>
+  </inkml:definitions>
+  <inkml:trace contextRef="#ctx0" brushRef="#br0">257 0 24575,'-9'0'0,"-4"5"0,-3 1 0,0 9 0,-1 12 0,-3 5 0,-7 2 0,1 5 0,5 5 0,-3-6 0,2 1 0,5 3 0,1-1 0,3-8-8191</inkml:trace>
+</inkml:ink>
+</file>
+
+<file path=ppt/ink/ink60.xml><?xml version="1.0" encoding="utf-8"?>
 <inkml:ink xmlns:inkml="http://www.w3.org/2003/InkML">
   <inkml:definitions>
     <inkml:context xml:id="ctx0">
@@ -1312,7 +2037,7 @@
 </inkml:ink>
 </file>
 
-<file path=ppt/ink/ink39.xml><?xml version="1.0" encoding="utf-8"?>
+<file path=ppt/ink/ink61.xml><?xml version="1.0" encoding="utf-8"?>
 <inkml:ink xmlns:inkml="http://www.w3.org/2003/InkML">
   <inkml:definitions>
     <inkml:context xml:id="ctx0">
@@ -1340,39 +2065,7 @@
 </inkml:ink>
 </file>
 
-<file path=ppt/ink/ink4.xml><?xml version="1.0" encoding="utf-8"?>
-<inkml:ink xmlns:inkml="http://www.w3.org/2003/InkML">
-  <inkml:definitions>
-    <inkml:context xml:id="ctx0">
-      <inkml:inkSource xml:id="inkSrc0">
-        <inkml:traceFormat>
-          <inkml:channel name="X" type="integer" min="-2.14748E9" max="2.14748E9" units="cm"/>
-          <inkml:channel name="Y" type="integer" min="-2.14748E9" max="2.14748E9" units="cm"/>
-          <inkml:channel name="F" type="integer" max="32767" units="dev"/>
-          <inkml:channel name="OA" type="integer" max="360" units="deg"/>
-          <inkml:channel name="OE" type="integer" max="90" units="deg"/>
-        </inkml:traceFormat>
-        <inkml:channelProperties>
-          <inkml:channelProperty channel="X" name="resolution" value="1000" units="1/cm"/>
-          <inkml:channelProperty channel="Y" name="resolution" value="1000" units="1/cm"/>
-          <inkml:channelProperty channel="F" name="resolution" value="0" units="1/dev"/>
-          <inkml:channelProperty channel="OA" name="resolution" value="1000" units="1/deg"/>
-          <inkml:channelProperty channel="OE" name="resolution" value="1000" units="1/deg"/>
-        </inkml:channelProperties>
-      </inkml:inkSource>
-      <inkml:timestamp xml:id="ts0" timeString="2026-03-20T17:28:44.023"/>
-    </inkml:context>
-    <inkml:brush xml:id="br0">
-      <inkml:brushProperty name="width" value="0.2" units="cm"/>
-      <inkml:brushProperty name="height" value="0.2" units="cm"/>
-      <inkml:brushProperty name="color" value="#FFC114"/>
-    </inkml:brush>
-  </inkml:definitions>
-  <inkml:trace contextRef="#ctx0" brushRef="#br0">217 165 5048 0 0,'-4'-2'-23'0'0,"1"0"-1"0"0,-1 0 0 0 0,0 0 0 0 0,-1 1 0 0 0,1-1 0 0 0,0 1 0 0 0,0 0 0 0 0,0 0 0 0 0,-1 0 0 0 0,1 1 0 0 0,-1 0 1 0 0,1-1-1 0 0,0 1 0 0 0,-1 1 0 0 0,1-1 0 0 0,-1 1 0 0 0,1 0 0 0 0,0 0 0 0 0,0 0 0 0 0,-1 0 0 0 0,1 1 0 0 0,0 0 1 0 0,0 0-1 0 0,1 0 0 0 0,-1 0 0 0 0,0 0 0 0 0,1 1 0 0 0,-6 5 0 0 0,-1 0 4 0 0,1 0 1 0 0,0 1-1 0 0,1 1 0 0 0,0-1 0 0 0,0 1 1 0 0,1 1-1 0 0,0 0 0 0 0,1 0 0 0 0,-6 13 1 0 0,11-21 17 0 0,-1 1 0 0 0,1-1 1 0 0,0 1-1 0 0,0 0 1 0 0,0 0-1 0 0,0-1 0 0 0,1 1 1 0 0,0 0-1 0 0,0 0 0 0 0,0 0 1 0 0,0-1-1 0 0,0 1 0 0 0,1 0 1 0 0,-1 0-1 0 0,1-1 1 0 0,0 1-1 0 0,1 0 0 0 0,1 4 1 0 0,0-3 3 0 0,0 0 0 0 0,0 0 0 0 0,1-1 0 0 0,0 1 1 0 0,0-1-1 0 0,0 0 0 0 0,0 0 0 0 0,0 0 0 0 0,1-1 1 0 0,10 6-1 0 0,-1-1 42 0 0,1-1-1 0 0,0-1 1 0 0,1 0 0 0 0,-1-1 0 0 0,1-1 0 0 0,0 0 0 0 0,20 1 0 0 0,-31-5-27 0 0,0 0 0 0 0,0 0 0 0 0,0-1 0 0 0,0 0 0 0 0,0 0 0 0 0,0 0 0 0 0,0-1 0 0 0,0 0 0 0 0,0 0 0 0 0,-1 0 0 0 0,1 0 0 0 0,-1-1 0 0 0,0 0 0 0 0,1 1 0 0 0,-1-2 1 0 0,0 1-1 0 0,-1 0 0 0 0,1-1 0 0 0,3-4 0 0 0,-2 2-6 0 0,0 0 1 0 0,0 0-1 0 0,0-1 0 0 0,-1 0 1 0 0,0 1-1 0 0,-1-1 1 0 0,1-1-1 0 0,-1 1 1 0 0,-1 0-1 0 0,1-1 0 0 0,1-8 1 0 0,-4 11-17 0 0,1 1 0 0 0,-1 0 0 0 0,0 0 0 0 0,0 0 1 0 0,0-1-1 0 0,0 1 0 0 0,-1 0 0 0 0,0 0 0 0 0,0 0 0 0 0,0 0 1 0 0,0 0-1 0 0,-1 0 0 0 0,1 0 0 0 0,-1 0 0 0 0,0 0 0 0 0,0 1 1 0 0,-1-1-1 0 0,1 1 0 0 0,-1-1 0 0 0,1 1 0 0 0,-1 0 1 0 0,0 0-1 0 0,-5-4 0 0 0,-5-1-14 0 0,1 1 0 0 0,-1 0 0 0 0,0 1-1 0 0,0 1 1 0 0,-21-6 0 0 0,-18-9 54 0 0,50 19-22 0 0,-3 0 24 0 0,0-1-1 0 0,0 1 0 0 0,0-2 1 0 0,1 1-1 0 0,-1 0 1 0 0,1-1-1 0 0,-7-5 0 0 0,17 4-65 0 0,-1 0-1 0 0,1 1 0 0 0,1-1 0 0 0,-1 1 0 0 0,0 0 0 0 0,1 1 1 0 0,-1 0-1 0 0,1 0 0 0 0,0 0 0 0 0,9-1 0 0 0,84-5-235 0 0,-44 4 24 0 0,112-8 19 0 0,-165 11 353 0 0,-2 1-139 0 0,0 0 0 0 0,0 0 0 0 0,1 0 0 0 0,-1 0 0 0 0,0 0 0 0 0,0 0 0 0 0,1 0 0 0 0,-1 0 0 0 0,0 0-1 0 0,0 1 1 0 0,0-1 0 0 0,1 1 0 0 0,-1-1 0 0 0,0 0 0 0 0,0 1 0 0 0,0 0 0 0 0,0-1 0 0 0,0 1 0 0 0,0 0 0 0 0,0-1 0 0 0,0 1 0 0 0,1 1 0 0 0,-2 17-86 0 0,0 23 31 0 0,1 0 0 0 0,12 74 1 0 0,8-3 28 0 0,-19-105 90 0 0,2 19 3077 0 0,-13-46-3147 0 0,1 0 0 0 0,1-1 1 0 0,0 1-1 0 0,1-2 0 0 0,-5-36 0 0 0,5 10-217 0 0,0-75 1 0 0,6 116 168 0 0,0 0 1 0 0,0 0 0 0 0,1 1 0 0 0,-1-1 0 0 0,1 0-1 0 0,1 1 1 0 0,-1-1 0 0 0,1 0 0 0 0,0 1 0 0 0,0 0-1 0 0,1-1 1 0 0,-1 1 0 0 0,1 0 0 0 0,0 0 0 0 0,1 1 0 0 0,-1-1-1 0 0,1 1 1 0 0,0-1 0 0 0,0 1 0 0 0,0 0 0 0 0,1 1-1 0 0,-1-1 1 0 0,1 1 0 0 0,0 0 0 0 0,0 0 0 0 0,9-4-1 0 0,-13 6 41 0 0,1 0 0 0 0,-1 1 0 0 0,1-1 0 0 0,0 0-1 0 0,-1 1 1 0 0,1-1 0 0 0,0 1 0 0 0,0 0 0 0 0,-1-1 0 0 0,1 1-1 0 0,0 0 1 0 0,0 0 0 0 0,-1 0 0 0 0,1 0 0 0 0,0 1-1 0 0,0-1 1 0 0,-1 0 0 0 0,1 1 0 0 0,0-1 0 0 0,-1 1-1 0 0,4 1 1 0 0,-2 0 0 0 0,0 0-1 0 0,0 0 0 0 0,-1 0 0 0 0,1 1 1 0 0,0-1-1 0 0,-1 1 0 0 0,0 0 1 0 0,1 0-1 0 0,-1-1 0 0 0,2 5 1 0 0,2 5-17 0 0,0 1 0 0 0,0 0 0 0 0,-1 0 1 0 0,3 14-1 0 0,41 126-242 0 0,-43-124 263 0 0,-3-13 24 0 0,0 0 1 0 0,2 0-1 0 0,-1 0 1 0 0,2-1-1 0 0,8 18 1 0 0,-11-28 6 0 0,0-1 0 0 0,0 1 0 0 0,1-1 0 0 0,-1 0 1 0 0,1 0-1 0 0,0-1 0 0 0,0 1 0 0 0,0-1 0 0 0,0 0 1 0 0,1 0-1 0 0,-1 0 0 0 0,1 0 0 0 0,0-1 0 0 0,0 0 0 0 0,0 0 1 0 0,0 0-1 0 0,0-1 0 0 0,0 1 0 0 0,10 0 0 0 0,-3-1 1 0 0,-1 0 0 0 0,1-2-1 0 0,-1 1 1 0 0,1-1-1 0 0,-1-1 1 0 0,1 0 0 0 0,-1 0-1 0 0,0-1 1 0 0,0-1-1 0 0,0 0 1 0 0,-1-1 0 0 0,1 1-1 0 0,-1-2 1 0 0,0 0 0 0 0,0 0-1 0 0,-1-1 1 0 0,0 0-1 0 0,0 0 1 0 0,-1-1 0 0 0,12-13-1 0 0,-1-1 71 0 0,0-1-1 0 0,-2-1 0 0 0,-1 0 0 0 0,-1-1 1 0 0,-1-1-1 0 0,21-53 0 0 0,-34 74-39 0 0,0 1 0 0 0,-1 0-1 0 0,1-1 1 0 0,-1 1 0 0 0,0-1-1 0 0,0 1 1 0 0,0-1 0 0 0,-1 1 0 0 0,1-1-1 0 0,-1 1 1 0 0,0 0 0 0 0,-1-1-1 0 0,-1-4 1 0 0,3 8-48 0 0,-22 0 3 0 0,13 5-12 0 0,1 0 0 0 0,0 0 0 0 0,0 1 0 0 0,0 0 0 0 0,0 0 0 0 0,1 1 0 0 0,-1 0 0 0 0,1 0 0 0 0,1 1-1 0 0,-1-1 1 0 0,1 2 0 0 0,1-1 0 0 0,-1 1 0 0 0,1 0 0 0 0,1 0 0 0 0,-1 0 0 0 0,1 0 0 0 0,1 1 0 0 0,-1 0 0 0 0,-2 14 0 0 0,3-15 5 0 0,1 1 0 0 0,-1 0-1 0 0,2 0 1 0 0,-1 0 0 0 0,1 0-1 0 0,1 0 1 0 0,0 1 0 0 0,0-1 0 0 0,1 0-1 0 0,0 0 1 0 0,0 0 0 0 0,6 18-1 0 0,-4-20 3 0 0,1 0 0 0 0,0 1 0 0 0,0-2 0 0 0,1 1 0 0 0,0 0-1 0 0,0-1 1 0 0,0 0 0 0 0,1 0 0 0 0,0 0 0 0 0,0-1 0 0 0,1 0-1 0 0,-1 0 1 0 0,1-1 0 0 0,0 0 0 0 0,8 4 0 0 0,13 5 20 0 0,0-1 1 0 0,1-2-1 0 0,0-1 1 0 0,53 10-1 0 0,-23-10 15 0 0,89 3 0 0 0,-125-13-407 0 0,0 0 0 0 0,-1-1-1 0 0,1-1 1 0 0,0-1 0 0 0,35-12 0 0 0,-21 4-523 0 0</inkml:trace>
-</inkml:ink>
-</file>
-
-<file path=ppt/ink/ink40.xml><?xml version="1.0" encoding="utf-8"?>
+<file path=ppt/ink/ink62.xml><?xml version="1.0" encoding="utf-8"?>
 <inkml:ink xmlns:inkml="http://www.w3.org/2003/InkML">
   <inkml:definitions>
     <inkml:context xml:id="ctx0">
@@ -1400,7 +2093,7 @@
 </inkml:ink>
 </file>
 
-<file path=ppt/ink/ink41.xml><?xml version="1.0" encoding="utf-8"?>
+<file path=ppt/ink/ink63.xml><?xml version="1.0" encoding="utf-8"?>
 <inkml:ink xmlns:inkml="http://www.w3.org/2003/InkML">
   <inkml:definitions>
     <inkml:context xml:id="ctx0">
@@ -1428,7 +2121,7 @@
 </inkml:ink>
 </file>
 
-<file path=ppt/ink/ink42.xml><?xml version="1.0" encoding="utf-8"?>
+<file path=ppt/ink/ink64.xml><?xml version="1.0" encoding="utf-8"?>
 <inkml:ink xmlns:inkml="http://www.w3.org/2003/InkML">
   <inkml:definitions>
     <inkml:context xml:id="ctx0">
@@ -1456,7 +2149,7 @@
 </inkml:ink>
 </file>
 
-<file path=ppt/ink/ink43.xml><?xml version="1.0" encoding="utf-8"?>
+<file path=ppt/ink/ink65.xml><?xml version="1.0" encoding="utf-8"?>
 <inkml:ink xmlns:inkml="http://www.w3.org/2003/InkML">
   <inkml:definitions>
     <inkml:context xml:id="ctx0">
@@ -1484,70 +2177,6 @@
 </inkml:ink>
 </file>
 
-<file path=ppt/ink/ink5.xml><?xml version="1.0" encoding="utf-8"?>
-<inkml:ink xmlns:inkml="http://www.w3.org/2003/InkML">
-  <inkml:definitions>
-    <inkml:context xml:id="ctx0">
-      <inkml:inkSource xml:id="inkSrc0">
-        <inkml:traceFormat>
-          <inkml:channel name="X" type="integer" min="-2.14748E9" max="2.14748E9" units="cm"/>
-          <inkml:channel name="Y" type="integer" min="-2.14748E9" max="2.14748E9" units="cm"/>
-          <inkml:channel name="F" type="integer" max="32767" units="dev"/>
-          <inkml:channel name="OA" type="integer" max="360" units="deg"/>
-          <inkml:channel name="OE" type="integer" max="90" units="deg"/>
-        </inkml:traceFormat>
-        <inkml:channelProperties>
-          <inkml:channelProperty channel="X" name="resolution" value="1000" units="1/cm"/>
-          <inkml:channelProperty channel="Y" name="resolution" value="1000" units="1/cm"/>
-          <inkml:channelProperty channel="F" name="resolution" value="0" units="1/dev"/>
-          <inkml:channelProperty channel="OA" name="resolution" value="1000" units="1/deg"/>
-          <inkml:channelProperty channel="OE" name="resolution" value="1000" units="1/deg"/>
-        </inkml:channelProperties>
-      </inkml:inkSource>
-      <inkml:timestamp xml:id="ts0" timeString="2026-03-20T17:28:46.098"/>
-    </inkml:context>
-    <inkml:brush xml:id="br0">
-      <inkml:brushProperty name="width" value="0.2" units="cm"/>
-      <inkml:brushProperty name="height" value="0.2" units="cm"/>
-      <inkml:brushProperty name="color" value="#FFC114"/>
-    </inkml:brush>
-  </inkml:definitions>
-  <inkml:trace contextRef="#ctx0" brushRef="#br0">171 42 3608 0 0,'0'0'1402'0'0,"-7"0"-1368"0"0,-23 0-16 0 0,26 1-15 0 0,-1-1 0 0 0,1 1 0 0 0,-1 0 0 0 0,1 0 0 0 0,-1 1 0 0 0,1-1 0 0 0,0 1 0 0 0,-1 0 0 0 0,1 0 0 0 0,0 0 0 0 0,0 1 0 0 0,1-1 0 0 0,-1 1 0 0 0,0 0 0 0 0,-4 6 0 0 0,0-1-21 0 0,0 1 1 0 0,1 0-1 0 0,0 0 1 0 0,-8 15-1 0 0,13-19 12 0 0,-1 0-1 0 0,1 0 1 0 0,0 0-1 0 0,0 0 1 0 0,0 0-1 0 0,1 0 0 0 0,-1 1 1 0 0,2-1-1 0 0,-1 1 1 0 0,0-1-1 0 0,1 0 0 0 0,0 1 1 0 0,0-1-1 0 0,1 1 1 0 0,-1-1-1 0 0,4 11 1 0 0,-1-9 7 0 0,0 0-1 0 0,0 0 1 0 0,0 0 0 0 0,1 0 0 0 0,0-1 0 0 0,1 1 0 0 0,0-1 0 0 0,-1-1 0 0 0,2 1 0 0 0,-1-1 0 0 0,7 6 0 0 0,0-2 18 0 0,1 1-1 0 0,0-2 1 0 0,1 0-1 0 0,0-1 1 0 0,0 0 0 0 0,0-1-1 0 0,1 0 1 0 0,0-1-1 0 0,0-1 1 0 0,1-1 0 0 0,18 3-1 0 0,-27-6 4 0 0,0 0-1 0 0,0 0 1 0 0,1 0-1 0 0,-1-1 1 0 0,0 0 0 0 0,0-1-1 0 0,0 1 1 0 0,0-2-1 0 0,0 1 1 0 0,0-1-1 0 0,0 1 1 0 0,-1-2 0 0 0,0 1-1 0 0,1-1 1 0 0,-1 0-1 0 0,5-5 1 0 0,-7 6-27 0 0,-1-1 0 0 0,0 1 0 0 0,0-1 0 0 0,0 1 1 0 0,0-1-1 0 0,-1 0 0 0 0,1 0 0 0 0,-1 0 0 0 0,0-1 0 0 0,0 1 1 0 0,-1 0-1 0 0,1-1 0 0 0,-1 1 0 0 0,0-1 0 0 0,0 1 0 0 0,-1-1 1 0 0,1 0-1 0 0,-1 1 0 0 0,0-1 0 0 0,0 0 0 0 0,-1 1 0 0 0,1-1 1 0 0,-1 0-1 0 0,0 1 0 0 0,0-1 0 0 0,-2-4 0 0 0,0 3-7 0 0,1 0 0 0 0,-1 0-1 0 0,0 0 1 0 0,-1 0 0 0 0,0 0 0 0 0,0 1-1 0 0,0-1 1 0 0,0 1 0 0 0,-1 0-1 0 0,0 1 1 0 0,0-1 0 0 0,0 1 0 0 0,-1 0-1 0 0,1 0 1 0 0,-1 1 0 0 0,-9-5 0 0 0,-9-3-6 0 0,-1 2 1 0 0,0 1 0 0 0,-26-6-1 0 0,-25-7 122 0 0,69 19-100 0 0,-20-10-219 0 0,66 6 112 0 0,71-1-1 0 0,-70 6 51 0 0,-1-1 0 0 0,49-10 0 0 0,-12 7 680 0 0,-74 4-381 0 0,30-2-156 0 0,-31 7-111 0 0,0 1 0 0 0,0-1 0 0 0,0 1 0 0 0,-1-1-1 0 0,1 1 1 0 0,-1-1 0 0 0,0 1 0 0 0,-1 0 0 0 0,1-1 0 0 0,-3 9 0 0 0,1 29-36 0 0,7-2 39 0 0,3 1 1 0 0,1-1 0 0 0,25 70-1 0 0,-11-37 3729 0 0,-28-82-3703 0 0,0-1-1 0 0,1 0 0 0 0,0 1 0 0 0,1-2 0 0 0,0 1 0 0 0,0 0 0 0 0,1-1 0 0 0,1 1 0 0 0,0-1 0 0 0,0 1 0 0 0,1-1 0 0 0,0 0 0 0 0,1 1 0 0 0,3-16 0 0 0,4-20-307 0 0,3 1 1 0 0,16-44-1 0 0,-21 70 220 0 0,-5 15 31 0 0,0 0-1 0 0,1 0 0 0 0,-1 0 1 0 0,1 1-1 0 0,0-1 1 0 0,1 0-1 0 0,-1 1 1 0 0,0 0-1 0 0,1-1 1 0 0,0 1-1 0 0,0 0 1 0 0,0 1-1 0 0,0-1 0 0 0,0 0 1 0 0,0 1-1 0 0,1 0 1 0 0,0 0-1 0 0,-1 0 1 0 0,1 0-1 0 0,0 0 1 0 0,0 1-1 0 0,0-1 1 0 0,0 1-1 0 0,0 0 0 0 0,0 1 1 0 0,0-1-1 0 0,0 1 1 0 0,5-1-1 0 0,-6 1-6 0 0,1 1 8 0 0,0-1 23 0 0,0 1 1 0 0,0-1 0 0 0,0 1-1 0 0,0 0 1 0 0,0 1 0 0 0,0-1-1 0 0,0 1 1 0 0,0-1 0 0 0,0 1 0 0 0,-1 0-1 0 0,1 1 1 0 0,-1-1 0 0 0,1 1-1 0 0,-1-1 1 0 0,0 1 0 0 0,0 0-1 0 0,0 0 1 0 0,-1 0 0 0 0,1 1 0 0 0,-1-1-1 0 0,1 1 1 0 0,-1-1 0 0 0,0 1-1 0 0,-1 0 1 0 0,1 0 0 0 0,-1 0-1 0 0,1 0 1 0 0,-1 0 0 0 0,0 0-1 0 0,0 8 1 0 0,16 133-212 0 0,-16-136 250 0 0,1 0 0 0 0,1 1 0 0 0,-1-1 1 0 0,2-1-1 0 0,-1 1 0 0 0,1 0 1 0 0,0-1-1 0 0,1 0 0 0 0,0 0 0 0 0,0 0 1 0 0,1 0-1 0 0,0-1 0 0 0,0 0 1 0 0,1 0-1 0 0,0-1 0 0 0,0 0 0 0 0,0 0 1 0 0,1-1-1 0 0,15 9 0 0 0,-10-7-264 0 0,-1-1 1 0 0,1 0-1 0 0,0-1 0 0 0,1-1 0 0 0,-1 0 0 0 0,1-1 0 0 0,0 0 0 0 0,0-1 1 0 0,0 0-1 0 0,0-1 0 0 0,0-1 0 0 0,23-3 0 0 0,-3-3-472 0 0</inkml:trace>
-</inkml:ink>
-</file>
-
-<file path=ppt/ink/ink6.xml><?xml version="1.0" encoding="utf-8"?>
-<inkml:ink xmlns:inkml="http://www.w3.org/2003/InkML">
-  <inkml:definitions>
-    <inkml:context xml:id="ctx0">
-      <inkml:inkSource xml:id="inkSrc0">
-        <inkml:traceFormat>
-          <inkml:channel name="X" type="integer" min="-2.14748E9" max="2.14748E9" units="cm"/>
-          <inkml:channel name="Y" type="integer" min="-2.14748E9" max="2.14748E9" units="cm"/>
-          <inkml:channel name="F" type="integer" max="32767" units="dev"/>
-          <inkml:channel name="OA" type="integer" max="360" units="deg"/>
-          <inkml:channel name="OE" type="integer" max="90" units="deg"/>
-        </inkml:traceFormat>
-        <inkml:channelProperties>
-          <inkml:channelProperty channel="X" name="resolution" value="1000" units="1/cm"/>
-          <inkml:channelProperty channel="Y" name="resolution" value="1000" units="1/cm"/>
-          <inkml:channelProperty channel="F" name="resolution" value="0" units="1/dev"/>
-          <inkml:channelProperty channel="OA" name="resolution" value="1000" units="1/deg"/>
-          <inkml:channelProperty channel="OE" name="resolution" value="1000" units="1/deg"/>
-        </inkml:channelProperties>
-      </inkml:inkSource>
-      <inkml:timestamp xml:id="ts0" timeString="2026-03-20T17:28:47.379"/>
-    </inkml:context>
-    <inkml:brush xml:id="br0">
-      <inkml:brushProperty name="width" value="0.2" units="cm"/>
-      <inkml:brushProperty name="height" value="0.2" units="cm"/>
-      <inkml:brushProperty name="color" value="#FFC114"/>
-    </inkml:brush>
-  </inkml:definitions>
-  <inkml:trace contextRef="#ctx0" brushRef="#br0">19 114 3436 0 0,'-11'-88'2358'0'0,"11"87"-2157"0"0,-2-11 315 0 0,-2-1-576 0 0,2 83-27 0 0,4 0-1 0 0,3 0 0 0 0,21 110 1 0 0,-7-61 67 0 0,-13-73 61 0 0,2-2 0 0 0,14 45-1 0 0,-18-77-34 0 0,0 0-1 0 0,0-1 1 0 0,1 1-1 0 0,1-1 0 0 0,-1 0 1 0 0,2-1-1 0 0,0 0 1 0 0,0 0-1 0 0,1 0 1 0 0,0-1-1 0 0,0 0 0 0 0,17 13 1 0 0,-15-14-53 0 0,1-1-1 0 0,0-1 1 0 0,0 0-1 0 0,1 0 1 0 0,0-1 0 0 0,0-1-1 0 0,0 0 1 0 0,0 0-1 0 0,26 3 1 0 0,-31-7 12 0 0,0 1-1 0 0,-1-2 0 0 0,1 1 1 0 0,0-1-1 0 0,0 0 1 0 0,0 0-1 0 0,-1-1 1 0 0,1 0-1 0 0,-1 0 0 0 0,1 0 1 0 0,-1-1-1 0 0,0 0 1 0 0,0-1-1 0 0,0 1 1 0 0,0-1-1 0 0,-1 0 0 0 0,1 0 1 0 0,-1-1-1 0 0,0 0 1 0 0,5-6-1 0 0,3-5 358 0 0,-1-2 1 0 0,-1 0-1 0 0,-1 0 0 0 0,0-1 0 0 0,-1 0 0 0 0,10-34 0 0 0,-15 42-28 0 0,-3 10-209 0 0,0 0-61 0 0,2-6-11 0 0,-2 5-22 0 0,0 23-318 0 0,-1-18 320 0 0,1 1-1 0 0,-1-1 1 0 0,0 0-1 0 0,1 0 1 0 0,0 1-1 0 0,0-1 1 0 0,0 0-1 0 0,0 0 1 0 0,0 0 0 0 0,0 0-1 0 0,1 0 1 0 0,0 0-1 0 0,-1 0 1 0 0,1-1-1 0 0,0 1 1 0 0,0 0-1 0 0,1-1 1 0 0,-1 0 0 0 0,0 1-1 0 0,1-1 1 0 0,0 0-1 0 0,4 2 1 0 0,5 4-18 0 0,1-1-1 0 0,0-1 1 0 0,22 9 0 0 0,-27-12-4 0 0,10 4-63 0 0,1-1 0 0 0,0-1 1 0 0,0 0-1 0 0,0-1 0 0 0,0-1 1 0 0,1-1-1 0 0,-1-1 0 0 0,37-2 1 0 0,-48 0 62 0 0,0 0-1 0 0,1-1 1 0 0,-1 0 0 0 0,0 0 0 0 0,0-1 0 0 0,0 1 0 0 0,-1-2 0 0 0,1 1-1 0 0,-1-1 1 0 0,0 0 0 0 0,0-1 0 0 0,0 0 0 0 0,0 0 0 0 0,-1 0-1 0 0,0-1 1 0 0,0 0 0 0 0,0 0 0 0 0,-1 0 0 0 0,0-1 0 0 0,0 0-1 0 0,-1 0 1 0 0,7-15 0 0 0,-3 2 224 0 0,-2-1 0 0 0,8-35 0 0 0,-3 7 256 0 0,-11 48-443 0 0,1-6 30 0 0,-2 5-94 0 0,0 6-316 0 0,-7 33 337 0 0,2-1 0 0 0,1 1-1 0 0,2 1 1 0 0,2-1 0 0 0,1 0 0 0 0,6 46 0 0 0,51 225 43 0 0,-50-277 2 0 0,-2-14-12 0 0,-2 1-1 0 0,0-1 0 0 0,-1 1 1 0 0,0-1-1 0 0,-2 1 0 0 0,0 0 1 0 0,-1-1-1 0 0,-6 34 0 0 0</inkml:trace>
-</inkml:ink>
-</file>
-
 <file path=ppt/ink/ink7.xml><?xml version="1.0" encoding="utf-8"?>
 <inkml:ink xmlns:inkml="http://www.w3.org/2003/InkML">
   <inkml:definitions>
@@ -1557,26 +2186,22 @@
           <inkml:channel name="X" type="integer" min="-2.14748E9" max="2.14748E9" units="cm"/>
           <inkml:channel name="Y" type="integer" min="-2.14748E9" max="2.14748E9" units="cm"/>
           <inkml:channel name="F" type="integer" max="32767" units="dev"/>
-          <inkml:channel name="OA" type="integer" max="360" units="deg"/>
-          <inkml:channel name="OE" type="integer" max="90" units="deg"/>
         </inkml:traceFormat>
         <inkml:channelProperties>
           <inkml:channelProperty channel="X" name="resolution" value="1000" units="1/cm"/>
           <inkml:channelProperty channel="Y" name="resolution" value="1000" units="1/cm"/>
           <inkml:channelProperty channel="F" name="resolution" value="0" units="1/dev"/>
-          <inkml:channelProperty channel="OA" name="resolution" value="1000" units="1/deg"/>
-          <inkml:channelProperty channel="OE" name="resolution" value="1000" units="1/deg"/>
         </inkml:channelProperties>
       </inkml:inkSource>
-      <inkml:timestamp xml:id="ts0" timeString="2026-03-20T17:28:49.313"/>
+      <inkml:timestamp xml:id="ts0" timeString="2026-09-08T17:08:12.056"/>
     </inkml:context>
     <inkml:brush xml:id="br0">
-      <inkml:brushProperty name="width" value="0.2" units="cm"/>
-      <inkml:brushProperty name="height" value="0.2" units="cm"/>
+      <inkml:brushProperty name="width" value="0.035" units="cm"/>
+      <inkml:brushProperty name="height" value="0.035" units="cm"/>
       <inkml:brushProperty name="color" value="#FFC114"/>
     </inkml:brush>
   </inkml:definitions>
-  <inkml:trace contextRef="#ctx0" brushRef="#br0">205 90 3784 0 0,'0'0'-72'0'0,"-7"-21"-26"0"0,4 18 98 0 0,-6-4-9 0 0,-22 6 18 0 0,23 3-17 0 0,0-1 0 0 0,1 1 0 0 0,-1 0 0 0 0,1 1-1 0 0,0 0 1 0 0,0 0 0 0 0,0 0 0 0 0,0 1 0 0 0,0 0-1 0 0,0 1 1 0 0,1-1 0 0 0,0 1 0 0 0,0 0 0 0 0,1 1-1 0 0,-1 0 1 0 0,1-1 0 0 0,0 2 0 0 0,1-1 0 0 0,-1 0-1 0 0,1 1 1 0 0,-6 13 0 0 0,8-14 11 0 0,0 0-1 0 0,0 0 1 0 0,0 0 0 0 0,0 0 0 0 0,1 0-1 0 0,0 1 1 0 0,1-1 0 0 0,-1 0-1 0 0,1 1 1 0 0,0-1 0 0 0,1 1-1 0 0,-1-1 1 0 0,2 0 0 0 0,-1 1 0 0 0,0-1-1 0 0,1 0 1 0 0,0 0 0 0 0,1 0-1 0 0,-1 0 1 0 0,1-1 0 0 0,0 1-1 0 0,1-1 1 0 0,-1 1 0 0 0,1-1 0 0 0,0 0-1 0 0,0 0 1 0 0,9 7 0 0 0,-1-2 21 0 0,1 0 1 0 0,0-1 0 0 0,0 0-1 0 0,1-1 1 0 0,0-1 0 0 0,1 0-1 0 0,-1-1 1 0 0,2 0 0 0 0,-1-1 0 0 0,0-1-1 0 0,1-1 1 0 0,0 0 0 0 0,0-1-1 0 0,29 1 1 0 0,-36-3 1 0 0,1-1 1 0 0,-1 0-1 0 0,1 0 1 0 0,-1-1-1 0 0,0 0 1 0 0,1 0-1 0 0,-1-1 1 0 0,0-1 0 0 0,0 1-1 0 0,-1-2 1 0 0,1 1-1 0 0,-1-1 1 0 0,0 0-1 0 0,0-1 1 0 0,-1 0-1 0 0,1 0 1 0 0,-1 0-1 0 0,-1-1 1 0 0,1 0-1 0 0,-1-1 1 0 0,0 1-1 0 0,-1-1 1 0 0,0 0-1 0 0,0-1 1 0 0,7-16-1 0 0,-11 21-1 0 0,1 0 1 0 0,-1 0-1 0 0,0 0 0 0 0,0 0 1 0 0,0 0-1 0 0,0 0 0 0 0,-1 0 1 0 0,0 0-1 0 0,0 0 0 0 0,0 0 1 0 0,0 0-1 0 0,-1 0 0 0 0,1 0 0 0 0,-1 0 1 0 0,0 0-1 0 0,0 0 0 0 0,-1 0 1 0 0,1 0-1 0 0,-1 0 0 0 0,0 1 1 0 0,0-1-1 0 0,0 1 0 0 0,0-1 1 0 0,-1 1-1 0 0,1 0 0 0 0,-1 0 1 0 0,0 0-1 0 0,0 0 0 0 0,0 1 0 0 0,0-1 1 0 0,-1 1-1 0 0,1-1 0 0 0,-6-2 1 0 0,-14-7 0 0 0,0 2 0 0 0,0 0 1 0 0,-1 1-1 0 0,-35-8 0 0 0,15 3 35 0 0,-9 0-4 0 0,51 13-52 0 0,-17-6 26 0 0,9 2-93 0 0,9 2-264 0 0,195 2 186 0 0,9 0-27 0 0,-50-1 1422 0 0,-149 2-1089 0 0,23 2-117 0 0,-24-2-87 0 0,0 48-349 0 0,-6-19 368 0 0,2 0 1 0 0,1 0 0 0 0,1-1-1 0 0,2 1 1 0 0,1 0 0 0 0,1-1 0 0 0,1 0-1 0 0,1 0 1 0 0,14 32 0 0 0,-13-24 3263 0 0,-15-52-2706 0 0,-2-10-486 0 0,2 0 0 0 0,0-1 0 0 0,2 0 0 0 0,-4-52-1 0 0,8 62-152 0 0,1 1 0 0 0,0 0 0 0 0,1 0 0 0 0,1 0 0 0 0,1 1-1 0 0,0-1 1 0 0,1 0 0 0 0,1 1 0 0 0,10-23 0 0 0,-12 32 40 0 0,1 0 0 0 0,0 0 0 0 0,0 1 1 0 0,1-1-1 0 0,0 1 0 0 0,0 0 0 0 0,0 1 0 0 0,0-1 1 0 0,1 1-1 0 0,-1 0 0 0 0,1 1 0 0 0,0-1 0 0 0,0 1 1 0 0,1 0-1 0 0,-1 1 0 0 0,1-1 0 0 0,-1 1 0 0 0,1 0 1 0 0,0 1-1 0 0,0 0 0 0 0,0 0 0 0 0,0 1 0 0 0,11 0 0 0 0,-7 0 0 0 0,1 0-1 0 0,0 1 0 0 0,0 1 0 0 0,0 0 1 0 0,-1 1-1 0 0,1 0 0 0 0,-1 1 0 0 0,0 0 0 0 0,0 1 1 0 0,0 0-1 0 0,-1 1 0 0 0,1 0 0 0 0,9 8 1 0 0,-5-1 19 0 0,-1 1 1 0 0,-1 0 0 0 0,0 1 0 0 0,-1 1-1 0 0,-1 0 1 0 0,0 0 0 0 0,-1 1-1 0 0,-1 1 1 0 0,0-1 0 0 0,-2 1 0 0 0,0 1-1 0 0,-1 0 1 0 0,0-1 0 0 0,3 33 0 0 0,-2-27-67 0 0</inkml:trace>
+  <inkml:trace contextRef="#ctx0" brushRef="#br0">0 0 24575,'5'0'0,"10"0"0,8 10 0,9 2 0,-1 9 0,4 1 0,5 1 0,0 6 0,-2-1 0,2 2 0,4 3 0,-2-1 0,2-6 0,3 2 0,2 2 0,-12-6 0,-11-5-8191</inkml:trace>
 </inkml:ink>
 </file>
 
@@ -1589,26 +2214,22 @@
           <inkml:channel name="X" type="integer" min="-2.14748E9" max="2.14748E9" units="cm"/>
           <inkml:channel name="Y" type="integer" min="-2.14748E9" max="2.14748E9" units="cm"/>
           <inkml:channel name="F" type="integer" max="32767" units="dev"/>
-          <inkml:channel name="OA" type="integer" max="360" units="deg"/>
-          <inkml:channel name="OE" type="integer" max="90" units="deg"/>
         </inkml:traceFormat>
         <inkml:channelProperties>
           <inkml:channelProperty channel="X" name="resolution" value="1000" units="1/cm"/>
           <inkml:channelProperty channel="Y" name="resolution" value="1000" units="1/cm"/>
           <inkml:channelProperty channel="F" name="resolution" value="0" units="1/dev"/>
-          <inkml:channelProperty channel="OA" name="resolution" value="1000" units="1/deg"/>
-          <inkml:channelProperty channel="OE" name="resolution" value="1000" units="1/deg"/>
         </inkml:channelProperties>
       </inkml:inkSource>
-      <inkml:timestamp xml:id="ts0" timeString="2026-03-20T17:28:50.217"/>
+      <inkml:timestamp xml:id="ts0" timeString="2026-09-08T17:08:12.057"/>
     </inkml:context>
     <inkml:brush xml:id="br0">
-      <inkml:brushProperty name="width" value="0.2" units="cm"/>
-      <inkml:brushProperty name="height" value="0.2" units="cm"/>
+      <inkml:brushProperty name="width" value="0.035" units="cm"/>
+      <inkml:brushProperty name="height" value="0.035" units="cm"/>
       <inkml:brushProperty name="color" value="#FFC114"/>
     </inkml:brush>
   </inkml:definitions>
-  <inkml:trace contextRef="#ctx0" brushRef="#br0">175 82 4080 0 0,'1'0'1'0'0,"1"-1"-1"0"0,-1 0 0 0 0,0 0 0 0 0,0 0 0 0 0,0 0 0 0 0,0 0 0 0 0,0 0 1 0 0,0 0-1 0 0,-1 0 0 0 0,1 0 0 0 0,0 0 0 0 0,0 0 0 0 0,-1 0 1 0 0,1-1-1 0 0,-1 1 0 0 0,1 0 0 0 0,-1-1 0 0 0,0 1 0 0 0,1 0 0 0 0,-1-1 1 0 0,0 1-1 0 0,0 0 0 0 0,0-1 0 0 0,0 1 0 0 0,0-2 0 0 0,-2 0 24 0 0,0 1-1 0 0,0 0 1 0 0,0 0-1 0 0,0 0 0 0 0,0 0 1 0 0,-1 0-1 0 0,1 0 1 0 0,-1 1-1 0 0,1-1 1 0 0,-1 1-1 0 0,0 0 0 0 0,1 0 1 0 0,-1 0-1 0 0,0 0 1 0 0,0 0-1 0 0,-4 0 0 0 0,4 0-40 0 0,-24 8-34 0 0,18-2 47 0 0,0 2-1 0 0,1-1 0 0 0,0 1 0 0 0,0 1 0 0 0,1-1 1 0 0,-1 1-1 0 0,2 0 0 0 0,-1 1 0 0 0,1 0 0 0 0,1 0 0 0 0,-1 0 1 0 0,1 1-1 0 0,1-1 0 0 0,0 1 0 0 0,1 0 0 0 0,-4 15 1 0 0,5-18 10 0 0,1 0 1 0 0,0 0 0 0 0,1 0 0 0 0,0 0-1 0 0,0 0 1 0 0,0 0 0 0 0,1-1 0 0 0,0 1 0 0 0,0 0-1 0 0,0 0 1 0 0,1-1 0 0 0,0 1 0 0 0,1 0 0 0 0,0-1-1 0 0,-1 0 1 0 0,2 0 0 0 0,-1 0 0 0 0,1 0-1 0 0,0 0 1 0 0,0-1 0 0 0,1 0 0 0 0,-1 0 0 0 0,1 0-1 0 0,1 0 1 0 0,-1-1 0 0 0,11 8 0 0 0,2-2 17 0 0,1-1 0 0 0,0 0 0 0 0,0-2 0 0 0,0 0 0 0 0,1-1 0 0 0,0-1 0 0 0,0 0 0 0 0,1-2 0 0 0,-1 0 1 0 0,23-1-1 0 0,-9-2 9 0 0,0-1 0 0 0,0-2 0 0 0,-1-1 0 0 0,1-1 0 0 0,44-14 0 0 0,-56 12-6 0 0,0-1 0 0 0,-1-1 0 0 0,0 0 0 0 0,0-2 0 0 0,-1-1 0 0 0,-1 0 0 0 0,0-1 0 0 0,0-1 0 0 0,-2-1 0 0 0,0-1 0 0 0,0 0 0 0 0,-2-1-1 0 0,0-1 1 0 0,-1 0 0 0 0,-1-1 0 0 0,0 0 0 0 0,-2-1 0 0 0,13-28 0 0 0,-23 45-9 0 0,0 0-1 0 0,0 1 1 0 0,-1-1-1 0 0,1 0 1 0 0,-1 1 0 0 0,1-1-1 0 0,-1 0 1 0 0,0 0-1 0 0,0 0 1 0 0,0 1 0 0 0,0-1-1 0 0,-1 0 1 0 0,1 0-1 0 0,-1 1 1 0 0,1-1-1 0 0,-1 0 1 0 0,0 1 0 0 0,0-1-1 0 0,0 0 1 0 0,-1 1-1 0 0,1 0 1 0 0,-1-1-1 0 0,-2-3 1 0 0,1 3-15 0 0,0 1 0 0 0,0 0-1 0 0,0 0 1 0 0,0 0 0 0 0,0 0 0 0 0,0 0-1 0 0,-1 0 1 0 0,1 1 0 0 0,-1 0-1 0 0,1 0 1 0 0,-1 0 0 0 0,1 0 0 0 0,-1 0-1 0 0,0 1 1 0 0,1-1 0 0 0,-1 1 0 0 0,0 0-1 0 0,1 0 1 0 0,-7 1 0 0 0,-2 2-22 0 0,0 0 1 0 0,1 1 0 0 0,-1 1-1 0 0,1-1 1 0 0,-1 2-1 0 0,2 0 1 0 0,-1 0-1 0 0,1 1 1 0 0,-1 0 0 0 0,2 1-1 0 0,-1 0 1 0 0,1 0-1 0 0,1 1 1 0 0,-1 0-1 0 0,1 1 1 0 0,1 0-1 0 0,-7 11 1 0 0,10-14 10 0 0,-1 0 0 0 0,1 1 0 0 0,1 0 0 0 0,0 0 0 0 0,0-1 0 0 0,0 2 0 0 0,1-1 1 0 0,0 0-1 0 0,1 0 0 0 0,0 1 0 0 0,0 14 0 0 0,1-17 9 0 0,1 0 0 0 0,0 0 1 0 0,0-1-1 0 0,1 1 1 0 0,-1 0-1 0 0,1-1 0 0 0,1 0 1 0 0,-1 1-1 0 0,1-1 0 0 0,0 0 1 0 0,0 0-1 0 0,0 0 0 0 0,1-1 1 0 0,-1 1-1 0 0,1-1 0 0 0,0 0 1 0 0,1 0-1 0 0,6 5 1 0 0,9 5 14 0 0,0-1 0 0 0,1-1 1 0 0,1-1-1 0 0,0-1 0 0 0,0-1 1 0 0,45 12-1 0 0,-31-12 45 0 0,0-2 0 0 0,1-2 0 0 0,68 2 0 0 0,-85-7 56 0 0,1-1-1 0 0,33-6 1 0 0,-50 7-319 0 0,1-1-1 0 0,0 0 1 0 0,0-1 0 0 0,-1 1 0 0 0,1-1-1 0 0,-1 0 1 0 0,1 0 0 0 0,-1 0-1 0 0,0 0 1 0 0,0-1 0 0 0,0 0-1 0 0,0 0 1 0 0,0 0 0 0 0,-1 0-1 0 0,1-1 1 0 0,-1 1 0 0 0,3-5 0 0 0,-3 0-576 0 0</inkml:trace>
+  <inkml:trace contextRef="#ctx0" brushRef="#br0">257 0 24575,'-9'0'0,"-4"5"0,-3 1 0,0 9 0,-1 12 0,-3 5 0,-7 2 0,1 5 0,5 5 0,-3-6 0,2 1 0,5 3 0,1-1 0,3-8-8191</inkml:trace>
 </inkml:ink>
 </file>
 
@@ -1621,26 +2242,22 @@
           <inkml:channel name="X" type="integer" min="-2.14748E9" max="2.14748E9" units="cm"/>
           <inkml:channel name="Y" type="integer" min="-2.14748E9" max="2.14748E9" units="cm"/>
           <inkml:channel name="F" type="integer" max="32767" units="dev"/>
-          <inkml:channel name="OA" type="integer" max="360" units="deg"/>
-          <inkml:channel name="OE" type="integer" max="90" units="deg"/>
         </inkml:traceFormat>
         <inkml:channelProperties>
           <inkml:channelProperty channel="X" name="resolution" value="1000" units="1/cm"/>
           <inkml:channelProperty channel="Y" name="resolution" value="1000" units="1/cm"/>
           <inkml:channelProperty channel="F" name="resolution" value="0" units="1/dev"/>
-          <inkml:channelProperty channel="OA" name="resolution" value="1000" units="1/deg"/>
-          <inkml:channelProperty channel="OE" name="resolution" value="1000" units="1/deg"/>
         </inkml:channelProperties>
       </inkml:inkSource>
-      <inkml:timestamp xml:id="ts0" timeString="2026-03-20T17:28:50.481"/>
+      <inkml:timestamp xml:id="ts0" timeString="2026-09-08T17:08:19.414"/>
     </inkml:context>
     <inkml:brush xml:id="br0">
-      <inkml:brushProperty name="width" value="0.2" units="cm"/>
-      <inkml:brushProperty name="height" value="0.2" units="cm"/>
+      <inkml:brushProperty name="width" value="0.035" units="cm"/>
+      <inkml:brushProperty name="height" value="0.035" units="cm"/>
       <inkml:brushProperty name="color" value="#FFC114"/>
     </inkml:brush>
   </inkml:definitions>
-  <inkml:trace contextRef="#ctx0" brushRef="#br0">1 5 4552 0 0,'0'0'4193'0'0,"13"-5"-2953"0"0</inkml:trace>
+  <inkml:trace contextRef="#ctx0" brushRef="#br0">0 0 24575,'5'0'0,"10"0"0,8 10 0,9 2 0,-1 9 0,4 1 0,5 1 0,0 6 0,-2-1 0,2 2 0,4 3 0,-2-1 0,2-6 0,3 2 0,2 2 0,-12-6 0,-11-5-8191</inkml:trace>
 </inkml:ink>
 </file>
 
@@ -1726,7 +2343,7 @@
           <a:p>
             <a:fld id="{CB233BD1-3BA8-448D-9D08-7846095EA517}" type="datetimeFigureOut">
               <a:rPr lang="en-US" smtClean="0"/>
-              <a:t>9/5/2026</a:t>
+              <a:t>9/9/2026</a:t>
             </a:fld>
             <a:endParaRPr lang="en-US"/>
           </a:p>
@@ -2140,7 +2757,7 @@
           <a:p>
             <a:fld id="{6383FAE1-13DE-4511-8C1B-C8AFB720664C}" type="datetimeFigureOut">
               <a:rPr lang="en-US" smtClean="0"/>
-              <a:t>9/5/2026</a:t>
+              <a:t>9/9/2026</a:t>
             </a:fld>
             <a:endParaRPr lang="en-US"/>
           </a:p>
@@ -2338,7 +2955,7 @@
           <a:p>
             <a:fld id="{6383FAE1-13DE-4511-8C1B-C8AFB720664C}" type="datetimeFigureOut">
               <a:rPr lang="en-US" smtClean="0"/>
-              <a:t>9/5/2026</a:t>
+              <a:t>9/9/2026</a:t>
             </a:fld>
             <a:endParaRPr lang="en-US"/>
           </a:p>
@@ -2546,7 +3163,7 @@
           <a:p>
             <a:fld id="{6383FAE1-13DE-4511-8C1B-C8AFB720664C}" type="datetimeFigureOut">
               <a:rPr lang="en-US" smtClean="0"/>
-              <a:t>9/5/2026</a:t>
+              <a:t>9/9/2026</a:t>
             </a:fld>
             <a:endParaRPr lang="en-US"/>
           </a:p>
@@ -2744,7 +3361,7 @@
           <a:p>
             <a:fld id="{6383FAE1-13DE-4511-8C1B-C8AFB720664C}" type="datetimeFigureOut">
               <a:rPr lang="en-US" smtClean="0"/>
-              <a:t>9/5/2026</a:t>
+              <a:t>9/9/2026</a:t>
             </a:fld>
             <a:endParaRPr lang="en-US"/>
           </a:p>
@@ -3019,7 +3636,7 @@
           <a:p>
             <a:fld id="{6383FAE1-13DE-4511-8C1B-C8AFB720664C}" type="datetimeFigureOut">
               <a:rPr lang="en-US" smtClean="0"/>
-              <a:t>9/5/2026</a:t>
+              <a:t>9/9/2026</a:t>
             </a:fld>
             <a:endParaRPr lang="en-US"/>
           </a:p>
@@ -3284,7 +3901,7 @@
           <a:p>
             <a:fld id="{6383FAE1-13DE-4511-8C1B-C8AFB720664C}" type="datetimeFigureOut">
               <a:rPr lang="en-US" smtClean="0"/>
-              <a:t>9/5/2026</a:t>
+              <a:t>9/9/2026</a:t>
             </a:fld>
             <a:endParaRPr lang="en-US"/>
           </a:p>
@@ -3696,7 +4313,7 @@
           <a:p>
             <a:fld id="{6383FAE1-13DE-4511-8C1B-C8AFB720664C}" type="datetimeFigureOut">
               <a:rPr lang="en-US" smtClean="0"/>
-              <a:t>9/5/2026</a:t>
+              <a:t>9/9/2026</a:t>
             </a:fld>
             <a:endParaRPr lang="en-US"/>
           </a:p>
@@ -3837,7 +4454,7 @@
           <a:p>
             <a:fld id="{6383FAE1-13DE-4511-8C1B-C8AFB720664C}" type="datetimeFigureOut">
               <a:rPr lang="en-US" smtClean="0"/>
-              <a:t>9/5/2026</a:t>
+              <a:t>9/9/2026</a:t>
             </a:fld>
             <a:endParaRPr lang="en-US"/>
           </a:p>
@@ -3950,7 +4567,7 @@
           <a:p>
             <a:fld id="{6383FAE1-13DE-4511-8C1B-C8AFB720664C}" type="datetimeFigureOut">
               <a:rPr lang="en-US" smtClean="0"/>
-              <a:t>9/5/2026</a:t>
+              <a:t>9/9/2026</a:t>
             </a:fld>
             <a:endParaRPr lang="en-US"/>
           </a:p>
@@ -4261,7 +4878,7 @@
           <a:p>
             <a:fld id="{6383FAE1-13DE-4511-8C1B-C8AFB720664C}" type="datetimeFigureOut">
               <a:rPr lang="en-US" smtClean="0"/>
-              <a:t>9/5/2026</a:t>
+              <a:t>9/9/2026</a:t>
             </a:fld>
             <a:endParaRPr lang="en-US"/>
           </a:p>
@@ -4552,7 +5169,7 @@
           <a:p>
             <a:fld id="{6383FAE1-13DE-4511-8C1B-C8AFB720664C}" type="datetimeFigureOut">
               <a:rPr lang="en-US" smtClean="0"/>
-              <a:t>9/5/2026</a:t>
+              <a:t>9/9/2026</a:t>
             </a:fld>
             <a:endParaRPr lang="en-US"/>
           </a:p>
@@ -4796,7 +5413,7 @@
           <a:p>
             <a:fld id="{6383FAE1-13DE-4511-8C1B-C8AFB720664C}" type="datetimeFigureOut">
               <a:rPr lang="en-US" smtClean="0"/>
-              <a:t>9/5/2026</a:t>
+              <a:t>9/9/2026</a:t>
             </a:fld>
             <a:endParaRPr lang="en-US"/>
           </a:p>
@@ -5532,6 +6149,270 @@
 </file>
 
 <file path=ppt/slides/slide10.xml><?xml version="1.0" encoding="utf-8"?>
+<p:sld xmlns:a="http://schemas.openxmlformats.org/drawingml/2006/main" xmlns:r="http://schemas.openxmlformats.org/officeDocument/2006/relationships" xmlns:p="http://schemas.openxmlformats.org/presentationml/2006/main">
+  <p:cSld>
+    <p:spTree>
+      <p:nvGrpSpPr>
+        <p:cNvPr id="1" name="">
+          <a:extLst>
+            <a:ext uri="{FF2B5EF4-FFF2-40B4-BE49-F238E27FC236}">
+              <a16:creationId xmlns:a16="http://schemas.microsoft.com/office/drawing/2014/main" id="{0D18ACBA-A707-9C6E-493D-108DE24CB8E8}"/>
+            </a:ext>
+          </a:extLst>
+        </p:cNvPr>
+        <p:cNvGrpSpPr/>
+        <p:nvPr/>
+      </p:nvGrpSpPr>
+      <p:grpSpPr>
+        <a:xfrm>
+          <a:off x="0" y="0"/>
+          <a:ext cx="0" cy="0"/>
+          <a:chOff x="0" y="0"/>
+          <a:chExt cx="0" cy="0"/>
+        </a:xfrm>
+      </p:grpSpPr>
+      <p:pic>
+        <p:nvPicPr>
+          <p:cNvPr id="6" name="Picture 5">
+            <a:extLst>
+              <a:ext uri="{FF2B5EF4-FFF2-40B4-BE49-F238E27FC236}">
+                <a16:creationId xmlns:a16="http://schemas.microsoft.com/office/drawing/2014/main" id="{08866362-1E0A-CFC7-79EA-01BBAD24496E}"/>
+              </a:ext>
+            </a:extLst>
+          </p:cNvPr>
+          <p:cNvPicPr>
+            <a:picLocks noChangeAspect="1"/>
+          </p:cNvPicPr>
+          <p:nvPr/>
+        </p:nvPicPr>
+        <p:blipFill>
+          <a:blip r:embed="rId2"/>
+          <a:stretch>
+            <a:fillRect/>
+          </a:stretch>
+        </p:blipFill>
+        <p:spPr>
+          <a:xfrm>
+            <a:off x="1401855" y="4392848"/>
+            <a:ext cx="2278097" cy="2227472"/>
+          </a:xfrm>
+          <a:prstGeom prst="rect">
+            <a:avLst/>
+          </a:prstGeom>
+        </p:spPr>
+      </p:pic>
+      <mc:AlternateContent xmlns:mc="http://schemas.openxmlformats.org/markup-compatibility/2006" xmlns:p14="http://schemas.microsoft.com/office/powerpoint/2010/main">
+        <mc:Choice Requires="p14">
+          <p:contentPart p14:bwMode="auto" r:id="rId3">
+            <p14:nvContentPartPr>
+              <p14:cNvPr id="5" name="Ink 4">
+                <a:extLst>
+                  <a:ext uri="{FF2B5EF4-FFF2-40B4-BE49-F238E27FC236}">
+                    <a16:creationId xmlns:a16="http://schemas.microsoft.com/office/drawing/2014/main" id="{3AB2178F-44D6-DBAA-6A0E-BF51D853F876}"/>
+                  </a:ext>
+                </a:extLst>
+              </p14:cNvPr>
+              <p14:cNvContentPartPr/>
+              <p14:nvPr/>
+            </p14:nvContentPartPr>
+            <p14:xfrm>
+              <a:off x="11292624" y="602496"/>
+              <a:ext cx="581400" cy="37800"/>
+            </p14:xfrm>
+          </p:contentPart>
+        </mc:Choice>
+        <mc:Fallback xmlns="">
+          <p:pic>
+            <p:nvPicPr>
+              <p:cNvPr id="5" name="Ink 4">
+                <a:extLst>
+                  <a:ext uri="{FF2B5EF4-FFF2-40B4-BE49-F238E27FC236}">
+                    <a16:creationId xmlns:a16="http://schemas.microsoft.com/office/drawing/2014/main" id="{3AB2178F-44D6-DBAA-6A0E-BF51D853F876}"/>
+                  </a:ext>
+                </a:extLst>
+              </p:cNvPr>
+              <p:cNvPicPr/>
+              <p:nvPr/>
+            </p:nvPicPr>
+            <p:blipFill>
+              <a:blip r:embed="rId4"/>
+              <a:stretch>
+                <a:fillRect/>
+              </a:stretch>
+            </p:blipFill>
+            <p:spPr>
+              <a:xfrm>
+                <a:off x="11274624" y="584323"/>
+                <a:ext cx="617040" cy="73783"/>
+              </a:xfrm>
+              <a:prstGeom prst="rect">
+                <a:avLst/>
+              </a:prstGeom>
+            </p:spPr>
+          </p:pic>
+        </mc:Fallback>
+      </mc:AlternateContent>
+      <p:sp>
+        <p:nvSpPr>
+          <p:cNvPr id="3" name="TextBox 2">
+            <a:extLst>
+              <a:ext uri="{FF2B5EF4-FFF2-40B4-BE49-F238E27FC236}">
+                <a16:creationId xmlns:a16="http://schemas.microsoft.com/office/drawing/2014/main" id="{FEAD36B0-F012-6FA4-E4FF-3DFF4D221BD4}"/>
+              </a:ext>
+            </a:extLst>
+          </p:cNvPr>
+          <p:cNvSpPr txBox="1"/>
+          <p:nvPr/>
+        </p:nvSpPr>
+        <p:spPr>
+          <a:xfrm>
+            <a:off x="0" y="1093032"/>
+            <a:ext cx="10204704" cy="1938992"/>
+          </a:xfrm>
+          <a:prstGeom prst="rect">
+            <a:avLst/>
+          </a:prstGeom>
+          <a:noFill/>
+        </p:spPr>
+        <p:txBody>
+          <a:bodyPr wrap="square">
+            <a:spAutoFit/>
+          </a:bodyPr>
+          <a:lstStyle/>
+          <a:p>
+            <a:r>
+              <a:rPr lang="en-US" sz="2400" b="1" dirty="0">
+                <a:solidFill>
+                  <a:schemeClr val="accent6">
+                    <a:lumMod val="60000"/>
+                    <a:lumOff val="40000"/>
+                  </a:schemeClr>
+                </a:solidFill>
+              </a:rPr>
+              <a:t>Some Use Cases of Vector DB:</a:t>
+            </a:r>
+          </a:p>
+          <a:p>
+            <a:endParaRPr lang="en-US" sz="2400" b="1" dirty="0">
+              <a:solidFill>
+                <a:schemeClr val="accent6">
+                  <a:lumMod val="60000"/>
+                  <a:lumOff val="40000"/>
+                </a:schemeClr>
+              </a:solidFill>
+            </a:endParaRPr>
+          </a:p>
+          <a:p>
+            <a:pPr marL="342900" indent="-342900">
+              <a:buFont typeface="Arial" panose="020B0604020202020204" pitchFamily="34" charset="0"/>
+              <a:buChar char="•"/>
+            </a:pPr>
+            <a:r>
+              <a:rPr lang="en-US" sz="2400" dirty="0">
+                <a:solidFill>
+                  <a:schemeClr val="accent6">
+                    <a:lumMod val="60000"/>
+                    <a:lumOff val="40000"/>
+                  </a:schemeClr>
+                </a:solidFill>
+              </a:rPr>
+              <a:t>Document search  </a:t>
+            </a:r>
+          </a:p>
+          <a:p>
+            <a:pPr marL="342900" indent="-342900">
+              <a:buFont typeface="Arial" panose="020B0604020202020204" pitchFamily="34" charset="0"/>
+              <a:buChar char="•"/>
+            </a:pPr>
+            <a:r>
+              <a:rPr lang="en-US" sz="2400" dirty="0">
+                <a:solidFill>
+                  <a:schemeClr val="accent6">
+                    <a:lumMod val="60000"/>
+                    <a:lumOff val="40000"/>
+                  </a:schemeClr>
+                </a:solidFill>
+              </a:rPr>
+              <a:t>Recommendation systems – (“Recommend me good </a:t>
+            </a:r>
+            <a:r>
+              <a:rPr lang="en-US" sz="2400" b="1" u="sng" dirty="0">
+                <a:solidFill>
+                  <a:schemeClr val="accent6">
+                    <a:lumMod val="60000"/>
+                    <a:lumOff val="40000"/>
+                  </a:schemeClr>
+                </a:solidFill>
+              </a:rPr>
+              <a:t>scary</a:t>
+            </a:r>
+            <a:r>
+              <a:rPr lang="en-US" sz="2400" dirty="0">
+                <a:solidFill>
+                  <a:schemeClr val="accent6">
+                    <a:lumMod val="60000"/>
+                    <a:lumOff val="40000"/>
+                  </a:schemeClr>
+                </a:solidFill>
+              </a:rPr>
+              <a:t> </a:t>
+            </a:r>
+            <a:r>
+              <a:rPr lang="en-US" sz="2400" b="1" u="sng" dirty="0">
+                <a:solidFill>
+                  <a:schemeClr val="accent6">
+                    <a:lumMod val="60000"/>
+                    <a:lumOff val="40000"/>
+                  </a:schemeClr>
+                </a:solidFill>
+              </a:rPr>
+              <a:t>flicks</a:t>
+            </a:r>
+            <a:r>
+              <a:rPr lang="en-US" sz="2400" dirty="0">
+                <a:solidFill>
+                  <a:schemeClr val="accent6">
+                    <a:lumMod val="60000"/>
+                    <a:lumOff val="40000"/>
+                  </a:schemeClr>
+                </a:solidFill>
+              </a:rPr>
+              <a:t> ”)</a:t>
+            </a:r>
+          </a:p>
+          <a:p>
+            <a:pPr marL="342900" indent="-342900">
+              <a:buFont typeface="Arial" panose="020B0604020202020204" pitchFamily="34" charset="0"/>
+              <a:buChar char="•"/>
+            </a:pPr>
+            <a:r>
+              <a:rPr lang="en-US" sz="2400" dirty="0">
+                <a:solidFill>
+                  <a:schemeClr val="accent6">
+                    <a:lumMod val="60000"/>
+                    <a:lumOff val="40000"/>
+                  </a:schemeClr>
+                </a:solidFill>
+              </a:rPr>
+              <a:t>RAG pipelines</a:t>
+            </a:r>
+          </a:p>
+        </p:txBody>
+      </p:sp>
+    </p:spTree>
+    <p:extLst>
+      <p:ext uri="{BB962C8B-B14F-4D97-AF65-F5344CB8AC3E}">
+        <p14:creationId xmlns:p14="http://schemas.microsoft.com/office/powerpoint/2010/main" val="2547235685"/>
+      </p:ext>
+    </p:extLst>
+  </p:cSld>
+  <p:clrMapOvr>
+    <a:masterClrMapping/>
+  </p:clrMapOvr>
+</p:sld>
+</file>
+
+<file path=ppt/slides/slide11.xml><?xml version="1.0" encoding="utf-8"?>
 <p:sld xmlns:a="http://schemas.openxmlformats.org/drawingml/2006/main" xmlns:r="http://schemas.openxmlformats.org/officeDocument/2006/relationships" xmlns:p="http://schemas.openxmlformats.org/presentationml/2006/main">
   <p:cSld>
     <p:spTree>
@@ -6185,7 +7066,7 @@
 </p:sld>
 </file>
 
-<file path=ppt/slides/slide11.xml><?xml version="1.0" encoding="utf-8"?>
+<file path=ppt/slides/slide12.xml><?xml version="1.0" encoding="utf-8"?>
 <p:sld xmlns:a="http://schemas.openxmlformats.org/drawingml/2006/main" xmlns:r="http://schemas.openxmlformats.org/officeDocument/2006/relationships" xmlns:p="http://schemas.openxmlformats.org/presentationml/2006/main">
   <p:cSld>
     <p:spTree>
@@ -6393,7 +7274,7 @@
 </p:sld>
 </file>
 
-<file path=ppt/slides/slide12.xml><?xml version="1.0" encoding="utf-8"?>
+<file path=ppt/slides/slide13.xml><?xml version="1.0" encoding="utf-8"?>
 <p:sld xmlns:a="http://schemas.openxmlformats.org/drawingml/2006/main" xmlns:r="http://schemas.openxmlformats.org/officeDocument/2006/relationships" xmlns:p="http://schemas.openxmlformats.org/presentationml/2006/main">
   <p:cSld>
     <p:spTree>
@@ -6586,7 +7467,7 @@
 </p:sld>
 </file>
 
-<file path=ppt/slides/slide13.xml><?xml version="1.0" encoding="utf-8"?>
+<file path=ppt/slides/slide14.xml><?xml version="1.0" encoding="utf-8"?>
 <p:sld xmlns:a="http://schemas.openxmlformats.org/drawingml/2006/main" xmlns:r="http://schemas.openxmlformats.org/officeDocument/2006/relationships" xmlns:p="http://schemas.openxmlformats.org/presentationml/2006/main">
   <p:cSld>
     <p:spTree>
@@ -7221,7 +8102,7 @@
 </p:sld>
 </file>
 
-<file path=ppt/slides/slide14.xml><?xml version="1.0" encoding="utf-8"?>
+<file path=ppt/slides/slide15.xml><?xml version="1.0" encoding="utf-8"?>
 <p:sld xmlns:a="http://schemas.openxmlformats.org/drawingml/2006/main" xmlns:r="http://schemas.openxmlformats.org/officeDocument/2006/relationships" xmlns:p="http://schemas.openxmlformats.org/presentationml/2006/main">
   <p:cSld>
     <p:spTree>
@@ -7257,7 +8138,7 @@
 </p:sld>
 </file>
 
-<file path=ppt/slides/slide15.xml><?xml version="1.0" encoding="utf-8"?>
+<file path=ppt/slides/slide16.xml><?xml version="1.0" encoding="utf-8"?>
 <p:sld xmlns:a="http://schemas.openxmlformats.org/drawingml/2006/main" xmlns:r="http://schemas.openxmlformats.org/officeDocument/2006/relationships" xmlns:p="http://schemas.openxmlformats.org/presentationml/2006/main">
   <p:cSld>
     <p:spTree>
@@ -8958,6 +9839,1975 @@
 </file>
 
 <file path=ppt/slides/slide5.xml><?xml version="1.0" encoding="utf-8"?>
+<p:sld xmlns:a="http://schemas.openxmlformats.org/drawingml/2006/main" xmlns:r="http://schemas.openxmlformats.org/officeDocument/2006/relationships" xmlns:p="http://schemas.openxmlformats.org/presentationml/2006/main">
+  <p:cSld>
+    <p:spTree>
+      <p:nvGrpSpPr>
+        <p:cNvPr id="1" name="">
+          <a:extLst>
+            <a:ext uri="{FF2B5EF4-FFF2-40B4-BE49-F238E27FC236}">
+              <a16:creationId xmlns:a16="http://schemas.microsoft.com/office/drawing/2014/main" id="{4AF35BCE-DC37-C842-9ABC-6EAB86CB8EC7}"/>
+            </a:ext>
+          </a:extLst>
+        </p:cNvPr>
+        <p:cNvGrpSpPr/>
+        <p:nvPr/>
+      </p:nvGrpSpPr>
+      <p:grpSpPr>
+        <a:xfrm>
+          <a:off x="0" y="0"/>
+          <a:ext cx="0" cy="0"/>
+          <a:chOff x="0" y="0"/>
+          <a:chExt cx="0" cy="0"/>
+        </a:xfrm>
+      </p:grpSpPr>
+      <p:sp>
+        <p:nvSpPr>
+          <p:cNvPr id="9" name="TextBox 8">
+            <a:extLst>
+              <a:ext uri="{FF2B5EF4-FFF2-40B4-BE49-F238E27FC236}">
+                <a16:creationId xmlns:a16="http://schemas.microsoft.com/office/drawing/2014/main" id="{FDBD0E7A-0D3F-5544-EBBB-111CC42CB55E}"/>
+              </a:ext>
+            </a:extLst>
+          </p:cNvPr>
+          <p:cNvSpPr txBox="1"/>
+          <p:nvPr/>
+        </p:nvSpPr>
+        <p:spPr>
+          <a:xfrm>
+            <a:off x="206248" y="1003774"/>
+            <a:ext cx="7337552" cy="1569660"/>
+          </a:xfrm>
+          <a:prstGeom prst="rect">
+            <a:avLst/>
+          </a:prstGeom>
+          <a:noFill/>
+        </p:spPr>
+        <p:txBody>
+          <a:bodyPr wrap="square">
+            <a:spAutoFit/>
+          </a:bodyPr>
+          <a:lstStyle/>
+          <a:p>
+            <a:r>
+              <a:rPr lang="en-US" sz="2400" dirty="0">
+                <a:solidFill>
+                  <a:schemeClr val="accent6">
+                    <a:lumMod val="60000"/>
+                    <a:lumOff val="40000"/>
+                  </a:schemeClr>
+                </a:solidFill>
+              </a:rPr>
+              <a:t>Core Idea of  Vector DB:</a:t>
+            </a:r>
+          </a:p>
+          <a:p>
+            <a:endParaRPr lang="en-US" sz="2400" dirty="0">
+              <a:solidFill>
+                <a:schemeClr val="accent6">
+                  <a:lumMod val="60000"/>
+                  <a:lumOff val="40000"/>
+                </a:schemeClr>
+              </a:solidFill>
+            </a:endParaRPr>
+          </a:p>
+          <a:p>
+            <a:r>
+              <a:rPr lang="en-US" sz="2400" dirty="0">
+                <a:solidFill>
+                  <a:schemeClr val="accent6">
+                    <a:lumMod val="60000"/>
+                    <a:lumOff val="40000"/>
+                  </a:schemeClr>
+                </a:solidFill>
+              </a:rPr>
+              <a:t>The vectors that are similar in meaning would be near each other</a:t>
+            </a:r>
+          </a:p>
+        </p:txBody>
+      </p:sp>
+      <p:sp>
+        <p:nvSpPr>
+          <p:cNvPr id="3" name="Rectangle 2">
+            <a:extLst>
+              <a:ext uri="{FF2B5EF4-FFF2-40B4-BE49-F238E27FC236}">
+                <a16:creationId xmlns:a16="http://schemas.microsoft.com/office/drawing/2014/main" id="{E92D6FFE-A777-EA6C-CE99-DCD9FD18A2FF}"/>
+              </a:ext>
+            </a:extLst>
+          </p:cNvPr>
+          <p:cNvSpPr/>
+          <p:nvPr/>
+        </p:nvSpPr>
+        <p:spPr>
+          <a:xfrm>
+            <a:off x="7147892" y="1788604"/>
+            <a:ext cx="4847304" cy="4562167"/>
+          </a:xfrm>
+          <a:prstGeom prst="rect">
+            <a:avLst/>
+          </a:prstGeom>
+        </p:spPr>
+        <p:style>
+          <a:lnRef idx="2">
+            <a:schemeClr val="accent1">
+              <a:shade val="15000"/>
+            </a:schemeClr>
+          </a:lnRef>
+          <a:fillRef idx="1">
+            <a:schemeClr val="accent1"/>
+          </a:fillRef>
+          <a:effectRef idx="0">
+            <a:schemeClr val="accent1"/>
+          </a:effectRef>
+          <a:fontRef idx="minor">
+            <a:schemeClr val="lt1"/>
+          </a:fontRef>
+        </p:style>
+        <p:txBody>
+          <a:bodyPr rtlCol="0" anchor="ctr"/>
+          <a:lstStyle/>
+          <a:p>
+            <a:pPr algn="ctr"/>
+            <a:endParaRPr lang="en-IN">
+              <a:solidFill>
+                <a:schemeClr val="accent6">
+                  <a:lumMod val="60000"/>
+                  <a:lumOff val="40000"/>
+                </a:schemeClr>
+              </a:solidFill>
+            </a:endParaRPr>
+          </a:p>
+        </p:txBody>
+      </p:sp>
+      <p:sp>
+        <p:nvSpPr>
+          <p:cNvPr id="5" name="TextBox 4">
+            <a:extLst>
+              <a:ext uri="{FF2B5EF4-FFF2-40B4-BE49-F238E27FC236}">
+                <a16:creationId xmlns:a16="http://schemas.microsoft.com/office/drawing/2014/main" id="{F65214CA-8A0B-DAE8-7F1E-D08B8CCE9F74}"/>
+              </a:ext>
+            </a:extLst>
+          </p:cNvPr>
+          <p:cNvSpPr txBox="1"/>
+          <p:nvPr/>
+        </p:nvSpPr>
+        <p:spPr>
+          <a:xfrm>
+            <a:off x="8647680" y="3244334"/>
+            <a:ext cx="519694" cy="369332"/>
+          </a:xfrm>
+          <a:prstGeom prst="rect">
+            <a:avLst/>
+          </a:prstGeom>
+          <a:noFill/>
+        </p:spPr>
+        <p:txBody>
+          <a:bodyPr wrap="none" rtlCol="0">
+            <a:spAutoFit/>
+          </a:bodyPr>
+          <a:lstStyle/>
+          <a:p>
+            <a:r>
+              <a:rPr lang="en-IN" dirty="0">
+                <a:solidFill>
+                  <a:schemeClr val="accent6">
+                    <a:lumMod val="60000"/>
+                    <a:lumOff val="40000"/>
+                  </a:schemeClr>
+                </a:solidFill>
+              </a:rPr>
+              <a:t>fish</a:t>
+            </a:r>
+          </a:p>
+        </p:txBody>
+      </p:sp>
+      <p:sp>
+        <p:nvSpPr>
+          <p:cNvPr id="7" name="TextBox 6">
+            <a:extLst>
+              <a:ext uri="{FF2B5EF4-FFF2-40B4-BE49-F238E27FC236}">
+                <a16:creationId xmlns:a16="http://schemas.microsoft.com/office/drawing/2014/main" id="{AEEE8C6B-D935-2A5C-6796-734375142E6C}"/>
+              </a:ext>
+            </a:extLst>
+          </p:cNvPr>
+          <p:cNvSpPr txBox="1"/>
+          <p:nvPr/>
+        </p:nvSpPr>
+        <p:spPr>
+          <a:xfrm>
+            <a:off x="8041372" y="2670391"/>
+            <a:ext cx="725711" cy="369332"/>
+          </a:xfrm>
+          <a:prstGeom prst="rect">
+            <a:avLst/>
+          </a:prstGeom>
+          <a:noFill/>
+        </p:spPr>
+        <p:txBody>
+          <a:bodyPr wrap="none" rtlCol="0">
+            <a:spAutoFit/>
+          </a:bodyPr>
+          <a:lstStyle/>
+          <a:p>
+            <a:r>
+              <a:rPr lang="en-IN" dirty="0">
+                <a:solidFill>
+                  <a:schemeClr val="accent6">
+                    <a:lumMod val="60000"/>
+                    <a:lumOff val="40000"/>
+                  </a:schemeClr>
+                </a:solidFill>
+              </a:rPr>
+              <a:t>water</a:t>
+            </a:r>
+          </a:p>
+        </p:txBody>
+      </p:sp>
+      <p:sp>
+        <p:nvSpPr>
+          <p:cNvPr id="10" name="TextBox 9">
+            <a:extLst>
+              <a:ext uri="{FF2B5EF4-FFF2-40B4-BE49-F238E27FC236}">
+                <a16:creationId xmlns:a16="http://schemas.microsoft.com/office/drawing/2014/main" id="{3E5C20DD-A8EE-C81C-A34F-BAF960C84A83}"/>
+              </a:ext>
+            </a:extLst>
+          </p:cNvPr>
+          <p:cNvSpPr txBox="1"/>
+          <p:nvPr/>
+        </p:nvSpPr>
+        <p:spPr>
+          <a:xfrm>
+            <a:off x="7926295" y="3539152"/>
+            <a:ext cx="570990" cy="369332"/>
+          </a:xfrm>
+          <a:prstGeom prst="rect">
+            <a:avLst/>
+          </a:prstGeom>
+          <a:noFill/>
+        </p:spPr>
+        <p:txBody>
+          <a:bodyPr wrap="none" rtlCol="0">
+            <a:spAutoFit/>
+          </a:bodyPr>
+          <a:lstStyle/>
+          <a:p>
+            <a:r>
+              <a:rPr lang="en-IN" dirty="0">
+                <a:solidFill>
+                  <a:schemeClr val="accent6">
+                    <a:lumMod val="60000"/>
+                    <a:lumOff val="40000"/>
+                  </a:schemeClr>
+                </a:solidFill>
+              </a:rPr>
+              <a:t>ship</a:t>
+            </a:r>
+          </a:p>
+        </p:txBody>
+      </p:sp>
+      <p:sp>
+        <p:nvSpPr>
+          <p:cNvPr id="12" name="TextBox 11">
+            <a:extLst>
+              <a:ext uri="{FF2B5EF4-FFF2-40B4-BE49-F238E27FC236}">
+                <a16:creationId xmlns:a16="http://schemas.microsoft.com/office/drawing/2014/main" id="{DDAB4BB3-8C78-03A7-1543-D0E5A919FC7D}"/>
+              </a:ext>
+            </a:extLst>
+          </p:cNvPr>
+          <p:cNvSpPr txBox="1"/>
+          <p:nvPr/>
+        </p:nvSpPr>
+        <p:spPr>
+          <a:xfrm>
+            <a:off x="7425837" y="2764851"/>
+            <a:ext cx="500458" cy="369332"/>
+          </a:xfrm>
+          <a:prstGeom prst="rect">
+            <a:avLst/>
+          </a:prstGeom>
+          <a:noFill/>
+        </p:spPr>
+        <p:txBody>
+          <a:bodyPr wrap="none" rtlCol="0">
+            <a:spAutoFit/>
+          </a:bodyPr>
+          <a:lstStyle/>
+          <a:p>
+            <a:r>
+              <a:rPr lang="en-IN" dirty="0">
+                <a:solidFill>
+                  <a:schemeClr val="accent6">
+                    <a:lumMod val="60000"/>
+                    <a:lumOff val="40000"/>
+                  </a:schemeClr>
+                </a:solidFill>
+              </a:rPr>
+              <a:t>sea</a:t>
+            </a:r>
+          </a:p>
+        </p:txBody>
+      </p:sp>
+      <p:sp>
+        <p:nvSpPr>
+          <p:cNvPr id="14" name="TextBox 13">
+            <a:extLst>
+              <a:ext uri="{FF2B5EF4-FFF2-40B4-BE49-F238E27FC236}">
+                <a16:creationId xmlns:a16="http://schemas.microsoft.com/office/drawing/2014/main" id="{CD7D8776-D6A2-D349-4D0D-5525D55438BE}"/>
+              </a:ext>
+            </a:extLst>
+          </p:cNvPr>
+          <p:cNvSpPr txBox="1"/>
+          <p:nvPr/>
+        </p:nvSpPr>
+        <p:spPr>
+          <a:xfrm>
+            <a:off x="7550231" y="2301059"/>
+            <a:ext cx="752129" cy="369332"/>
+          </a:xfrm>
+          <a:prstGeom prst="rect">
+            <a:avLst/>
+          </a:prstGeom>
+          <a:noFill/>
+        </p:spPr>
+        <p:txBody>
+          <a:bodyPr wrap="none" rtlCol="0">
+            <a:spAutoFit/>
+          </a:bodyPr>
+          <a:lstStyle/>
+          <a:p>
+            <a:r>
+              <a:rPr lang="en-IN" dirty="0">
+                <a:solidFill>
+                  <a:schemeClr val="accent6">
+                    <a:lumMod val="60000"/>
+                    <a:lumOff val="40000"/>
+                  </a:schemeClr>
+                </a:solidFill>
+              </a:rPr>
+              <a:t>ocean</a:t>
+            </a:r>
+          </a:p>
+        </p:txBody>
+      </p:sp>
+      <p:sp>
+        <p:nvSpPr>
+          <p:cNvPr id="16" name="TextBox 15">
+            <a:extLst>
+              <a:ext uri="{FF2B5EF4-FFF2-40B4-BE49-F238E27FC236}">
+                <a16:creationId xmlns:a16="http://schemas.microsoft.com/office/drawing/2014/main" id="{2EDB928D-9CDC-62C5-3E26-C7A0E5CA5A50}"/>
+              </a:ext>
+            </a:extLst>
+          </p:cNvPr>
+          <p:cNvSpPr txBox="1"/>
+          <p:nvPr/>
+        </p:nvSpPr>
+        <p:spPr>
+          <a:xfrm>
+            <a:off x="10860409" y="5492624"/>
+            <a:ext cx="572914" cy="369332"/>
+          </a:xfrm>
+          <a:prstGeom prst="rect">
+            <a:avLst/>
+          </a:prstGeom>
+          <a:noFill/>
+        </p:spPr>
+        <p:txBody>
+          <a:bodyPr wrap="none" rtlCol="0">
+            <a:spAutoFit/>
+          </a:bodyPr>
+          <a:lstStyle/>
+          <a:p>
+            <a:r>
+              <a:rPr lang="en-IN" dirty="0">
+                <a:solidFill>
+                  <a:schemeClr val="accent6">
+                    <a:lumMod val="60000"/>
+                    <a:lumOff val="40000"/>
+                  </a:schemeClr>
+                </a:solidFill>
+              </a:rPr>
+              <a:t>sofa</a:t>
+            </a:r>
+          </a:p>
+        </p:txBody>
+      </p:sp>
+      <p:sp>
+        <p:nvSpPr>
+          <p:cNvPr id="18" name="TextBox 17">
+            <a:extLst>
+              <a:ext uri="{FF2B5EF4-FFF2-40B4-BE49-F238E27FC236}">
+                <a16:creationId xmlns:a16="http://schemas.microsoft.com/office/drawing/2014/main" id="{D3739D28-4A2F-99AF-C455-DBFECD73FDC4}"/>
+              </a:ext>
+            </a:extLst>
+          </p:cNvPr>
+          <p:cNvSpPr txBox="1"/>
+          <p:nvPr/>
+        </p:nvSpPr>
+        <p:spPr>
+          <a:xfrm>
+            <a:off x="10314039" y="5052104"/>
+            <a:ext cx="898195" cy="369332"/>
+          </a:xfrm>
+          <a:prstGeom prst="rect">
+            <a:avLst/>
+          </a:prstGeom>
+          <a:noFill/>
+        </p:spPr>
+        <p:txBody>
+          <a:bodyPr wrap="none" rtlCol="0">
+            <a:spAutoFit/>
+          </a:bodyPr>
+          <a:lstStyle/>
+          <a:p>
+            <a:r>
+              <a:rPr lang="en-IN" dirty="0">
+                <a:solidFill>
+                  <a:schemeClr val="accent6">
+                    <a:lumMod val="60000"/>
+                    <a:lumOff val="40000"/>
+                  </a:schemeClr>
+                </a:solidFill>
+              </a:rPr>
+              <a:t>recliner</a:t>
+            </a:r>
+          </a:p>
+        </p:txBody>
+      </p:sp>
+      <p:sp>
+        <p:nvSpPr>
+          <p:cNvPr id="20" name="TextBox 19">
+            <a:extLst>
+              <a:ext uri="{FF2B5EF4-FFF2-40B4-BE49-F238E27FC236}">
+                <a16:creationId xmlns:a16="http://schemas.microsoft.com/office/drawing/2014/main" id="{8A0084BE-479A-48C3-665C-798737E975ED}"/>
+              </a:ext>
+            </a:extLst>
+          </p:cNvPr>
+          <p:cNvSpPr txBox="1"/>
+          <p:nvPr/>
+        </p:nvSpPr>
+        <p:spPr>
+          <a:xfrm>
+            <a:off x="10219397" y="5421436"/>
+            <a:ext cx="543739" cy="369332"/>
+          </a:xfrm>
+          <a:prstGeom prst="rect">
+            <a:avLst/>
+          </a:prstGeom>
+          <a:noFill/>
+        </p:spPr>
+        <p:txBody>
+          <a:bodyPr wrap="none" rtlCol="0">
+            <a:spAutoFit/>
+          </a:bodyPr>
+          <a:lstStyle/>
+          <a:p>
+            <a:r>
+              <a:rPr lang="en-IN" dirty="0">
+                <a:solidFill>
+                  <a:schemeClr val="accent6">
+                    <a:lumMod val="60000"/>
+                    <a:lumOff val="40000"/>
+                  </a:schemeClr>
+                </a:solidFill>
+              </a:rPr>
+              <a:t>bed</a:t>
+            </a:r>
+          </a:p>
+        </p:txBody>
+      </p:sp>
+      <p:sp>
+        <p:nvSpPr>
+          <p:cNvPr id="22" name="TextBox 21">
+            <a:extLst>
+              <a:ext uri="{FF2B5EF4-FFF2-40B4-BE49-F238E27FC236}">
+                <a16:creationId xmlns:a16="http://schemas.microsoft.com/office/drawing/2014/main" id="{C1DFCEE6-6F4A-BBA3-7B2C-D8216E807797}"/>
+              </a:ext>
+            </a:extLst>
+          </p:cNvPr>
+          <p:cNvSpPr txBox="1"/>
+          <p:nvPr/>
+        </p:nvSpPr>
+        <p:spPr>
+          <a:xfrm>
+            <a:off x="10419066" y="2574926"/>
+            <a:ext cx="572593" cy="369332"/>
+          </a:xfrm>
+          <a:prstGeom prst="rect">
+            <a:avLst/>
+          </a:prstGeom>
+          <a:noFill/>
+        </p:spPr>
+        <p:txBody>
+          <a:bodyPr wrap="none" rtlCol="0">
+            <a:spAutoFit/>
+          </a:bodyPr>
+          <a:lstStyle/>
+          <a:p>
+            <a:r>
+              <a:rPr lang="en-IN" dirty="0">
+                <a:solidFill>
+                  <a:schemeClr val="accent6">
+                    <a:lumMod val="60000"/>
+                    <a:lumOff val="40000"/>
+                  </a:schemeClr>
+                </a:solidFill>
+              </a:rPr>
+              <a:t>king</a:t>
+            </a:r>
+          </a:p>
+        </p:txBody>
+      </p:sp>
+      <p:sp>
+        <p:nvSpPr>
+          <p:cNvPr id="24" name="TextBox 23">
+            <a:extLst>
+              <a:ext uri="{FF2B5EF4-FFF2-40B4-BE49-F238E27FC236}">
+                <a16:creationId xmlns:a16="http://schemas.microsoft.com/office/drawing/2014/main" id="{8443B669-B5FF-4637-4E74-B7A75B17897A}"/>
+              </a:ext>
+            </a:extLst>
+          </p:cNvPr>
+          <p:cNvSpPr txBox="1"/>
+          <p:nvPr/>
+        </p:nvSpPr>
+        <p:spPr>
+          <a:xfrm>
+            <a:off x="10989574" y="3015446"/>
+            <a:ext cx="780983" cy="369332"/>
+          </a:xfrm>
+          <a:prstGeom prst="rect">
+            <a:avLst/>
+          </a:prstGeom>
+          <a:noFill/>
+        </p:spPr>
+        <p:txBody>
+          <a:bodyPr wrap="none" rtlCol="0">
+            <a:spAutoFit/>
+          </a:bodyPr>
+          <a:lstStyle/>
+          <a:p>
+            <a:r>
+              <a:rPr lang="en-IN" dirty="0">
+                <a:solidFill>
+                  <a:schemeClr val="accent6">
+                    <a:lumMod val="60000"/>
+                    <a:lumOff val="40000"/>
+                  </a:schemeClr>
+                </a:solidFill>
+              </a:rPr>
+              <a:t>queen</a:t>
+            </a:r>
+          </a:p>
+        </p:txBody>
+      </p:sp>
+      <p:sp>
+        <p:nvSpPr>
+          <p:cNvPr id="26" name="TextBox 25">
+            <a:extLst>
+              <a:ext uri="{FF2B5EF4-FFF2-40B4-BE49-F238E27FC236}">
+                <a16:creationId xmlns:a16="http://schemas.microsoft.com/office/drawing/2014/main" id="{A748E78D-E4DE-679F-AB5D-491FCE83D6FE}"/>
+              </a:ext>
+            </a:extLst>
+          </p:cNvPr>
+          <p:cNvSpPr txBox="1"/>
+          <p:nvPr/>
+        </p:nvSpPr>
+        <p:spPr>
+          <a:xfrm>
+            <a:off x="10491266" y="2204102"/>
+            <a:ext cx="1000082" cy="369332"/>
+          </a:xfrm>
+          <a:prstGeom prst="rect">
+            <a:avLst/>
+          </a:prstGeom>
+          <a:noFill/>
+        </p:spPr>
+        <p:txBody>
+          <a:bodyPr wrap="none" rtlCol="0">
+            <a:spAutoFit/>
+          </a:bodyPr>
+          <a:lstStyle/>
+          <a:p>
+            <a:r>
+              <a:rPr lang="en-IN" dirty="0">
+                <a:solidFill>
+                  <a:schemeClr val="accent6">
+                    <a:lumMod val="60000"/>
+                    <a:lumOff val="40000"/>
+                  </a:schemeClr>
+                </a:solidFill>
+              </a:rPr>
+              <a:t>emperor</a:t>
+            </a:r>
+          </a:p>
+        </p:txBody>
+      </p:sp>
+      <p:grpSp>
+        <p:nvGrpSpPr>
+          <p:cNvPr id="29" name="Group 28">
+            <a:extLst>
+              <a:ext uri="{FF2B5EF4-FFF2-40B4-BE49-F238E27FC236}">
+                <a16:creationId xmlns:a16="http://schemas.microsoft.com/office/drawing/2014/main" id="{850C7CF4-31C5-00F2-70BC-D3E4278B29E9}"/>
+              </a:ext>
+            </a:extLst>
+          </p:cNvPr>
+          <p:cNvGrpSpPr/>
+          <p:nvPr/>
+        </p:nvGrpSpPr>
+        <p:grpSpPr>
+          <a:xfrm>
+            <a:off x="11111212" y="5238630"/>
+            <a:ext cx="212040" cy="142200"/>
+            <a:chOff x="2271217" y="3155988"/>
+            <a:chExt cx="212040" cy="142200"/>
+          </a:xfrm>
+        </p:grpSpPr>
+        <mc:AlternateContent xmlns:mc="http://schemas.openxmlformats.org/markup-compatibility/2006" xmlns:p14="http://schemas.microsoft.com/office/powerpoint/2010/main">
+          <mc:Choice Requires="p14">
+            <p:contentPart p14:bwMode="auto" r:id="rId2">
+              <p14:nvContentPartPr>
+                <p14:cNvPr id="27" name="Ink 26">
+                  <a:extLst>
+                    <a:ext uri="{FF2B5EF4-FFF2-40B4-BE49-F238E27FC236}">
+                      <a16:creationId xmlns:a16="http://schemas.microsoft.com/office/drawing/2014/main" id="{5551B56F-614E-E261-9636-4C25E97C92D2}"/>
+                    </a:ext>
+                  </a:extLst>
+                </p14:cNvPr>
+                <p14:cNvContentPartPr/>
+                <p14:nvPr/>
+              </p14:nvContentPartPr>
+              <p14:xfrm>
+                <a:off x="2271217" y="3155988"/>
+                <a:ext cx="212040" cy="132120"/>
+              </p14:xfrm>
+            </p:contentPart>
+          </mc:Choice>
+          <mc:Fallback xmlns="">
+            <p:pic>
+              <p:nvPicPr>
+                <p:cNvPr id="27" name="Ink 26">
+                  <a:extLst>
+                    <a:ext uri="{FF2B5EF4-FFF2-40B4-BE49-F238E27FC236}">
+                      <a16:creationId xmlns:a16="http://schemas.microsoft.com/office/drawing/2014/main" id="{5551B56F-614E-E261-9636-4C25E97C92D2}"/>
+                    </a:ext>
+                  </a:extLst>
+                </p:cNvPr>
+                <p:cNvPicPr/>
+                <p:nvPr/>
+              </p:nvPicPr>
+              <p:blipFill>
+                <a:blip r:embed="rId3"/>
+                <a:stretch>
+                  <a:fillRect/>
+                </a:stretch>
+              </p:blipFill>
+              <p:spPr>
+                <a:xfrm>
+                  <a:off x="2265097" y="3149868"/>
+                  <a:ext cx="224280" cy="144360"/>
+                </a:xfrm>
+                <a:prstGeom prst="rect">
+                  <a:avLst/>
+                </a:prstGeom>
+              </p:spPr>
+            </p:pic>
+          </mc:Fallback>
+        </mc:AlternateContent>
+        <mc:AlternateContent xmlns:mc="http://schemas.openxmlformats.org/markup-compatibility/2006" xmlns:p14="http://schemas.microsoft.com/office/powerpoint/2010/main">
+          <mc:Choice Requires="p14">
+            <p:contentPart p14:bwMode="auto" r:id="rId4">
+              <p14:nvContentPartPr>
+                <p14:cNvPr id="28" name="Ink 27">
+                  <a:extLst>
+                    <a:ext uri="{FF2B5EF4-FFF2-40B4-BE49-F238E27FC236}">
+                      <a16:creationId xmlns:a16="http://schemas.microsoft.com/office/drawing/2014/main" id="{360474A4-8B7D-1B66-4E53-1022D3DC6E85}"/>
+                    </a:ext>
+                  </a:extLst>
+                </p14:cNvPr>
+                <p14:cNvContentPartPr/>
+                <p14:nvPr/>
+              </p14:nvContentPartPr>
+              <p14:xfrm>
+                <a:off x="2336017" y="3155988"/>
+                <a:ext cx="92880" cy="142200"/>
+              </p14:xfrm>
+            </p:contentPart>
+          </mc:Choice>
+          <mc:Fallback xmlns="">
+            <p:pic>
+              <p:nvPicPr>
+                <p:cNvPr id="28" name="Ink 27">
+                  <a:extLst>
+                    <a:ext uri="{FF2B5EF4-FFF2-40B4-BE49-F238E27FC236}">
+                      <a16:creationId xmlns:a16="http://schemas.microsoft.com/office/drawing/2014/main" id="{360474A4-8B7D-1B66-4E53-1022D3DC6E85}"/>
+                    </a:ext>
+                  </a:extLst>
+                </p:cNvPr>
+                <p:cNvPicPr/>
+                <p:nvPr/>
+              </p:nvPicPr>
+              <p:blipFill>
+                <a:blip r:embed="rId5"/>
+                <a:stretch>
+                  <a:fillRect/>
+                </a:stretch>
+              </p:blipFill>
+              <p:spPr>
+                <a:xfrm>
+                  <a:off x="2329897" y="3149868"/>
+                  <a:ext cx="105120" cy="154440"/>
+                </a:xfrm>
+                <a:prstGeom prst="rect">
+                  <a:avLst/>
+                </a:prstGeom>
+              </p:spPr>
+            </p:pic>
+          </mc:Fallback>
+        </mc:AlternateContent>
+      </p:grpSp>
+      <p:grpSp>
+        <p:nvGrpSpPr>
+          <p:cNvPr id="30" name="Group 29">
+            <a:extLst>
+              <a:ext uri="{FF2B5EF4-FFF2-40B4-BE49-F238E27FC236}">
+                <a16:creationId xmlns:a16="http://schemas.microsoft.com/office/drawing/2014/main" id="{C23170AC-A3EA-5789-9E9B-F1AC306E0625}"/>
+              </a:ext>
+            </a:extLst>
+          </p:cNvPr>
+          <p:cNvGrpSpPr/>
+          <p:nvPr/>
+        </p:nvGrpSpPr>
+        <p:grpSpPr>
+          <a:xfrm>
+            <a:off x="8340164" y="2443547"/>
+            <a:ext cx="212040" cy="142200"/>
+            <a:chOff x="2271217" y="3155988"/>
+            <a:chExt cx="212040" cy="142200"/>
+          </a:xfrm>
+        </p:grpSpPr>
+        <mc:AlternateContent xmlns:mc="http://schemas.openxmlformats.org/markup-compatibility/2006" xmlns:p14="http://schemas.microsoft.com/office/powerpoint/2010/main">
+          <mc:Choice Requires="p14">
+            <p:contentPart p14:bwMode="auto" r:id="rId6">
+              <p14:nvContentPartPr>
+                <p14:cNvPr id="31" name="Ink 30">
+                  <a:extLst>
+                    <a:ext uri="{FF2B5EF4-FFF2-40B4-BE49-F238E27FC236}">
+                      <a16:creationId xmlns:a16="http://schemas.microsoft.com/office/drawing/2014/main" id="{C3DDC56D-5A16-794D-1562-7ABE75CE2ADD}"/>
+                    </a:ext>
+                  </a:extLst>
+                </p14:cNvPr>
+                <p14:cNvContentPartPr/>
+                <p14:nvPr/>
+              </p14:nvContentPartPr>
+              <p14:xfrm>
+                <a:off x="2271217" y="3155988"/>
+                <a:ext cx="212040" cy="132120"/>
+              </p14:xfrm>
+            </p:contentPart>
+          </mc:Choice>
+          <mc:Fallback xmlns="">
+            <p:pic>
+              <p:nvPicPr>
+                <p:cNvPr id="31" name="Ink 30">
+                  <a:extLst>
+                    <a:ext uri="{FF2B5EF4-FFF2-40B4-BE49-F238E27FC236}">
+                      <a16:creationId xmlns:a16="http://schemas.microsoft.com/office/drawing/2014/main" id="{C3DDC56D-5A16-794D-1562-7ABE75CE2ADD}"/>
+                    </a:ext>
+                  </a:extLst>
+                </p:cNvPr>
+                <p:cNvPicPr/>
+                <p:nvPr/>
+              </p:nvPicPr>
+              <p:blipFill>
+                <a:blip r:embed="rId7"/>
+                <a:stretch>
+                  <a:fillRect/>
+                </a:stretch>
+              </p:blipFill>
+              <p:spPr>
+                <a:xfrm>
+                  <a:off x="2265097" y="3149868"/>
+                  <a:ext cx="224280" cy="144360"/>
+                </a:xfrm>
+                <a:prstGeom prst="rect">
+                  <a:avLst/>
+                </a:prstGeom>
+              </p:spPr>
+            </p:pic>
+          </mc:Fallback>
+        </mc:AlternateContent>
+        <mc:AlternateContent xmlns:mc="http://schemas.openxmlformats.org/markup-compatibility/2006" xmlns:p14="http://schemas.microsoft.com/office/powerpoint/2010/main">
+          <mc:Choice Requires="p14">
+            <p:contentPart p14:bwMode="auto" r:id="rId8">
+              <p14:nvContentPartPr>
+                <p14:cNvPr id="32" name="Ink 31">
+                  <a:extLst>
+                    <a:ext uri="{FF2B5EF4-FFF2-40B4-BE49-F238E27FC236}">
+                      <a16:creationId xmlns:a16="http://schemas.microsoft.com/office/drawing/2014/main" id="{5D94AD2F-0431-80E3-6891-B2DFDDF231BD}"/>
+                    </a:ext>
+                  </a:extLst>
+                </p14:cNvPr>
+                <p14:cNvContentPartPr/>
+                <p14:nvPr/>
+              </p14:nvContentPartPr>
+              <p14:xfrm>
+                <a:off x="2336017" y="3155988"/>
+                <a:ext cx="92880" cy="142200"/>
+              </p14:xfrm>
+            </p:contentPart>
+          </mc:Choice>
+          <mc:Fallback xmlns="">
+            <p:pic>
+              <p:nvPicPr>
+                <p:cNvPr id="32" name="Ink 31">
+                  <a:extLst>
+                    <a:ext uri="{FF2B5EF4-FFF2-40B4-BE49-F238E27FC236}">
+                      <a16:creationId xmlns:a16="http://schemas.microsoft.com/office/drawing/2014/main" id="{5D94AD2F-0431-80E3-6891-B2DFDDF231BD}"/>
+                    </a:ext>
+                  </a:extLst>
+                </p:cNvPr>
+                <p:cNvPicPr/>
+                <p:nvPr/>
+              </p:nvPicPr>
+              <p:blipFill>
+                <a:blip r:embed="rId9"/>
+                <a:stretch>
+                  <a:fillRect/>
+                </a:stretch>
+              </p:blipFill>
+              <p:spPr>
+                <a:xfrm>
+                  <a:off x="2329897" y="3149868"/>
+                  <a:ext cx="105120" cy="154440"/>
+                </a:xfrm>
+                <a:prstGeom prst="rect">
+                  <a:avLst/>
+                </a:prstGeom>
+              </p:spPr>
+            </p:pic>
+          </mc:Fallback>
+        </mc:AlternateContent>
+      </p:grpSp>
+      <p:grpSp>
+        <p:nvGrpSpPr>
+          <p:cNvPr id="33" name="Group 32">
+            <a:extLst>
+              <a:ext uri="{FF2B5EF4-FFF2-40B4-BE49-F238E27FC236}">
+                <a16:creationId xmlns:a16="http://schemas.microsoft.com/office/drawing/2014/main" id="{EB0DE463-6059-582D-096A-E8777CC640F5}"/>
+              </a:ext>
+            </a:extLst>
+          </p:cNvPr>
+          <p:cNvGrpSpPr/>
+          <p:nvPr/>
+        </p:nvGrpSpPr>
+        <p:grpSpPr>
+          <a:xfrm>
+            <a:off x="7550231" y="3093817"/>
+            <a:ext cx="212040" cy="142200"/>
+            <a:chOff x="2271217" y="3155988"/>
+            <a:chExt cx="212040" cy="142200"/>
+          </a:xfrm>
+        </p:grpSpPr>
+        <mc:AlternateContent xmlns:mc="http://schemas.openxmlformats.org/markup-compatibility/2006" xmlns:p14="http://schemas.microsoft.com/office/powerpoint/2010/main">
+          <mc:Choice Requires="p14">
+            <p:contentPart p14:bwMode="auto" r:id="rId10">
+              <p14:nvContentPartPr>
+                <p14:cNvPr id="34" name="Ink 33">
+                  <a:extLst>
+                    <a:ext uri="{FF2B5EF4-FFF2-40B4-BE49-F238E27FC236}">
+                      <a16:creationId xmlns:a16="http://schemas.microsoft.com/office/drawing/2014/main" id="{0B6472F2-DA48-13AA-AC3D-05B42C1C2E3D}"/>
+                    </a:ext>
+                  </a:extLst>
+                </p14:cNvPr>
+                <p14:cNvContentPartPr/>
+                <p14:nvPr/>
+              </p14:nvContentPartPr>
+              <p14:xfrm>
+                <a:off x="2271217" y="3155988"/>
+                <a:ext cx="212040" cy="132120"/>
+              </p14:xfrm>
+            </p:contentPart>
+          </mc:Choice>
+          <mc:Fallback xmlns="">
+            <p:pic>
+              <p:nvPicPr>
+                <p:cNvPr id="34" name="Ink 33">
+                  <a:extLst>
+                    <a:ext uri="{FF2B5EF4-FFF2-40B4-BE49-F238E27FC236}">
+                      <a16:creationId xmlns:a16="http://schemas.microsoft.com/office/drawing/2014/main" id="{0B6472F2-DA48-13AA-AC3D-05B42C1C2E3D}"/>
+                    </a:ext>
+                  </a:extLst>
+                </p:cNvPr>
+                <p:cNvPicPr/>
+                <p:nvPr/>
+              </p:nvPicPr>
+              <p:blipFill>
+                <a:blip r:embed="rId7"/>
+                <a:stretch>
+                  <a:fillRect/>
+                </a:stretch>
+              </p:blipFill>
+              <p:spPr>
+                <a:xfrm>
+                  <a:off x="2265097" y="3149868"/>
+                  <a:ext cx="224280" cy="144360"/>
+                </a:xfrm>
+                <a:prstGeom prst="rect">
+                  <a:avLst/>
+                </a:prstGeom>
+              </p:spPr>
+            </p:pic>
+          </mc:Fallback>
+        </mc:AlternateContent>
+        <mc:AlternateContent xmlns:mc="http://schemas.openxmlformats.org/markup-compatibility/2006" xmlns:p14="http://schemas.microsoft.com/office/powerpoint/2010/main">
+          <mc:Choice Requires="p14">
+            <p:contentPart p14:bwMode="auto" r:id="rId11">
+              <p14:nvContentPartPr>
+                <p14:cNvPr id="35" name="Ink 34">
+                  <a:extLst>
+                    <a:ext uri="{FF2B5EF4-FFF2-40B4-BE49-F238E27FC236}">
+                      <a16:creationId xmlns:a16="http://schemas.microsoft.com/office/drawing/2014/main" id="{6711981A-CCC8-07E9-48B5-2BD714A807D2}"/>
+                    </a:ext>
+                  </a:extLst>
+                </p14:cNvPr>
+                <p14:cNvContentPartPr/>
+                <p14:nvPr/>
+              </p14:nvContentPartPr>
+              <p14:xfrm>
+                <a:off x="2336017" y="3155988"/>
+                <a:ext cx="92880" cy="142200"/>
+              </p14:xfrm>
+            </p:contentPart>
+          </mc:Choice>
+          <mc:Fallback xmlns="">
+            <p:pic>
+              <p:nvPicPr>
+                <p:cNvPr id="35" name="Ink 34">
+                  <a:extLst>
+                    <a:ext uri="{FF2B5EF4-FFF2-40B4-BE49-F238E27FC236}">
+                      <a16:creationId xmlns:a16="http://schemas.microsoft.com/office/drawing/2014/main" id="{6711981A-CCC8-07E9-48B5-2BD714A807D2}"/>
+                    </a:ext>
+                  </a:extLst>
+                </p:cNvPr>
+                <p:cNvPicPr/>
+                <p:nvPr/>
+              </p:nvPicPr>
+              <p:blipFill>
+                <a:blip r:embed="rId9"/>
+                <a:stretch>
+                  <a:fillRect/>
+                </a:stretch>
+              </p:blipFill>
+              <p:spPr>
+                <a:xfrm>
+                  <a:off x="2329897" y="3149868"/>
+                  <a:ext cx="105120" cy="154440"/>
+                </a:xfrm>
+                <a:prstGeom prst="rect">
+                  <a:avLst/>
+                </a:prstGeom>
+              </p:spPr>
+            </p:pic>
+          </mc:Fallback>
+        </mc:AlternateContent>
+      </p:grpSp>
+      <p:grpSp>
+        <p:nvGrpSpPr>
+          <p:cNvPr id="36" name="Group 35">
+            <a:extLst>
+              <a:ext uri="{FF2B5EF4-FFF2-40B4-BE49-F238E27FC236}">
+                <a16:creationId xmlns:a16="http://schemas.microsoft.com/office/drawing/2014/main" id="{176ABF86-98E9-2F75-E5E3-871BE4FB1577}"/>
+              </a:ext>
+            </a:extLst>
+          </p:cNvPr>
+          <p:cNvGrpSpPr/>
+          <p:nvPr/>
+        </p:nvGrpSpPr>
+        <p:grpSpPr>
+          <a:xfrm>
+            <a:off x="8321862" y="2982167"/>
+            <a:ext cx="212040" cy="142200"/>
+            <a:chOff x="2271217" y="3155988"/>
+            <a:chExt cx="212040" cy="142200"/>
+          </a:xfrm>
+        </p:grpSpPr>
+        <mc:AlternateContent xmlns:mc="http://schemas.openxmlformats.org/markup-compatibility/2006" xmlns:p14="http://schemas.microsoft.com/office/powerpoint/2010/main">
+          <mc:Choice Requires="p14">
+            <p:contentPart p14:bwMode="auto" r:id="rId12">
+              <p14:nvContentPartPr>
+                <p14:cNvPr id="37" name="Ink 36">
+                  <a:extLst>
+                    <a:ext uri="{FF2B5EF4-FFF2-40B4-BE49-F238E27FC236}">
+                      <a16:creationId xmlns:a16="http://schemas.microsoft.com/office/drawing/2014/main" id="{7ABFCA3D-014D-0CFE-F33A-2491B6073986}"/>
+                    </a:ext>
+                  </a:extLst>
+                </p14:cNvPr>
+                <p14:cNvContentPartPr/>
+                <p14:nvPr/>
+              </p14:nvContentPartPr>
+              <p14:xfrm>
+                <a:off x="2271217" y="3155988"/>
+                <a:ext cx="212040" cy="132120"/>
+              </p14:xfrm>
+            </p:contentPart>
+          </mc:Choice>
+          <mc:Fallback xmlns="">
+            <p:pic>
+              <p:nvPicPr>
+                <p:cNvPr id="37" name="Ink 36">
+                  <a:extLst>
+                    <a:ext uri="{FF2B5EF4-FFF2-40B4-BE49-F238E27FC236}">
+                      <a16:creationId xmlns:a16="http://schemas.microsoft.com/office/drawing/2014/main" id="{7ABFCA3D-014D-0CFE-F33A-2491B6073986}"/>
+                    </a:ext>
+                  </a:extLst>
+                </p:cNvPr>
+                <p:cNvPicPr/>
+                <p:nvPr/>
+              </p:nvPicPr>
+              <p:blipFill>
+                <a:blip r:embed="rId7"/>
+                <a:stretch>
+                  <a:fillRect/>
+                </a:stretch>
+              </p:blipFill>
+              <p:spPr>
+                <a:xfrm>
+                  <a:off x="2265097" y="3149868"/>
+                  <a:ext cx="224280" cy="144360"/>
+                </a:xfrm>
+                <a:prstGeom prst="rect">
+                  <a:avLst/>
+                </a:prstGeom>
+              </p:spPr>
+            </p:pic>
+          </mc:Fallback>
+        </mc:AlternateContent>
+        <mc:AlternateContent xmlns:mc="http://schemas.openxmlformats.org/markup-compatibility/2006" xmlns:p14="http://schemas.microsoft.com/office/powerpoint/2010/main">
+          <mc:Choice Requires="p14">
+            <p:contentPart p14:bwMode="auto" r:id="rId13">
+              <p14:nvContentPartPr>
+                <p14:cNvPr id="38" name="Ink 37">
+                  <a:extLst>
+                    <a:ext uri="{FF2B5EF4-FFF2-40B4-BE49-F238E27FC236}">
+                      <a16:creationId xmlns:a16="http://schemas.microsoft.com/office/drawing/2014/main" id="{17FC5ABE-B14F-8293-94F0-F71D9D23746D}"/>
+                    </a:ext>
+                  </a:extLst>
+                </p14:cNvPr>
+                <p14:cNvContentPartPr/>
+                <p14:nvPr/>
+              </p14:nvContentPartPr>
+              <p14:xfrm>
+                <a:off x="2336017" y="3155988"/>
+                <a:ext cx="92880" cy="142200"/>
+              </p14:xfrm>
+            </p:contentPart>
+          </mc:Choice>
+          <mc:Fallback xmlns="">
+            <p:pic>
+              <p:nvPicPr>
+                <p:cNvPr id="38" name="Ink 37">
+                  <a:extLst>
+                    <a:ext uri="{FF2B5EF4-FFF2-40B4-BE49-F238E27FC236}">
+                      <a16:creationId xmlns:a16="http://schemas.microsoft.com/office/drawing/2014/main" id="{17FC5ABE-B14F-8293-94F0-F71D9D23746D}"/>
+                    </a:ext>
+                  </a:extLst>
+                </p:cNvPr>
+                <p:cNvPicPr/>
+                <p:nvPr/>
+              </p:nvPicPr>
+              <p:blipFill>
+                <a:blip r:embed="rId9"/>
+                <a:stretch>
+                  <a:fillRect/>
+                </a:stretch>
+              </p:blipFill>
+              <p:spPr>
+                <a:xfrm>
+                  <a:off x="2329897" y="3149868"/>
+                  <a:ext cx="105120" cy="154440"/>
+                </a:xfrm>
+                <a:prstGeom prst="rect">
+                  <a:avLst/>
+                </a:prstGeom>
+              </p:spPr>
+            </p:pic>
+          </mc:Fallback>
+        </mc:AlternateContent>
+      </p:grpSp>
+      <p:grpSp>
+        <p:nvGrpSpPr>
+          <p:cNvPr id="39" name="Group 38">
+            <a:extLst>
+              <a:ext uri="{FF2B5EF4-FFF2-40B4-BE49-F238E27FC236}">
+                <a16:creationId xmlns:a16="http://schemas.microsoft.com/office/drawing/2014/main" id="{8391CEEB-916C-573A-F16B-2269A786BF8F}"/>
+              </a:ext>
+            </a:extLst>
+          </p:cNvPr>
+          <p:cNvGrpSpPr/>
+          <p:nvPr/>
+        </p:nvGrpSpPr>
+        <p:grpSpPr>
+          <a:xfrm>
+            <a:off x="8801507" y="3581618"/>
+            <a:ext cx="212040" cy="142200"/>
+            <a:chOff x="2271217" y="3155988"/>
+            <a:chExt cx="212040" cy="142200"/>
+          </a:xfrm>
+        </p:grpSpPr>
+        <mc:AlternateContent xmlns:mc="http://schemas.openxmlformats.org/markup-compatibility/2006" xmlns:p14="http://schemas.microsoft.com/office/powerpoint/2010/main">
+          <mc:Choice Requires="p14">
+            <p:contentPart p14:bwMode="auto" r:id="rId14">
+              <p14:nvContentPartPr>
+                <p14:cNvPr id="40" name="Ink 39">
+                  <a:extLst>
+                    <a:ext uri="{FF2B5EF4-FFF2-40B4-BE49-F238E27FC236}">
+                      <a16:creationId xmlns:a16="http://schemas.microsoft.com/office/drawing/2014/main" id="{A27653D3-790D-C5C7-A24E-048244031EC9}"/>
+                    </a:ext>
+                  </a:extLst>
+                </p14:cNvPr>
+                <p14:cNvContentPartPr/>
+                <p14:nvPr/>
+              </p14:nvContentPartPr>
+              <p14:xfrm>
+                <a:off x="2271217" y="3155988"/>
+                <a:ext cx="212040" cy="132120"/>
+              </p14:xfrm>
+            </p:contentPart>
+          </mc:Choice>
+          <mc:Fallback xmlns="">
+            <p:pic>
+              <p:nvPicPr>
+                <p:cNvPr id="40" name="Ink 39">
+                  <a:extLst>
+                    <a:ext uri="{FF2B5EF4-FFF2-40B4-BE49-F238E27FC236}">
+                      <a16:creationId xmlns:a16="http://schemas.microsoft.com/office/drawing/2014/main" id="{A27653D3-790D-C5C7-A24E-048244031EC9}"/>
+                    </a:ext>
+                  </a:extLst>
+                </p:cNvPr>
+                <p:cNvPicPr/>
+                <p:nvPr/>
+              </p:nvPicPr>
+              <p:blipFill>
+                <a:blip r:embed="rId7"/>
+                <a:stretch>
+                  <a:fillRect/>
+                </a:stretch>
+              </p:blipFill>
+              <p:spPr>
+                <a:xfrm>
+                  <a:off x="2265097" y="3149868"/>
+                  <a:ext cx="224280" cy="144360"/>
+                </a:xfrm>
+                <a:prstGeom prst="rect">
+                  <a:avLst/>
+                </a:prstGeom>
+              </p:spPr>
+            </p:pic>
+          </mc:Fallback>
+        </mc:AlternateContent>
+        <mc:AlternateContent xmlns:mc="http://schemas.openxmlformats.org/markup-compatibility/2006" xmlns:p14="http://schemas.microsoft.com/office/powerpoint/2010/main">
+          <mc:Choice Requires="p14">
+            <p:contentPart p14:bwMode="auto" r:id="rId15">
+              <p14:nvContentPartPr>
+                <p14:cNvPr id="41" name="Ink 40">
+                  <a:extLst>
+                    <a:ext uri="{FF2B5EF4-FFF2-40B4-BE49-F238E27FC236}">
+                      <a16:creationId xmlns:a16="http://schemas.microsoft.com/office/drawing/2014/main" id="{932FE137-2EDD-E222-698A-93A37EE1A8F7}"/>
+                    </a:ext>
+                  </a:extLst>
+                </p14:cNvPr>
+                <p14:cNvContentPartPr/>
+                <p14:nvPr/>
+              </p14:nvContentPartPr>
+              <p14:xfrm>
+                <a:off x="2336017" y="3155988"/>
+                <a:ext cx="92880" cy="142200"/>
+              </p14:xfrm>
+            </p:contentPart>
+          </mc:Choice>
+          <mc:Fallback xmlns="">
+            <p:pic>
+              <p:nvPicPr>
+                <p:cNvPr id="41" name="Ink 40">
+                  <a:extLst>
+                    <a:ext uri="{FF2B5EF4-FFF2-40B4-BE49-F238E27FC236}">
+                      <a16:creationId xmlns:a16="http://schemas.microsoft.com/office/drawing/2014/main" id="{932FE137-2EDD-E222-698A-93A37EE1A8F7}"/>
+                    </a:ext>
+                  </a:extLst>
+                </p:cNvPr>
+                <p:cNvPicPr/>
+                <p:nvPr/>
+              </p:nvPicPr>
+              <p:blipFill>
+                <a:blip r:embed="rId9"/>
+                <a:stretch>
+                  <a:fillRect/>
+                </a:stretch>
+              </p:blipFill>
+              <p:spPr>
+                <a:xfrm>
+                  <a:off x="2329897" y="3149868"/>
+                  <a:ext cx="105120" cy="154440"/>
+                </a:xfrm>
+                <a:prstGeom prst="rect">
+                  <a:avLst/>
+                </a:prstGeom>
+              </p:spPr>
+            </p:pic>
+          </mc:Fallback>
+        </mc:AlternateContent>
+      </p:grpSp>
+      <p:grpSp>
+        <p:nvGrpSpPr>
+          <p:cNvPr id="42" name="Group 41">
+            <a:extLst>
+              <a:ext uri="{FF2B5EF4-FFF2-40B4-BE49-F238E27FC236}">
+                <a16:creationId xmlns:a16="http://schemas.microsoft.com/office/drawing/2014/main" id="{26986ED4-AA63-004B-A32F-991D5EC2C0C6}"/>
+              </a:ext>
+            </a:extLst>
+          </p:cNvPr>
+          <p:cNvGrpSpPr/>
+          <p:nvPr/>
+        </p:nvGrpSpPr>
+        <p:grpSpPr>
+          <a:xfrm>
+            <a:off x="8090320" y="3908484"/>
+            <a:ext cx="212040" cy="142200"/>
+            <a:chOff x="2271217" y="3155988"/>
+            <a:chExt cx="212040" cy="142200"/>
+          </a:xfrm>
+        </p:grpSpPr>
+        <mc:AlternateContent xmlns:mc="http://schemas.openxmlformats.org/markup-compatibility/2006" xmlns:p14="http://schemas.microsoft.com/office/powerpoint/2010/main">
+          <mc:Choice Requires="p14">
+            <p:contentPart p14:bwMode="auto" r:id="rId16">
+              <p14:nvContentPartPr>
+                <p14:cNvPr id="43" name="Ink 42">
+                  <a:extLst>
+                    <a:ext uri="{FF2B5EF4-FFF2-40B4-BE49-F238E27FC236}">
+                      <a16:creationId xmlns:a16="http://schemas.microsoft.com/office/drawing/2014/main" id="{DF3EA40E-24B5-85C5-D189-AB2EC79674C6}"/>
+                    </a:ext>
+                  </a:extLst>
+                </p14:cNvPr>
+                <p14:cNvContentPartPr/>
+                <p14:nvPr/>
+              </p14:nvContentPartPr>
+              <p14:xfrm>
+                <a:off x="2271217" y="3155988"/>
+                <a:ext cx="212040" cy="132120"/>
+              </p14:xfrm>
+            </p:contentPart>
+          </mc:Choice>
+          <mc:Fallback xmlns="">
+            <p:pic>
+              <p:nvPicPr>
+                <p:cNvPr id="43" name="Ink 42">
+                  <a:extLst>
+                    <a:ext uri="{FF2B5EF4-FFF2-40B4-BE49-F238E27FC236}">
+                      <a16:creationId xmlns:a16="http://schemas.microsoft.com/office/drawing/2014/main" id="{DF3EA40E-24B5-85C5-D189-AB2EC79674C6}"/>
+                    </a:ext>
+                  </a:extLst>
+                </p:cNvPr>
+                <p:cNvPicPr/>
+                <p:nvPr/>
+              </p:nvPicPr>
+              <p:blipFill>
+                <a:blip r:embed="rId7"/>
+                <a:stretch>
+                  <a:fillRect/>
+                </a:stretch>
+              </p:blipFill>
+              <p:spPr>
+                <a:xfrm>
+                  <a:off x="2265097" y="3149868"/>
+                  <a:ext cx="224280" cy="144360"/>
+                </a:xfrm>
+                <a:prstGeom prst="rect">
+                  <a:avLst/>
+                </a:prstGeom>
+              </p:spPr>
+            </p:pic>
+          </mc:Fallback>
+        </mc:AlternateContent>
+        <mc:AlternateContent xmlns:mc="http://schemas.openxmlformats.org/markup-compatibility/2006" xmlns:p14="http://schemas.microsoft.com/office/powerpoint/2010/main">
+          <mc:Choice Requires="p14">
+            <p:contentPart p14:bwMode="auto" r:id="rId17">
+              <p14:nvContentPartPr>
+                <p14:cNvPr id="44" name="Ink 43">
+                  <a:extLst>
+                    <a:ext uri="{FF2B5EF4-FFF2-40B4-BE49-F238E27FC236}">
+                      <a16:creationId xmlns:a16="http://schemas.microsoft.com/office/drawing/2014/main" id="{8ACEC57B-3B87-A6B4-A2B9-B8A8B4298F02}"/>
+                    </a:ext>
+                  </a:extLst>
+                </p14:cNvPr>
+                <p14:cNvContentPartPr/>
+                <p14:nvPr/>
+              </p14:nvContentPartPr>
+              <p14:xfrm>
+                <a:off x="2336017" y="3155988"/>
+                <a:ext cx="92880" cy="142200"/>
+              </p14:xfrm>
+            </p:contentPart>
+          </mc:Choice>
+          <mc:Fallback xmlns="">
+            <p:pic>
+              <p:nvPicPr>
+                <p:cNvPr id="44" name="Ink 43">
+                  <a:extLst>
+                    <a:ext uri="{FF2B5EF4-FFF2-40B4-BE49-F238E27FC236}">
+                      <a16:creationId xmlns:a16="http://schemas.microsoft.com/office/drawing/2014/main" id="{8ACEC57B-3B87-A6B4-A2B9-B8A8B4298F02}"/>
+                    </a:ext>
+                  </a:extLst>
+                </p:cNvPr>
+                <p:cNvPicPr/>
+                <p:nvPr/>
+              </p:nvPicPr>
+              <p:blipFill>
+                <a:blip r:embed="rId9"/>
+                <a:stretch>
+                  <a:fillRect/>
+                </a:stretch>
+              </p:blipFill>
+              <p:spPr>
+                <a:xfrm>
+                  <a:off x="2329897" y="3149868"/>
+                  <a:ext cx="105120" cy="154440"/>
+                </a:xfrm>
+                <a:prstGeom prst="rect">
+                  <a:avLst/>
+                </a:prstGeom>
+              </p:spPr>
+            </p:pic>
+          </mc:Fallback>
+        </mc:AlternateContent>
+      </p:grpSp>
+      <p:grpSp>
+        <p:nvGrpSpPr>
+          <p:cNvPr id="45" name="Group 44">
+            <a:extLst>
+              <a:ext uri="{FF2B5EF4-FFF2-40B4-BE49-F238E27FC236}">
+                <a16:creationId xmlns:a16="http://schemas.microsoft.com/office/drawing/2014/main" id="{FD86C2B0-B41B-C36F-E6C2-A095E03F810B}"/>
+              </a:ext>
+            </a:extLst>
+          </p:cNvPr>
+          <p:cNvGrpSpPr/>
+          <p:nvPr/>
+        </p:nvGrpSpPr>
+        <p:grpSpPr>
+          <a:xfrm>
+            <a:off x="11366723" y="5600132"/>
+            <a:ext cx="212040" cy="142200"/>
+            <a:chOff x="2271217" y="3155988"/>
+            <a:chExt cx="212040" cy="142200"/>
+          </a:xfrm>
+        </p:grpSpPr>
+        <mc:AlternateContent xmlns:mc="http://schemas.openxmlformats.org/markup-compatibility/2006" xmlns:p14="http://schemas.microsoft.com/office/powerpoint/2010/main">
+          <mc:Choice Requires="p14">
+            <p:contentPart p14:bwMode="auto" r:id="rId18">
+              <p14:nvContentPartPr>
+                <p14:cNvPr id="46" name="Ink 45">
+                  <a:extLst>
+                    <a:ext uri="{FF2B5EF4-FFF2-40B4-BE49-F238E27FC236}">
+                      <a16:creationId xmlns:a16="http://schemas.microsoft.com/office/drawing/2014/main" id="{E0DDB26F-8D3F-47A0-2746-73DB9031D78B}"/>
+                    </a:ext>
+                  </a:extLst>
+                </p14:cNvPr>
+                <p14:cNvContentPartPr/>
+                <p14:nvPr/>
+              </p14:nvContentPartPr>
+              <p14:xfrm>
+                <a:off x="2271217" y="3155988"/>
+                <a:ext cx="212040" cy="132120"/>
+              </p14:xfrm>
+            </p:contentPart>
+          </mc:Choice>
+          <mc:Fallback xmlns="">
+            <p:pic>
+              <p:nvPicPr>
+                <p:cNvPr id="46" name="Ink 45">
+                  <a:extLst>
+                    <a:ext uri="{FF2B5EF4-FFF2-40B4-BE49-F238E27FC236}">
+                      <a16:creationId xmlns:a16="http://schemas.microsoft.com/office/drawing/2014/main" id="{E0DDB26F-8D3F-47A0-2746-73DB9031D78B}"/>
+                    </a:ext>
+                  </a:extLst>
+                </p:cNvPr>
+                <p:cNvPicPr/>
+                <p:nvPr/>
+              </p:nvPicPr>
+              <p:blipFill>
+                <a:blip r:embed="rId3"/>
+                <a:stretch>
+                  <a:fillRect/>
+                </a:stretch>
+              </p:blipFill>
+              <p:spPr>
+                <a:xfrm>
+                  <a:off x="2265097" y="3149868"/>
+                  <a:ext cx="224280" cy="144360"/>
+                </a:xfrm>
+                <a:prstGeom prst="rect">
+                  <a:avLst/>
+                </a:prstGeom>
+              </p:spPr>
+            </p:pic>
+          </mc:Fallback>
+        </mc:AlternateContent>
+        <mc:AlternateContent xmlns:mc="http://schemas.openxmlformats.org/markup-compatibility/2006" xmlns:p14="http://schemas.microsoft.com/office/powerpoint/2010/main">
+          <mc:Choice Requires="p14">
+            <p:contentPart p14:bwMode="auto" r:id="rId19">
+              <p14:nvContentPartPr>
+                <p14:cNvPr id="47" name="Ink 46">
+                  <a:extLst>
+                    <a:ext uri="{FF2B5EF4-FFF2-40B4-BE49-F238E27FC236}">
+                      <a16:creationId xmlns:a16="http://schemas.microsoft.com/office/drawing/2014/main" id="{6450F7A1-F47D-DBAF-B1FF-0077AD02915C}"/>
+                    </a:ext>
+                  </a:extLst>
+                </p14:cNvPr>
+                <p14:cNvContentPartPr/>
+                <p14:nvPr/>
+              </p14:nvContentPartPr>
+              <p14:xfrm>
+                <a:off x="2336017" y="3155988"/>
+                <a:ext cx="92880" cy="142200"/>
+              </p14:xfrm>
+            </p:contentPart>
+          </mc:Choice>
+          <mc:Fallback xmlns="">
+            <p:pic>
+              <p:nvPicPr>
+                <p:cNvPr id="47" name="Ink 46">
+                  <a:extLst>
+                    <a:ext uri="{FF2B5EF4-FFF2-40B4-BE49-F238E27FC236}">
+                      <a16:creationId xmlns:a16="http://schemas.microsoft.com/office/drawing/2014/main" id="{6450F7A1-F47D-DBAF-B1FF-0077AD02915C}"/>
+                    </a:ext>
+                  </a:extLst>
+                </p:cNvPr>
+                <p:cNvPicPr/>
+                <p:nvPr/>
+              </p:nvPicPr>
+              <p:blipFill>
+                <a:blip r:embed="rId5"/>
+                <a:stretch>
+                  <a:fillRect/>
+                </a:stretch>
+              </p:blipFill>
+              <p:spPr>
+                <a:xfrm>
+                  <a:off x="2329897" y="3149868"/>
+                  <a:ext cx="105120" cy="154440"/>
+                </a:xfrm>
+                <a:prstGeom prst="rect">
+                  <a:avLst/>
+                </a:prstGeom>
+              </p:spPr>
+            </p:pic>
+          </mc:Fallback>
+        </mc:AlternateContent>
+      </p:grpSp>
+      <p:grpSp>
+        <p:nvGrpSpPr>
+          <p:cNvPr id="48" name="Group 47">
+            <a:extLst>
+              <a:ext uri="{FF2B5EF4-FFF2-40B4-BE49-F238E27FC236}">
+                <a16:creationId xmlns:a16="http://schemas.microsoft.com/office/drawing/2014/main" id="{620AC6E3-7E1D-B527-BAEF-6962903388CF}"/>
+              </a:ext>
+            </a:extLst>
+          </p:cNvPr>
+          <p:cNvGrpSpPr/>
+          <p:nvPr/>
+        </p:nvGrpSpPr>
+        <p:grpSpPr>
+          <a:xfrm>
+            <a:off x="10362812" y="5732252"/>
+            <a:ext cx="212040" cy="142200"/>
+            <a:chOff x="2271217" y="3155988"/>
+            <a:chExt cx="212040" cy="142200"/>
+          </a:xfrm>
+        </p:grpSpPr>
+        <mc:AlternateContent xmlns:mc="http://schemas.openxmlformats.org/markup-compatibility/2006" xmlns:p14="http://schemas.microsoft.com/office/powerpoint/2010/main">
+          <mc:Choice Requires="p14">
+            <p:contentPart p14:bwMode="auto" r:id="rId20">
+              <p14:nvContentPartPr>
+                <p14:cNvPr id="49" name="Ink 48">
+                  <a:extLst>
+                    <a:ext uri="{FF2B5EF4-FFF2-40B4-BE49-F238E27FC236}">
+                      <a16:creationId xmlns:a16="http://schemas.microsoft.com/office/drawing/2014/main" id="{4670658A-99C1-270D-083A-19D688AEB855}"/>
+                    </a:ext>
+                  </a:extLst>
+                </p14:cNvPr>
+                <p14:cNvContentPartPr/>
+                <p14:nvPr/>
+              </p14:nvContentPartPr>
+              <p14:xfrm>
+                <a:off x="2271217" y="3155988"/>
+                <a:ext cx="212040" cy="132120"/>
+              </p14:xfrm>
+            </p:contentPart>
+          </mc:Choice>
+          <mc:Fallback xmlns="">
+            <p:pic>
+              <p:nvPicPr>
+                <p:cNvPr id="49" name="Ink 48">
+                  <a:extLst>
+                    <a:ext uri="{FF2B5EF4-FFF2-40B4-BE49-F238E27FC236}">
+                      <a16:creationId xmlns:a16="http://schemas.microsoft.com/office/drawing/2014/main" id="{4670658A-99C1-270D-083A-19D688AEB855}"/>
+                    </a:ext>
+                  </a:extLst>
+                </p:cNvPr>
+                <p:cNvPicPr/>
+                <p:nvPr/>
+              </p:nvPicPr>
+              <p:blipFill>
+                <a:blip r:embed="rId21"/>
+                <a:stretch>
+                  <a:fillRect/>
+                </a:stretch>
+              </p:blipFill>
+              <p:spPr>
+                <a:xfrm>
+                  <a:off x="2265097" y="3149868"/>
+                  <a:ext cx="224280" cy="144360"/>
+                </a:xfrm>
+                <a:prstGeom prst="rect">
+                  <a:avLst/>
+                </a:prstGeom>
+              </p:spPr>
+            </p:pic>
+          </mc:Fallback>
+        </mc:AlternateContent>
+        <mc:AlternateContent xmlns:mc="http://schemas.openxmlformats.org/markup-compatibility/2006" xmlns:p14="http://schemas.microsoft.com/office/powerpoint/2010/main">
+          <mc:Choice Requires="p14">
+            <p:contentPart p14:bwMode="auto" r:id="rId22">
+              <p14:nvContentPartPr>
+                <p14:cNvPr id="50" name="Ink 49">
+                  <a:extLst>
+                    <a:ext uri="{FF2B5EF4-FFF2-40B4-BE49-F238E27FC236}">
+                      <a16:creationId xmlns:a16="http://schemas.microsoft.com/office/drawing/2014/main" id="{9123E8FE-A63B-57B3-C471-C58F3D8A200F}"/>
+                    </a:ext>
+                  </a:extLst>
+                </p14:cNvPr>
+                <p14:cNvContentPartPr/>
+                <p14:nvPr/>
+              </p14:nvContentPartPr>
+              <p14:xfrm>
+                <a:off x="2336017" y="3155988"/>
+                <a:ext cx="92880" cy="142200"/>
+              </p14:xfrm>
+            </p:contentPart>
+          </mc:Choice>
+          <mc:Fallback xmlns="">
+            <p:pic>
+              <p:nvPicPr>
+                <p:cNvPr id="50" name="Ink 49">
+                  <a:extLst>
+                    <a:ext uri="{FF2B5EF4-FFF2-40B4-BE49-F238E27FC236}">
+                      <a16:creationId xmlns:a16="http://schemas.microsoft.com/office/drawing/2014/main" id="{9123E8FE-A63B-57B3-C471-C58F3D8A200F}"/>
+                    </a:ext>
+                  </a:extLst>
+                </p:cNvPr>
+                <p:cNvPicPr/>
+                <p:nvPr/>
+              </p:nvPicPr>
+              <p:blipFill>
+                <a:blip r:embed="rId23"/>
+                <a:stretch>
+                  <a:fillRect/>
+                </a:stretch>
+              </p:blipFill>
+              <p:spPr>
+                <a:xfrm>
+                  <a:off x="2329897" y="3149868"/>
+                  <a:ext cx="105120" cy="154440"/>
+                </a:xfrm>
+                <a:prstGeom prst="rect">
+                  <a:avLst/>
+                </a:prstGeom>
+              </p:spPr>
+            </p:pic>
+          </mc:Fallback>
+        </mc:AlternateContent>
+      </p:grpSp>
+      <p:grpSp>
+        <p:nvGrpSpPr>
+          <p:cNvPr id="51" name="Group 50">
+            <a:extLst>
+              <a:ext uri="{FF2B5EF4-FFF2-40B4-BE49-F238E27FC236}">
+                <a16:creationId xmlns:a16="http://schemas.microsoft.com/office/drawing/2014/main" id="{37EF02C7-1145-6929-5088-A4ACDAC276A7}"/>
+              </a:ext>
+            </a:extLst>
+          </p:cNvPr>
+          <p:cNvGrpSpPr/>
+          <p:nvPr/>
+        </p:nvGrpSpPr>
+        <p:grpSpPr>
+          <a:xfrm>
+            <a:off x="10574852" y="2991983"/>
+            <a:ext cx="212040" cy="142200"/>
+            <a:chOff x="2271217" y="3155988"/>
+            <a:chExt cx="212040" cy="142200"/>
+          </a:xfrm>
+        </p:grpSpPr>
+        <mc:AlternateContent xmlns:mc="http://schemas.openxmlformats.org/markup-compatibility/2006" xmlns:p14="http://schemas.microsoft.com/office/powerpoint/2010/main">
+          <mc:Choice Requires="p14">
+            <p:contentPart p14:bwMode="auto" r:id="rId24">
+              <p14:nvContentPartPr>
+                <p14:cNvPr id="52" name="Ink 51">
+                  <a:extLst>
+                    <a:ext uri="{FF2B5EF4-FFF2-40B4-BE49-F238E27FC236}">
+                      <a16:creationId xmlns:a16="http://schemas.microsoft.com/office/drawing/2014/main" id="{FE733208-E177-0DF5-A15A-EB71783BDE94}"/>
+                    </a:ext>
+                  </a:extLst>
+                </p14:cNvPr>
+                <p14:cNvContentPartPr/>
+                <p14:nvPr/>
+              </p14:nvContentPartPr>
+              <p14:xfrm>
+                <a:off x="2271217" y="3155988"/>
+                <a:ext cx="212040" cy="132120"/>
+              </p14:xfrm>
+            </p:contentPart>
+          </mc:Choice>
+          <mc:Fallback xmlns="">
+            <p:pic>
+              <p:nvPicPr>
+                <p:cNvPr id="52" name="Ink 51">
+                  <a:extLst>
+                    <a:ext uri="{FF2B5EF4-FFF2-40B4-BE49-F238E27FC236}">
+                      <a16:creationId xmlns:a16="http://schemas.microsoft.com/office/drawing/2014/main" id="{FE733208-E177-0DF5-A15A-EB71783BDE94}"/>
+                    </a:ext>
+                  </a:extLst>
+                </p:cNvPr>
+                <p:cNvPicPr/>
+                <p:nvPr/>
+              </p:nvPicPr>
+              <p:blipFill>
+                <a:blip r:embed="rId25"/>
+                <a:stretch>
+                  <a:fillRect/>
+                </a:stretch>
+              </p:blipFill>
+              <p:spPr>
+                <a:xfrm>
+                  <a:off x="2265097" y="3149868"/>
+                  <a:ext cx="224280" cy="144360"/>
+                </a:xfrm>
+                <a:prstGeom prst="rect">
+                  <a:avLst/>
+                </a:prstGeom>
+              </p:spPr>
+            </p:pic>
+          </mc:Fallback>
+        </mc:AlternateContent>
+        <mc:AlternateContent xmlns:mc="http://schemas.openxmlformats.org/markup-compatibility/2006" xmlns:p14="http://schemas.microsoft.com/office/powerpoint/2010/main">
+          <mc:Choice Requires="p14">
+            <p:contentPart p14:bwMode="auto" r:id="rId26">
+              <p14:nvContentPartPr>
+                <p14:cNvPr id="53" name="Ink 52">
+                  <a:extLst>
+                    <a:ext uri="{FF2B5EF4-FFF2-40B4-BE49-F238E27FC236}">
+                      <a16:creationId xmlns:a16="http://schemas.microsoft.com/office/drawing/2014/main" id="{6AE695FA-A3F9-D36A-01BD-FA40E74D4D7F}"/>
+                    </a:ext>
+                  </a:extLst>
+                </p14:cNvPr>
+                <p14:cNvContentPartPr/>
+                <p14:nvPr/>
+              </p14:nvContentPartPr>
+              <p14:xfrm>
+                <a:off x="2336017" y="3155988"/>
+                <a:ext cx="92880" cy="142200"/>
+              </p14:xfrm>
+            </p:contentPart>
+          </mc:Choice>
+          <mc:Fallback xmlns="">
+            <p:pic>
+              <p:nvPicPr>
+                <p:cNvPr id="53" name="Ink 52">
+                  <a:extLst>
+                    <a:ext uri="{FF2B5EF4-FFF2-40B4-BE49-F238E27FC236}">
+                      <a16:creationId xmlns:a16="http://schemas.microsoft.com/office/drawing/2014/main" id="{6AE695FA-A3F9-D36A-01BD-FA40E74D4D7F}"/>
+                    </a:ext>
+                  </a:extLst>
+                </p:cNvPr>
+                <p:cNvPicPr/>
+                <p:nvPr/>
+              </p:nvPicPr>
+              <p:blipFill>
+                <a:blip r:embed="rId27"/>
+                <a:stretch>
+                  <a:fillRect/>
+                </a:stretch>
+              </p:blipFill>
+              <p:spPr>
+                <a:xfrm>
+                  <a:off x="2329897" y="3149868"/>
+                  <a:ext cx="105120" cy="154440"/>
+                </a:xfrm>
+                <a:prstGeom prst="rect">
+                  <a:avLst/>
+                </a:prstGeom>
+              </p:spPr>
+            </p:pic>
+          </mc:Fallback>
+        </mc:AlternateContent>
+      </p:grpSp>
+      <p:grpSp>
+        <p:nvGrpSpPr>
+          <p:cNvPr id="54" name="Group 53">
+            <a:extLst>
+              <a:ext uri="{FF2B5EF4-FFF2-40B4-BE49-F238E27FC236}">
+                <a16:creationId xmlns:a16="http://schemas.microsoft.com/office/drawing/2014/main" id="{B8E5588D-5240-618F-7DA3-10D4783F188F}"/>
+              </a:ext>
+            </a:extLst>
+          </p:cNvPr>
+          <p:cNvGrpSpPr/>
+          <p:nvPr/>
+        </p:nvGrpSpPr>
+        <p:grpSpPr>
+          <a:xfrm>
+            <a:off x="11260703" y="2491046"/>
+            <a:ext cx="212040" cy="142200"/>
+            <a:chOff x="2271217" y="3155988"/>
+            <a:chExt cx="212040" cy="142200"/>
+          </a:xfrm>
+        </p:grpSpPr>
+        <mc:AlternateContent xmlns:mc="http://schemas.openxmlformats.org/markup-compatibility/2006" xmlns:p14="http://schemas.microsoft.com/office/powerpoint/2010/main">
+          <mc:Choice Requires="p14">
+            <p:contentPart p14:bwMode="auto" r:id="rId28">
+              <p14:nvContentPartPr>
+                <p14:cNvPr id="55" name="Ink 54">
+                  <a:extLst>
+                    <a:ext uri="{FF2B5EF4-FFF2-40B4-BE49-F238E27FC236}">
+                      <a16:creationId xmlns:a16="http://schemas.microsoft.com/office/drawing/2014/main" id="{B0424CEC-2277-2871-AB3D-1AF231607AA6}"/>
+                    </a:ext>
+                  </a:extLst>
+                </p14:cNvPr>
+                <p14:cNvContentPartPr/>
+                <p14:nvPr/>
+              </p14:nvContentPartPr>
+              <p14:xfrm>
+                <a:off x="2271217" y="3155988"/>
+                <a:ext cx="212040" cy="132120"/>
+              </p14:xfrm>
+            </p:contentPart>
+          </mc:Choice>
+          <mc:Fallback xmlns="">
+            <p:pic>
+              <p:nvPicPr>
+                <p:cNvPr id="55" name="Ink 54">
+                  <a:extLst>
+                    <a:ext uri="{FF2B5EF4-FFF2-40B4-BE49-F238E27FC236}">
+                      <a16:creationId xmlns:a16="http://schemas.microsoft.com/office/drawing/2014/main" id="{B0424CEC-2277-2871-AB3D-1AF231607AA6}"/>
+                    </a:ext>
+                  </a:extLst>
+                </p:cNvPr>
+                <p:cNvPicPr/>
+                <p:nvPr/>
+              </p:nvPicPr>
+              <p:blipFill>
+                <a:blip r:embed="rId25"/>
+                <a:stretch>
+                  <a:fillRect/>
+                </a:stretch>
+              </p:blipFill>
+              <p:spPr>
+                <a:xfrm>
+                  <a:off x="2265097" y="3149868"/>
+                  <a:ext cx="224280" cy="144360"/>
+                </a:xfrm>
+                <a:prstGeom prst="rect">
+                  <a:avLst/>
+                </a:prstGeom>
+              </p:spPr>
+            </p:pic>
+          </mc:Fallback>
+        </mc:AlternateContent>
+        <mc:AlternateContent xmlns:mc="http://schemas.openxmlformats.org/markup-compatibility/2006" xmlns:p14="http://schemas.microsoft.com/office/powerpoint/2010/main">
+          <mc:Choice Requires="p14">
+            <p:contentPart p14:bwMode="auto" r:id="rId29">
+              <p14:nvContentPartPr>
+                <p14:cNvPr id="56" name="Ink 55">
+                  <a:extLst>
+                    <a:ext uri="{FF2B5EF4-FFF2-40B4-BE49-F238E27FC236}">
+                      <a16:creationId xmlns:a16="http://schemas.microsoft.com/office/drawing/2014/main" id="{D03EB506-1948-2A44-967B-2484F1F53FEF}"/>
+                    </a:ext>
+                  </a:extLst>
+                </p14:cNvPr>
+                <p14:cNvContentPartPr/>
+                <p14:nvPr/>
+              </p14:nvContentPartPr>
+              <p14:xfrm>
+                <a:off x="2336017" y="3155988"/>
+                <a:ext cx="92880" cy="142200"/>
+              </p14:xfrm>
+            </p:contentPart>
+          </mc:Choice>
+          <mc:Fallback xmlns="">
+            <p:pic>
+              <p:nvPicPr>
+                <p:cNvPr id="56" name="Ink 55">
+                  <a:extLst>
+                    <a:ext uri="{FF2B5EF4-FFF2-40B4-BE49-F238E27FC236}">
+                      <a16:creationId xmlns:a16="http://schemas.microsoft.com/office/drawing/2014/main" id="{D03EB506-1948-2A44-967B-2484F1F53FEF}"/>
+                    </a:ext>
+                  </a:extLst>
+                </p:cNvPr>
+                <p:cNvPicPr/>
+                <p:nvPr/>
+              </p:nvPicPr>
+              <p:blipFill>
+                <a:blip r:embed="rId27"/>
+                <a:stretch>
+                  <a:fillRect/>
+                </a:stretch>
+              </p:blipFill>
+              <p:spPr>
+                <a:xfrm>
+                  <a:off x="2329897" y="3149868"/>
+                  <a:ext cx="105120" cy="154440"/>
+                </a:xfrm>
+                <a:prstGeom prst="rect">
+                  <a:avLst/>
+                </a:prstGeom>
+              </p:spPr>
+            </p:pic>
+          </mc:Fallback>
+        </mc:AlternateContent>
+      </p:grpSp>
+      <p:grpSp>
+        <p:nvGrpSpPr>
+          <p:cNvPr id="57" name="Group 56">
+            <a:extLst>
+              <a:ext uri="{FF2B5EF4-FFF2-40B4-BE49-F238E27FC236}">
+                <a16:creationId xmlns:a16="http://schemas.microsoft.com/office/drawing/2014/main" id="{C0F2E804-CECC-E713-AEA3-8530EB65E576}"/>
+              </a:ext>
+            </a:extLst>
+          </p:cNvPr>
+          <p:cNvGrpSpPr/>
+          <p:nvPr/>
+        </p:nvGrpSpPr>
+        <p:grpSpPr>
+          <a:xfrm>
+            <a:off x="11366723" y="3407996"/>
+            <a:ext cx="212040" cy="142200"/>
+            <a:chOff x="2271217" y="3155988"/>
+            <a:chExt cx="212040" cy="142200"/>
+          </a:xfrm>
+        </p:grpSpPr>
+        <mc:AlternateContent xmlns:mc="http://schemas.openxmlformats.org/markup-compatibility/2006" xmlns:p14="http://schemas.microsoft.com/office/powerpoint/2010/main">
+          <mc:Choice Requires="p14">
+            <p:contentPart p14:bwMode="auto" r:id="rId30">
+              <p14:nvContentPartPr>
+                <p14:cNvPr id="58" name="Ink 57">
+                  <a:extLst>
+                    <a:ext uri="{FF2B5EF4-FFF2-40B4-BE49-F238E27FC236}">
+                      <a16:creationId xmlns:a16="http://schemas.microsoft.com/office/drawing/2014/main" id="{E184F274-067C-4C2E-AF30-4C5B48FE32C2}"/>
+                    </a:ext>
+                  </a:extLst>
+                </p14:cNvPr>
+                <p14:cNvContentPartPr/>
+                <p14:nvPr/>
+              </p14:nvContentPartPr>
+              <p14:xfrm>
+                <a:off x="2271217" y="3155988"/>
+                <a:ext cx="212040" cy="132120"/>
+              </p14:xfrm>
+            </p:contentPart>
+          </mc:Choice>
+          <mc:Fallback xmlns="">
+            <p:pic>
+              <p:nvPicPr>
+                <p:cNvPr id="58" name="Ink 57">
+                  <a:extLst>
+                    <a:ext uri="{FF2B5EF4-FFF2-40B4-BE49-F238E27FC236}">
+                      <a16:creationId xmlns:a16="http://schemas.microsoft.com/office/drawing/2014/main" id="{E184F274-067C-4C2E-AF30-4C5B48FE32C2}"/>
+                    </a:ext>
+                  </a:extLst>
+                </p:cNvPr>
+                <p:cNvPicPr/>
+                <p:nvPr/>
+              </p:nvPicPr>
+              <p:blipFill>
+                <a:blip r:embed="rId25"/>
+                <a:stretch>
+                  <a:fillRect/>
+                </a:stretch>
+              </p:blipFill>
+              <p:spPr>
+                <a:xfrm>
+                  <a:off x="2265097" y="3149868"/>
+                  <a:ext cx="224280" cy="144360"/>
+                </a:xfrm>
+                <a:prstGeom prst="rect">
+                  <a:avLst/>
+                </a:prstGeom>
+              </p:spPr>
+            </p:pic>
+          </mc:Fallback>
+        </mc:AlternateContent>
+        <mc:AlternateContent xmlns:mc="http://schemas.openxmlformats.org/markup-compatibility/2006" xmlns:p14="http://schemas.microsoft.com/office/powerpoint/2010/main">
+          <mc:Choice Requires="p14">
+            <p:contentPart p14:bwMode="auto" r:id="rId31">
+              <p14:nvContentPartPr>
+                <p14:cNvPr id="59" name="Ink 58">
+                  <a:extLst>
+                    <a:ext uri="{FF2B5EF4-FFF2-40B4-BE49-F238E27FC236}">
+                      <a16:creationId xmlns:a16="http://schemas.microsoft.com/office/drawing/2014/main" id="{47908C50-437D-4EEC-EDBD-F6416A0CD29C}"/>
+                    </a:ext>
+                  </a:extLst>
+                </p14:cNvPr>
+                <p14:cNvContentPartPr/>
+                <p14:nvPr/>
+              </p14:nvContentPartPr>
+              <p14:xfrm>
+                <a:off x="2336017" y="3155988"/>
+                <a:ext cx="92880" cy="142200"/>
+              </p14:xfrm>
+            </p:contentPart>
+          </mc:Choice>
+          <mc:Fallback xmlns="">
+            <p:pic>
+              <p:nvPicPr>
+                <p:cNvPr id="59" name="Ink 58">
+                  <a:extLst>
+                    <a:ext uri="{FF2B5EF4-FFF2-40B4-BE49-F238E27FC236}">
+                      <a16:creationId xmlns:a16="http://schemas.microsoft.com/office/drawing/2014/main" id="{47908C50-437D-4EEC-EDBD-F6416A0CD29C}"/>
+                    </a:ext>
+                  </a:extLst>
+                </p:cNvPr>
+                <p:cNvPicPr/>
+                <p:nvPr/>
+              </p:nvPicPr>
+              <p:blipFill>
+                <a:blip r:embed="rId27"/>
+                <a:stretch>
+                  <a:fillRect/>
+                </a:stretch>
+              </p:blipFill>
+              <p:spPr>
+                <a:xfrm>
+                  <a:off x="2329897" y="3149868"/>
+                  <a:ext cx="105120" cy="154440"/>
+                </a:xfrm>
+                <a:prstGeom prst="rect">
+                  <a:avLst/>
+                </a:prstGeom>
+              </p:spPr>
+            </p:pic>
+          </mc:Fallback>
+        </mc:AlternateContent>
+      </p:grpSp>
+    </p:spTree>
+    <p:extLst>
+      <p:ext uri="{BB962C8B-B14F-4D97-AF65-F5344CB8AC3E}">
+        <p14:creationId xmlns:p14="http://schemas.microsoft.com/office/powerpoint/2010/main" val="2300712595"/>
+      </p:ext>
+    </p:extLst>
+  </p:cSld>
+  <p:clrMapOvr>
+    <a:masterClrMapping/>
+  </p:clrMapOvr>
+</p:sld>
+</file>
+
+<file path=ppt/slides/slide6.xml><?xml version="1.0" encoding="utf-8"?>
 <p:sld xmlns:a="http://schemas.openxmlformats.org/drawingml/2006/main" xmlns:r="http://schemas.openxmlformats.org/officeDocument/2006/relationships" xmlns:p="http://schemas.openxmlformats.org/presentationml/2006/main">
   <p:cSld>
     <p:spTree>
@@ -10807,7 +13657,7 @@
         </p:blipFill>
         <p:spPr>
           <a:xfrm>
-            <a:off x="4709161" y="2336916"/>
+            <a:off x="4691256" y="2312848"/>
             <a:ext cx="7500744" cy="3990202"/>
           </a:xfrm>
           <a:prstGeom prst="rect">
@@ -10828,7 +13678,7 @@
 </p:sld>
 </file>
 
-<file path=ppt/slides/slide6.xml><?xml version="1.0" encoding="utf-8"?>
+<file path=ppt/slides/slide7.xml><?xml version="1.0" encoding="utf-8"?>
 <p:sld xmlns:a="http://schemas.openxmlformats.org/drawingml/2006/main" xmlns:r="http://schemas.openxmlformats.org/officeDocument/2006/relationships" xmlns:p="http://schemas.openxmlformats.org/presentationml/2006/main">
   <p:cSld>
     <p:spTree>
@@ -11187,7 +14037,7 @@
 </p:sld>
 </file>
 
-<file path=ppt/slides/slide7.xml><?xml version="1.0" encoding="utf-8"?>
+<file path=ppt/slides/slide8.xml><?xml version="1.0" encoding="utf-8"?>
 <p:sld xmlns:a="http://schemas.openxmlformats.org/drawingml/2006/main" xmlns:r="http://schemas.openxmlformats.org/officeDocument/2006/relationships" xmlns:p="http://schemas.openxmlformats.org/presentationml/2006/main">
   <p:cSld>
     <p:spTree>
@@ -11210,6 +14060,36 @@
           <a:chExt cx="0" cy="0"/>
         </a:xfrm>
       </p:grpSpPr>
+      <p:pic>
+        <p:nvPicPr>
+          <p:cNvPr id="10" name="Picture 9">
+            <a:extLst>
+              <a:ext uri="{FF2B5EF4-FFF2-40B4-BE49-F238E27FC236}">
+                <a16:creationId xmlns:a16="http://schemas.microsoft.com/office/drawing/2014/main" id="{A59CFAF1-30AA-DB63-82C1-347EC43967D1}"/>
+              </a:ext>
+            </a:extLst>
+          </p:cNvPr>
+          <p:cNvPicPr>
+            <a:picLocks noChangeAspect="1"/>
+          </p:cNvPicPr>
+          <p:nvPr/>
+        </p:nvPicPr>
+        <p:blipFill>
+          <a:blip r:embed="rId2"/>
+          <a:stretch>
+            <a:fillRect/>
+          </a:stretch>
+        </p:blipFill>
+        <p:spPr>
+          <a:xfrm>
+            <a:off x="1396180" y="718954"/>
+            <a:ext cx="9046756" cy="5740558"/>
+          </a:xfrm>
+          <a:prstGeom prst="rect">
+            <a:avLst/>
+          </a:prstGeom>
+        </p:spPr>
+      </p:pic>
       <p:sp>
         <p:nvSpPr>
           <p:cNvPr id="9" name="TextBox 8">
@@ -11269,9 +14149,9 @@
           </a:p>
         </p:txBody>
       </p:sp>
-      <mc:AlternateContent xmlns:mc="http://schemas.openxmlformats.org/markup-compatibility/2006">
-        <mc:Choice xmlns:p14="http://schemas.microsoft.com/office/powerpoint/2010/main" Requires="p14">
-          <p:contentPart p14:bwMode="auto" r:id="rId2">
+      <mc:AlternateContent xmlns:mc="http://schemas.openxmlformats.org/markup-compatibility/2006" xmlns:p14="http://schemas.microsoft.com/office/powerpoint/2010/main">
+        <mc:Choice Requires="p14">
+          <p:contentPart p14:bwMode="auto" r:id="rId3">
             <p14:nvContentPartPr>
               <p14:cNvPr id="5" name="Ink 4">
                 <a:extLst>
@@ -11289,7 +14169,7 @@
             </p14:xfrm>
           </p:contentPart>
         </mc:Choice>
-        <mc:Fallback>
+        <mc:Fallback xmlns="">
           <p:pic>
             <p:nvPicPr>
               <p:cNvPr id="5" name="Ink 4">
@@ -11303,7 +14183,7 @@
               <p:nvPr/>
             </p:nvPicPr>
             <p:blipFill>
-              <a:blip r:embed="rId3"/>
+              <a:blip r:embed="rId4"/>
               <a:stretch>
                 <a:fillRect/>
               </a:stretch>
@@ -11320,36 +14200,6 @@
           </p:pic>
         </mc:Fallback>
       </mc:AlternateContent>
-      <p:pic>
-        <p:nvPicPr>
-          <p:cNvPr id="10" name="Picture 9">
-            <a:extLst>
-              <a:ext uri="{FF2B5EF4-FFF2-40B4-BE49-F238E27FC236}">
-                <a16:creationId xmlns:a16="http://schemas.microsoft.com/office/drawing/2014/main" id="{A59CFAF1-30AA-DB63-82C1-347EC43967D1}"/>
-              </a:ext>
-            </a:extLst>
-          </p:cNvPr>
-          <p:cNvPicPr>
-            <a:picLocks noChangeAspect="1"/>
-          </p:cNvPicPr>
-          <p:nvPr/>
-        </p:nvPicPr>
-        <p:blipFill>
-          <a:blip r:embed="rId4"/>
-          <a:stretch>
-            <a:fillRect/>
-          </a:stretch>
-        </p:blipFill>
-        <p:spPr>
-          <a:xfrm>
-            <a:off x="2611885" y="1097281"/>
-            <a:ext cx="8460316" cy="5368436"/>
-          </a:xfrm>
-          <a:prstGeom prst="rect">
-            <a:avLst/>
-          </a:prstGeom>
-        </p:spPr>
-      </p:pic>
     </p:spTree>
     <p:extLst>
       <p:ext uri="{BB962C8B-B14F-4D97-AF65-F5344CB8AC3E}">
@@ -11363,7 +14213,7 @@
 </p:sld>
 </file>
 
-<file path=ppt/slides/slide8.xml><?xml version="1.0" encoding="utf-8"?>
+<file path=ppt/slides/slide9.xml><?xml version="1.0" encoding="utf-8"?>
 <p:sld xmlns:a="http://schemas.openxmlformats.org/drawingml/2006/main" xmlns:r="http://schemas.openxmlformats.org/officeDocument/2006/relationships" xmlns:p="http://schemas.openxmlformats.org/presentationml/2006/main">
   <p:cSld>
     <p:spTree>
@@ -11475,8 +14325,8 @@
           </a:prstGeom>
         </p:spPr>
       </p:pic>
-      <mc:AlternateContent xmlns:mc="http://schemas.openxmlformats.org/markup-compatibility/2006">
-        <mc:Choice xmlns:p14="http://schemas.microsoft.com/office/powerpoint/2010/main" Requires="p14">
+      <mc:AlternateContent xmlns:mc="http://schemas.openxmlformats.org/markup-compatibility/2006" xmlns:p14="http://schemas.microsoft.com/office/powerpoint/2010/main">
+        <mc:Choice Requires="p14">
           <p:contentPart p14:bwMode="auto" r:id="rId3">
             <p14:nvContentPartPr>
               <p14:cNvPr id="5" name="Ink 4">
@@ -11495,7 +14345,7 @@
             </p14:xfrm>
           </p:contentPart>
         </mc:Choice>
-        <mc:Fallback>
+        <mc:Fallback xmlns="">
           <p:pic>
             <p:nvPicPr>
               <p:cNvPr id="5" name="Ink 4">
@@ -11556,8 +14406,8 @@
           </a:prstGeom>
         </p:spPr>
       </p:pic>
-      <mc:AlternateContent xmlns:mc="http://schemas.openxmlformats.org/markup-compatibility/2006">
-        <mc:Choice xmlns:p14="http://schemas.microsoft.com/office/powerpoint/2010/main" Requires="p14">
+      <mc:AlternateContent xmlns:mc="http://schemas.openxmlformats.org/markup-compatibility/2006" xmlns:p14="http://schemas.microsoft.com/office/powerpoint/2010/main">
+        <mc:Choice Requires="p14">
           <p:contentPart p14:bwMode="auto" r:id="rId6">
             <p14:nvContentPartPr>
               <p14:cNvPr id="11" name="Ink 10">
@@ -11576,7 +14426,7 @@
             </p14:xfrm>
           </p:contentPart>
         </mc:Choice>
-        <mc:Fallback>
+        <mc:Fallback xmlns="">
           <p:pic>
             <p:nvPicPr>
               <p:cNvPr id="11" name="Ink 10">
@@ -11607,8 +14457,8 @@
           </p:pic>
         </mc:Fallback>
       </mc:AlternateContent>
-      <mc:AlternateContent xmlns:mc="http://schemas.openxmlformats.org/markup-compatibility/2006">
-        <mc:Choice xmlns:p14="http://schemas.microsoft.com/office/powerpoint/2010/main" Requires="p14">
+      <mc:AlternateContent xmlns:mc="http://schemas.openxmlformats.org/markup-compatibility/2006" xmlns:p14="http://schemas.microsoft.com/office/powerpoint/2010/main">
+        <mc:Choice Requires="p14">
           <p:contentPart p14:bwMode="auto" r:id="rId8">
             <p14:nvContentPartPr>
               <p14:cNvPr id="12" name="Ink 11">
@@ -11627,7 +14477,7 @@
             </p14:xfrm>
           </p:contentPart>
         </mc:Choice>
-        <mc:Fallback>
+        <mc:Fallback xmlns="">
           <p:pic>
             <p:nvPicPr>
               <p:cNvPr id="12" name="Ink 11">
@@ -11658,8 +14508,8 @@
           </p:pic>
         </mc:Fallback>
       </mc:AlternateContent>
-      <mc:AlternateContent xmlns:mc="http://schemas.openxmlformats.org/markup-compatibility/2006">
-        <mc:Choice xmlns:p14="http://schemas.microsoft.com/office/powerpoint/2010/main" Requires="p14">
+      <mc:AlternateContent xmlns:mc="http://schemas.openxmlformats.org/markup-compatibility/2006" xmlns:p14="http://schemas.microsoft.com/office/powerpoint/2010/main">
+        <mc:Choice Requires="p14">
           <p:contentPart p14:bwMode="auto" r:id="rId10">
             <p14:nvContentPartPr>
               <p14:cNvPr id="13" name="Ink 12">
@@ -11678,7 +14528,7 @@
             </p14:xfrm>
           </p:contentPart>
         </mc:Choice>
-        <mc:Fallback>
+        <mc:Fallback xmlns="">
           <p:pic>
             <p:nvPicPr>
               <p:cNvPr id="13" name="Ink 12">
@@ -11709,8 +14559,8 @@
           </p:pic>
         </mc:Fallback>
       </mc:AlternateContent>
-      <mc:AlternateContent xmlns:mc="http://schemas.openxmlformats.org/markup-compatibility/2006">
-        <mc:Choice xmlns:p14="http://schemas.microsoft.com/office/powerpoint/2010/main" Requires="p14">
+      <mc:AlternateContent xmlns:mc="http://schemas.openxmlformats.org/markup-compatibility/2006" xmlns:p14="http://schemas.microsoft.com/office/powerpoint/2010/main">
+        <mc:Choice Requires="p14">
           <p:contentPart p14:bwMode="auto" r:id="rId12">
             <p14:nvContentPartPr>
               <p14:cNvPr id="14" name="Ink 13">
@@ -11729,7 +14579,7 @@
             </p14:xfrm>
           </p:contentPart>
         </mc:Choice>
-        <mc:Fallback>
+        <mc:Fallback xmlns="">
           <p:pic>
             <p:nvPicPr>
               <p:cNvPr id="14" name="Ink 13">
@@ -11760,8 +14610,8 @@
           </p:pic>
         </mc:Fallback>
       </mc:AlternateContent>
-      <mc:AlternateContent xmlns:mc="http://schemas.openxmlformats.org/markup-compatibility/2006">
-        <mc:Choice xmlns:p14="http://schemas.microsoft.com/office/powerpoint/2010/main" Requires="p14">
+      <mc:AlternateContent xmlns:mc="http://schemas.openxmlformats.org/markup-compatibility/2006" xmlns:p14="http://schemas.microsoft.com/office/powerpoint/2010/main">
+        <mc:Choice Requires="p14">
           <p:contentPart p14:bwMode="auto" r:id="rId14">
             <p14:nvContentPartPr>
               <p14:cNvPr id="15" name="Ink 14">
@@ -11780,7 +14630,7 @@
             </p14:xfrm>
           </p:contentPart>
         </mc:Choice>
-        <mc:Fallback>
+        <mc:Fallback xmlns="">
           <p:pic>
             <p:nvPicPr>
               <p:cNvPr id="15" name="Ink 14">
@@ -11811,8 +14661,8 @@
           </p:pic>
         </mc:Fallback>
       </mc:AlternateContent>
-      <mc:AlternateContent xmlns:mc="http://schemas.openxmlformats.org/markup-compatibility/2006">
-        <mc:Choice xmlns:p14="http://schemas.microsoft.com/office/powerpoint/2010/main" Requires="p14">
+      <mc:AlternateContent xmlns:mc="http://schemas.openxmlformats.org/markup-compatibility/2006" xmlns:p14="http://schemas.microsoft.com/office/powerpoint/2010/main">
+        <mc:Choice Requires="p14">
           <p:contentPart p14:bwMode="auto" r:id="rId16">
             <p14:nvContentPartPr>
               <p14:cNvPr id="16" name="Ink 15">
@@ -11831,7 +14681,7 @@
             </p14:xfrm>
           </p:contentPart>
         </mc:Choice>
-        <mc:Fallback>
+        <mc:Fallback xmlns="">
           <p:pic>
             <p:nvPicPr>
               <p:cNvPr id="16" name="Ink 15">
@@ -11862,8 +14712,8 @@
           </p:pic>
         </mc:Fallback>
       </mc:AlternateContent>
-      <mc:AlternateContent xmlns:mc="http://schemas.openxmlformats.org/markup-compatibility/2006">
-        <mc:Choice xmlns:p14="http://schemas.microsoft.com/office/powerpoint/2010/main" Requires="p14">
+      <mc:AlternateContent xmlns:mc="http://schemas.openxmlformats.org/markup-compatibility/2006" xmlns:p14="http://schemas.microsoft.com/office/powerpoint/2010/main">
+        <mc:Choice Requires="p14">
           <p:contentPart p14:bwMode="auto" r:id="rId18">
             <p14:nvContentPartPr>
               <p14:cNvPr id="17" name="Ink 16">
@@ -11882,7 +14732,7 @@
             </p14:xfrm>
           </p:contentPart>
         </mc:Choice>
-        <mc:Fallback>
+        <mc:Fallback xmlns="">
           <p:pic>
             <p:nvPicPr>
               <p:cNvPr id="17" name="Ink 16">
@@ -11917,270 +14767,6 @@
     <p:extLst>
       <p:ext uri="{BB962C8B-B14F-4D97-AF65-F5344CB8AC3E}">
         <p14:creationId xmlns:p14="http://schemas.microsoft.com/office/powerpoint/2010/main" val="2718215824"/>
-      </p:ext>
-    </p:extLst>
-  </p:cSld>
-  <p:clrMapOvr>
-    <a:masterClrMapping/>
-  </p:clrMapOvr>
-</p:sld>
-</file>
-
-<file path=ppt/slides/slide9.xml><?xml version="1.0" encoding="utf-8"?>
-<p:sld xmlns:a="http://schemas.openxmlformats.org/drawingml/2006/main" xmlns:r="http://schemas.openxmlformats.org/officeDocument/2006/relationships" xmlns:p="http://schemas.openxmlformats.org/presentationml/2006/main">
-  <p:cSld>
-    <p:spTree>
-      <p:nvGrpSpPr>
-        <p:cNvPr id="1" name="">
-          <a:extLst>
-            <a:ext uri="{FF2B5EF4-FFF2-40B4-BE49-F238E27FC236}">
-              <a16:creationId xmlns:a16="http://schemas.microsoft.com/office/drawing/2014/main" id="{0D18ACBA-A707-9C6E-493D-108DE24CB8E8}"/>
-            </a:ext>
-          </a:extLst>
-        </p:cNvPr>
-        <p:cNvGrpSpPr/>
-        <p:nvPr/>
-      </p:nvGrpSpPr>
-      <p:grpSpPr>
-        <a:xfrm>
-          <a:off x="0" y="0"/>
-          <a:ext cx="0" cy="0"/>
-          <a:chOff x="0" y="0"/>
-          <a:chExt cx="0" cy="0"/>
-        </a:xfrm>
-      </p:grpSpPr>
-      <p:pic>
-        <p:nvPicPr>
-          <p:cNvPr id="6" name="Picture 5">
-            <a:extLst>
-              <a:ext uri="{FF2B5EF4-FFF2-40B4-BE49-F238E27FC236}">
-                <a16:creationId xmlns:a16="http://schemas.microsoft.com/office/drawing/2014/main" id="{08866362-1E0A-CFC7-79EA-01BBAD24496E}"/>
-              </a:ext>
-            </a:extLst>
-          </p:cNvPr>
-          <p:cNvPicPr>
-            <a:picLocks noChangeAspect="1"/>
-          </p:cNvPicPr>
-          <p:nvPr/>
-        </p:nvPicPr>
-        <p:blipFill>
-          <a:blip r:embed="rId2"/>
-          <a:stretch>
-            <a:fillRect/>
-          </a:stretch>
-        </p:blipFill>
-        <p:spPr>
-          <a:xfrm>
-            <a:off x="1401855" y="4392848"/>
-            <a:ext cx="2278097" cy="2227472"/>
-          </a:xfrm>
-          <a:prstGeom prst="rect">
-            <a:avLst/>
-          </a:prstGeom>
-        </p:spPr>
-      </p:pic>
-      <mc:AlternateContent xmlns:mc="http://schemas.openxmlformats.org/markup-compatibility/2006">
-        <mc:Choice xmlns:p14="http://schemas.microsoft.com/office/powerpoint/2010/main" Requires="p14">
-          <p:contentPart p14:bwMode="auto" r:id="rId3">
-            <p14:nvContentPartPr>
-              <p14:cNvPr id="5" name="Ink 4">
-                <a:extLst>
-                  <a:ext uri="{FF2B5EF4-FFF2-40B4-BE49-F238E27FC236}">
-                    <a16:creationId xmlns:a16="http://schemas.microsoft.com/office/drawing/2014/main" id="{3AB2178F-44D6-DBAA-6A0E-BF51D853F876}"/>
-                  </a:ext>
-                </a:extLst>
-              </p14:cNvPr>
-              <p14:cNvContentPartPr/>
-              <p14:nvPr/>
-            </p14:nvContentPartPr>
-            <p14:xfrm>
-              <a:off x="11292624" y="602496"/>
-              <a:ext cx="581400" cy="37800"/>
-            </p14:xfrm>
-          </p:contentPart>
-        </mc:Choice>
-        <mc:Fallback>
-          <p:pic>
-            <p:nvPicPr>
-              <p:cNvPr id="5" name="Ink 4">
-                <a:extLst>
-                  <a:ext uri="{FF2B5EF4-FFF2-40B4-BE49-F238E27FC236}">
-                    <a16:creationId xmlns:a16="http://schemas.microsoft.com/office/drawing/2014/main" id="{3AB2178F-44D6-DBAA-6A0E-BF51D853F876}"/>
-                  </a:ext>
-                </a:extLst>
-              </p:cNvPr>
-              <p:cNvPicPr/>
-              <p:nvPr/>
-            </p:nvPicPr>
-            <p:blipFill>
-              <a:blip r:embed="rId4"/>
-              <a:stretch>
-                <a:fillRect/>
-              </a:stretch>
-            </p:blipFill>
-            <p:spPr>
-              <a:xfrm>
-                <a:off x="11274624" y="584323"/>
-                <a:ext cx="617040" cy="73783"/>
-              </a:xfrm>
-              <a:prstGeom prst="rect">
-                <a:avLst/>
-              </a:prstGeom>
-            </p:spPr>
-          </p:pic>
-        </mc:Fallback>
-      </mc:AlternateContent>
-      <p:sp>
-        <p:nvSpPr>
-          <p:cNvPr id="3" name="TextBox 2">
-            <a:extLst>
-              <a:ext uri="{FF2B5EF4-FFF2-40B4-BE49-F238E27FC236}">
-                <a16:creationId xmlns:a16="http://schemas.microsoft.com/office/drawing/2014/main" id="{FEAD36B0-F012-6FA4-E4FF-3DFF4D221BD4}"/>
-              </a:ext>
-            </a:extLst>
-          </p:cNvPr>
-          <p:cNvSpPr txBox="1"/>
-          <p:nvPr/>
-        </p:nvSpPr>
-        <p:spPr>
-          <a:xfrm>
-            <a:off x="0" y="1093032"/>
-            <a:ext cx="10204704" cy="1938992"/>
-          </a:xfrm>
-          <a:prstGeom prst="rect">
-            <a:avLst/>
-          </a:prstGeom>
-          <a:noFill/>
-        </p:spPr>
-        <p:txBody>
-          <a:bodyPr wrap="square">
-            <a:spAutoFit/>
-          </a:bodyPr>
-          <a:lstStyle/>
-          <a:p>
-            <a:r>
-              <a:rPr lang="en-US" sz="2400" b="1" dirty="0">
-                <a:solidFill>
-                  <a:schemeClr val="accent6">
-                    <a:lumMod val="60000"/>
-                    <a:lumOff val="40000"/>
-                  </a:schemeClr>
-                </a:solidFill>
-              </a:rPr>
-              <a:t>Some Use Cases of Vector DB:</a:t>
-            </a:r>
-          </a:p>
-          <a:p>
-            <a:endParaRPr lang="en-US" sz="2400" b="1" dirty="0">
-              <a:solidFill>
-                <a:schemeClr val="accent6">
-                  <a:lumMod val="60000"/>
-                  <a:lumOff val="40000"/>
-                </a:schemeClr>
-              </a:solidFill>
-            </a:endParaRPr>
-          </a:p>
-          <a:p>
-            <a:pPr marL="342900" indent="-342900">
-              <a:buFont typeface="Arial" panose="020B0604020202020204" pitchFamily="34" charset="0"/>
-              <a:buChar char="•"/>
-            </a:pPr>
-            <a:r>
-              <a:rPr lang="en-US" sz="2400" dirty="0">
-                <a:solidFill>
-                  <a:schemeClr val="accent6">
-                    <a:lumMod val="60000"/>
-                    <a:lumOff val="40000"/>
-                  </a:schemeClr>
-                </a:solidFill>
-              </a:rPr>
-              <a:t>Document search  </a:t>
-            </a:r>
-          </a:p>
-          <a:p>
-            <a:pPr marL="342900" indent="-342900">
-              <a:buFont typeface="Arial" panose="020B0604020202020204" pitchFamily="34" charset="0"/>
-              <a:buChar char="•"/>
-            </a:pPr>
-            <a:r>
-              <a:rPr lang="en-US" sz="2400" dirty="0">
-                <a:solidFill>
-                  <a:schemeClr val="accent6">
-                    <a:lumMod val="60000"/>
-                    <a:lumOff val="40000"/>
-                  </a:schemeClr>
-                </a:solidFill>
-              </a:rPr>
-              <a:t>Recommendation systems – (“Recommend me good </a:t>
-            </a:r>
-            <a:r>
-              <a:rPr lang="en-US" sz="2400" b="1" u="sng" dirty="0">
-                <a:solidFill>
-                  <a:schemeClr val="accent6">
-                    <a:lumMod val="60000"/>
-                    <a:lumOff val="40000"/>
-                  </a:schemeClr>
-                </a:solidFill>
-              </a:rPr>
-              <a:t>scary</a:t>
-            </a:r>
-            <a:r>
-              <a:rPr lang="en-US" sz="2400" dirty="0">
-                <a:solidFill>
-                  <a:schemeClr val="accent6">
-                    <a:lumMod val="60000"/>
-                    <a:lumOff val="40000"/>
-                  </a:schemeClr>
-                </a:solidFill>
-              </a:rPr>
-              <a:t> </a:t>
-            </a:r>
-            <a:r>
-              <a:rPr lang="en-US" sz="2400" b="1" u="sng" dirty="0">
-                <a:solidFill>
-                  <a:schemeClr val="accent6">
-                    <a:lumMod val="60000"/>
-                    <a:lumOff val="40000"/>
-                  </a:schemeClr>
-                </a:solidFill>
-              </a:rPr>
-              <a:t>flicks</a:t>
-            </a:r>
-            <a:r>
-              <a:rPr lang="en-US" sz="2400" dirty="0">
-                <a:solidFill>
-                  <a:schemeClr val="accent6">
-                    <a:lumMod val="60000"/>
-                    <a:lumOff val="40000"/>
-                  </a:schemeClr>
-                </a:solidFill>
-              </a:rPr>
-              <a:t> ”)</a:t>
-            </a:r>
-          </a:p>
-          <a:p>
-            <a:pPr marL="342900" indent="-342900">
-              <a:buFont typeface="Arial" panose="020B0604020202020204" pitchFamily="34" charset="0"/>
-              <a:buChar char="•"/>
-            </a:pPr>
-            <a:r>
-              <a:rPr lang="en-US" sz="2400" dirty="0">
-                <a:solidFill>
-                  <a:schemeClr val="accent6">
-                    <a:lumMod val="60000"/>
-                    <a:lumOff val="40000"/>
-                  </a:schemeClr>
-                </a:solidFill>
-              </a:rPr>
-              <a:t>RAG pipelines</a:t>
-            </a:r>
-          </a:p>
-        </p:txBody>
-      </p:sp>
-    </p:spTree>
-    <p:extLst>
-      <p:ext uri="{BB962C8B-B14F-4D97-AF65-F5344CB8AC3E}">
-        <p14:creationId xmlns:p14="http://schemas.microsoft.com/office/powerpoint/2010/main" val="2547235685"/>
       </p:ext>
     </p:extLst>
   </p:cSld>
